--- a/interview_materials/HIRAKU_Global_Interview_Liu.pptx
+++ b/interview_materials/HIRAKU_Global_Interview_Liu.pptx
@@ -512,37 +512,25 @@
           <a:lstStyle/>
           <a:p>
             <a:r>
-              <a:t>[SLIDE 1 — TITLE — ~25 seconds]</a:t>
+              <a:t>[SLIDE 1 — TITLE — ~25s]</a:t>
             </a:r>
           </a:p>
           <a:p/>
           <a:p>
             <a:r>
-              <a:t>Good morning, and thank you for this opportunity.</a:t>
+              <a:t>Good morning. My name is Liu Haiqiang. I am a tenure-track Lecturer at Yamaguchi University, working on urban thermal environment.</a:t>
             </a:r>
           </a:p>
           <a:p/>
           <a:p>
             <a:r>
-              <a:t>My name is Liu Haiqiang. I am a tenure-track Lecturer at the Graduate School of Sciences and Technology for Innovation at Yamaguchi University.</a:t>
+              <a:t>In one sentence — I bridge urban thermal research with international collaboration, regional policy, and social implementation.</a:t>
             </a:r>
           </a:p>
           <a:p/>
           <a:p>
             <a:r>
-              <a:t>The title of my talk today is "Bridging Cities, Climate, and People."</a:t>
-            </a:r>
-          </a:p>
-          <a:p/>
-          <a:p>
-            <a:r>
-              <a:t>In one sentence: I connect urban thermal environment research with international collaboration, regional policy, and social implementation.</a:t>
-            </a:r>
-          </a:p>
-          <a:p/>
-          <a:p>
-            <a:r>
-              <a:t>In the next ten minutes, I would like to share why my background fits HIRAKU-Global, and how HIRAKU-Global can help me grow into an international research leader anchored at Yamaguchi University.</a:t>
+              <a:t>In ten minutes, I will show you why my background fits HIRAKU-Global.</a:t>
             </a:r>
           </a:p>
           <a:p/>
@@ -613,43 +601,31 @@
           <a:lstStyle/>
           <a:p>
             <a:r>
-              <a:t>[SLIDE 10 — ASPIRATIONS — ~70 seconds]</a:t>
+              <a:t>[SLIDE 10 — ASPIRATIONS — ~60s]</a:t>
             </a:r>
           </a:p>
           <a:p/>
           <a:p>
             <a:r>
-              <a:t>During HIRAKU-Global, I will align every deliverable with the program's 3I framework — Innovative, Influential, Impactful.</a:t>
+              <a:t>What will I do during and after HIRAKU-Global?</a:t>
             </a:r>
           </a:p>
           <a:p/>
           <a:p>
             <a:r>
-              <a:t>For Innovative — I will produce the cross-scale wind × GBI × pedestrian-heat mechanism paper, and the reproducible city-to-corridor diagnostic workflow.</a:t>
+              <a:t>Aligned with the 3I framework. Innovative — the cross-scale mechanism paper and a reusable diagnostic workflow. Influential — continued Q1 publications and the Kakenhi path. Impactful — deliverables to Yamaguchi, Ube, and Matsue.</a:t>
             </a:r>
           </a:p>
           <a:p/>
           <a:p>
             <a:r>
-              <a:t>For Influential — continued Q1 publications, and the Kakenhi path: Kiban C in autumn 2026, building toward Kiban B during HIRAKU.</a:t>
+              <a:t>After tenure — and this is critical — I will be a long-term anchor at Yamaguchi University. The rings on the right show the path: from my lab, to the region, to Western Japan as an urban thermal hub, to an Asia platform, to a Local-to-Global model.</a:t>
             </a:r>
           </a:p>
           <a:p/>
           <a:p>
             <a:r>
-              <a:t>For Impactful — deliverables to Yamaguchi, Ube, and Matsue municipalities, continuing the MLIT EBPM-aligned policy translation that I started in Kumamoto.</a:t>
-            </a:r>
-          </a:p>
-          <a:p/>
-          <a:p>
-            <a:r>
-              <a:t>After tenure — and this is important — I want to be a long-term anchor at Yamaguchi University, not a short-term visitor. The five concentric rings on the right show the path: from my lab, to the Chugoku-Shikoku region, to becoming Western Japan's urban thermal research hub, to an Asia-wide platform, to a Local-to-Global model that other aging climate cities can adopt.</a:t>
-            </a:r>
-          </a:p>
-          <a:p/>
-          <a:p>
-            <a:r>
-              <a:t>But I do not see myself only as a recipient. I want to give back. A Year-4 international workshop hosted at Yamaguchi. A standing China-Japan academic bridge for the HIRAKU community. Teaching, mentoring, and supervising graduate students — I have already developed one such student into a doctoral researcher at Tsinghua University. And active service to the department, the region, and the wider HIRAKU community.</a:t>
+              <a:t>I am not only a recipient. I will give back — an international workshop at Yamaguchi, a China–Japan academic bridge, teaching and mentoring graduate students, and active service to the department and the region.</a:t>
             </a:r>
           </a:p>
           <a:p/>
@@ -720,7 +696,7 @@
           <a:lstStyle/>
           <a:p>
             <a:r>
-              <a:t>[SLIDE 11 — CLOSING — ~30 seconds]</a:t>
+              <a:t>[SLIDE 11 — CLOSING — ~25s]</a:t>
             </a:r>
           </a:p>
           <a:p/>
@@ -732,23 +708,13 @@
           <a:p/>
           <a:p>
             <a:r>
-              <a:t>Four foundations — all already in motion.</a:t>
-            </a:r>
-          </a:p>
-          <a:p>
-            <a:r>
-              <a:t>Quality — fifteen papers, three Q1, all led by me. Bridge — Sakura, Zhejiang Carbon-Neutral Center, five-country forum. Funding — approximately one hundred million yen total, and ranked number one of thirteen at Yamaguchi. Implementation — Kumamoto green-infrastructure policy, cited by MLIT as an EBPM case.</a:t>
+              <a:t>Four foundations — already in motion. Quality. Bridge. Funding. Implementation.</a:t>
             </a:r>
           </a:p>
           <a:p/>
           <a:p>
             <a:r>
-              <a:t>And four commitments — what I will do at Yamaguchi University.</a:t>
-            </a:r>
-          </a:p>
-          <a:p>
-            <a:r>
-              <a:t>First, deliver the research: papers, the workflow, and the Kakenhi Kiban B. Second, teach and mentor students — including supervision through to publication. Third, contribute to the department and to faculty collaboration, not work alone. Fourth, commit long-term — I am here as an anchor, not a passenger.</a:t>
+              <a:t>And four commitments — research, teaching, collaboration, long-term anchor.</a:t>
             </a:r>
           </a:p>
           <a:p/>
@@ -831,43 +797,31 @@
           <a:lstStyle/>
           <a:p>
             <a:r>
-              <a:t>[SLIDE 2 — PROFILE — ~50 seconds]</a:t>
+              <a:t>[SLIDE 2 — PROFILE — ~45s]</a:t>
             </a:r>
           </a:p>
           <a:p/>
           <a:p>
             <a:r>
-              <a:t>Before I talk about research, let me briefly say who I am — because the bridge between Japan and China runs through my entire career.</a:t>
+              <a:t>Briefly — who I am.</a:t>
             </a:r>
           </a:p>
           <a:p/>
           <a:p>
             <a:r>
-              <a:t>I was trained in Japan. I earned my master's degree and doctorate from Saga University, in Architectural Environmental Engineering, in 2011 and 2017.</a:t>
+              <a:t>Three pillars. Japan-trained: Ph.D. from Saga University in 2017. China-experienced: Associate Professor at Zhejiang Sci-Tech University, 2018 to 2023. Japan-returned: Yamaguchi University since January 2026.</a:t>
             </a:r>
           </a:p>
           <a:p/>
           <a:p>
             <a:r>
-              <a:t>Then I moved to China. From 2018 to early 2023, I was an Associate Professor at Zhejiang Sci-Tech University, teaching and supervising students in building environment and urban design.</a:t>
+              <a:t>The timeline below shows ten years of continuity, moving from building, to person, to city.</a:t>
             </a:r>
           </a:p>
           <a:p/>
           <a:p>
             <a:r>
-              <a:t>After that, I returned to Japan. From 2023 to 2025, I was a researcher at the Institute of Policy Research, Kumamoto City — a municipal policy research institute. There I worked directly with city government on urban environment and heat policy.</a:t>
-            </a:r>
-          </a:p>
-          <a:p/>
-          <a:p>
-            <a:r>
-              <a:t>In January 2026, I joined Yamaguchi University as a tenure-track Lecturer. This is my current position.</a:t>
-            </a:r>
-          </a:p>
-          <a:p/>
-          <a:p>
-            <a:r>
-              <a:t>So across ten years, my research moved through three stages — building, person, and city. And throughout, I have been one of the few researchers who works natively in both Japanese regional cities and Chinese high-density urbanism. That bridge is at the center of everything I will show you today.</a:t>
+              <a:t>What this gives me is rare — I work natively in both Japanese regional cities and Chinese high-density urbanism, through one continuous research agenda on urban heat.</a:t>
             </a:r>
           </a:p>
           <a:p/>
@@ -938,43 +892,37 @@
           <a:lstStyle/>
           <a:p>
             <a:r>
-              <a:t>[SLIDE 3 — WHY MY RESEARCH MATTERS — ~60 seconds]</a:t>
+              <a:t>[SLIDE 3 — WHY MY RESEARCH MATTERS — ~50s]</a:t>
             </a:r>
           </a:p>
           <a:p/>
           <a:p>
             <a:r>
-              <a:t>Cities are getting hotter every summer. That is not just weather — it is a regional public-health issue.</a:t>
+              <a:t>Why does this research matter?</a:t>
             </a:r>
           </a:p>
           <a:p/>
           <a:p>
             <a:r>
-              <a:t>In 2023 alone, Japan's Fire and Disaster Management Agency recorded more than 91,000 emergency heatstroke transports nationwide. In Yamaguchi Prefecture alone, more than 1,200 cases — and about 60 percent of those patients were aged 65 or older.</a:t>
+              <a:t>In 2023, Japan recorded over 91,000 emergency heatstroke transports. In Yamaguchi alone, 1,200 cases — and 60 percent were aged 65 or older.</a:t>
             </a:r>
           </a:p>
           <a:p/>
           <a:p>
             <a:r>
-              <a:t>But — and this is the key point — not every street is equally hot. As you can see in this section drawing on the left: in the built-up zone, an elderly resident walks through dense buildings under direct sun, where heat accumulates between facades. Just a few hundred meters away, in a zone with trees and wind, the same walk is much safer.</a:t>
+              <a:t>But not every street is equally hot. As the section drawing shows: built-up zones trap heat; green-and-wind zones stay cool. Elderly residents walk through this contrast every day, over 500 to 1,000 meters.</a:t>
             </a:r>
           </a:p>
           <a:p/>
           <a:p>
             <a:r>
-              <a:t>What older residents actually face is a 500-to-1000 meter daily walking corridor through a built environment whose thermal behavior changes street by street.</a:t>
+              <a:t>So my research asks three simple questions — Where is it hot? Why is it hot? How can we cool the city while keeping it walkable?</a:t>
             </a:r>
           </a:p>
           <a:p/>
           <a:p>
             <a:r>
-              <a:t>So my research asks three simple questions: Where is it hot? Why is it hot? And how can we cool the city while keeping it walkable and alive?</a:t>
-            </a:r>
-          </a:p>
-          <a:p/>
-          <a:p>
-            <a:r>
-              <a:t>These three questions sit at the intersection of three challenges that regional cities like Yamaguchi face together — climate warming, aging society, and the decline of city centers. My research is designed to address all three through one framework.</a:t>
+              <a:t>This sits at the intersection of climate warming, aging society, and city-center decline — the triple challenge of regional cities.</a:t>
             </a:r>
           </a:p>
           <a:p/>
@@ -1045,37 +993,37 @@
           <a:lstStyle/>
           <a:p>
             <a:r>
-              <a:t>[SLIDE 4 — RESEARCH TRAJECTORY — ~70 seconds]</a:t>
+              <a:t>[SLIDE 4 — RESEARCH TRAJECTORY — ~60s]</a:t>
             </a:r>
           </a:p>
           <a:p/>
           <a:p>
             <a:r>
-              <a:t>My research has not jumped between topics. It has moved deliberately through three stages: building, person, and city.</a:t>
+              <a:t>My research has moved through three stages — not jumped between topics.</a:t>
             </a:r>
           </a:p>
           <a:p/>
           <a:p>
             <a:r>
-              <a:t>In Stage 1 — Building — I asked how the form and envelope of buildings shape indoor thermal environment and energy use. I surveyed 183 households across three Chinese cities, optimized window-to-wall ratios, and analyzed wind environments in high-rise courtyards. This gave me physical control over the indoor environment — but it could not tell me whose body was at risk.</a:t>
+              <a:t>Stage 1 — Building. How does form shape indoor thermal and energy performance? This gave me the physical side, but not the human side.</a:t>
             </a:r>
           </a:p>
           <a:p/>
           <a:p>
             <a:r>
-              <a:t>That moved me to Stage 2 — Person. Here I asked how indoor conditions affect learning, health, and behavior — not in average users, but in specific people. This is where my two strongest Q1 papers come from: Building and Environment, on classroom thermal comfort and learning, in the top 5 of its field; and Environmental Pollution, on PM2.5 health risk. By the end of Stage 2 I understood the human side — but I was still indoors.</a:t>
+              <a:t>Stage 2 — Person. How do indoor conditions affect learning, health, behavior? This is where my two Q1 papers come from — Building and Environment, top 5 in its field, and Environmental Pollution. But I was still indoors.</a:t>
             </a:r>
           </a:p>
           <a:p/>
           <a:p>
             <a:r>
-              <a:t>So I moved to Stage 3 — City. I now ask how green-blue infrastructure, wind, and urban morphology together regulate pedestrian heat exposure at the scale where heatstroke actually happens. The Kumamoto work — including the chapter cited by MLIT as an EBPM case — comes from this stage.</a:t>
+              <a:t>Stage 3 — City. How do green-blue infrastructure, wind, and morphology together regulate pedestrian heat exposure? This is where the Kumamoto work — and the MLIT-cited case — comes from.</a:t>
             </a:r>
           </a:p>
           <a:p/>
           <a:p>
             <a:r>
-              <a:t>Each stage was pushed forward by a question the previous one could only partly answer. Stage 3 is exactly where HIRAKU-Global begins.</a:t>
+              <a:t>Each stage was pushed forward by a question the previous one could only partly answer. Stage 3 is where HIRAKU-Global begins.</a:t>
             </a:r>
           </a:p>
           <a:p/>
@@ -1146,7 +1094,7 @@
           <a:lstStyle/>
           <a:p>
             <a:r>
-              <a:t>[SLIDE 5 — ORIGINALITY — ~75 seconds]</a:t>
+              <a:t>[SLIDE 5 — ORIGINALITY (CORE) — ~70s]</a:t>
             </a:r>
           </a:p>
           <a:p/>
@@ -1158,37 +1106,43 @@
           <a:p/>
           <a:p>
             <a:r>
-              <a:t>On the left, you see my cross-scale workflow. I work at three altitudes — satellite, block, and pedestrian — chained as one inference path, not three separate studies.</a:t>
+              <a:t>I work at three scales — chained as one workflow, not three separate studies.</a:t>
             </a:r>
           </a:p>
           <a:p/>
           <a:p>
             <a:r>
-              <a:t>At the top, satellite remote sensing: I use Landsat-8/9 thermal infrared and Sentinel-2 multispectral imagery to retrieve land surface temperature and local climate zone classification at 30-meter resolution. This tells me where heat accumulates across the whole city.</a:t>
+              <a:t>Top — satellite. Landsat-8/9 and Sentinel-2 tell me where heat accumulates.</a:t>
             </a:r>
           </a:p>
           <a:p/>
           <a:p>
             <a:r>
-              <a:t>In the middle, block-scale CFD: I use OpenFOAM to test how wind, building morphology, and green-blue infrastructure interact at the block level. This tells me why heat accumulates in specific places.</a:t>
+              <a:t>Middle — block-scale CFD. OpenFOAM tells me why, given wind and building form.</a:t>
             </a:r>
           </a:p>
           <a:p/>
           <a:p>
             <a:r>
-              <a:t>At the bottom, pedestrian-scale validation: I measure WBGT along the actual 500-to-1000 meter walking corridors that elderly residents use. This tells me whether the predicted mechanisms appear at the human scale.</a:t>
+              <a:t>Bottom — pedestrian validation. WBGT along the actual 500-to-1,000-meter walking corridors of elderly residents.</a:t>
             </a:r>
           </a:p>
           <a:p/>
           <a:p>
             <a:r>
-              <a:t>Four things make this original. First, multi-source data integration. Second, cumulative heat exposure — beyond instantaneous temperature. Third, the workflow has already been applied to Kumamoto City's green-infrastructure policy, through Chapter 4 of the city's official policy volume. Fourth — and this is the strongest evidence — this work has been cited by Japan's Ministry of Land, Infrastructure, Transport and Tourism as an Evidence-Based Policy Making case.</a:t>
+              <a:t>Four things make this original. First, multi-source data fusion. Second, cumulative heat exposure — not instantaneous temperature. Third, already applied to Kumamoto's green-infrastructure policy.</a:t>
             </a:r>
           </a:p>
           <a:p/>
           <a:p>
             <a:r>
-              <a:t>Few researchers can show all four — satellite, measurement, CFD, and national-level policy adoption — in one continuous workflow.</a:t>
+              <a:t>And fourth — most importantly — cited by Japan's MLIT as an Evidence-Based Policy Making case.</a:t>
+            </a:r>
+          </a:p>
+          <a:p/>
+          <a:p>
+            <a:r>
+              <a:t>Few researchers can show all four — satellite, measurement, CFD, and national policy adoption — in one workflow.</a:t>
             </a:r>
           </a:p>
           <a:p/>
@@ -1259,31 +1213,31 @@
           <a:lstStyle/>
           <a:p>
             <a:r>
-              <a:t>[SLIDE 6 — RESEARCH OUTPUTS — ~55 seconds]</a:t>
+              <a:t>[SLIDE 6 — RESEARCH OUTPUTS — ~50s]</a:t>
             </a:r>
           </a:p>
           <a:p/>
           <a:p>
             <a:r>
-              <a:t>Let me talk about quality, not just numbers.</a:t>
+              <a:t>Now my publications — quality first.</a:t>
             </a:r>
           </a:p>
           <a:p/>
           <a:p>
             <a:r>
-              <a:t>Fifteen peer-reviewed papers. Ten in English SCI or SCIE journals. Eight with impact factor. Three in Q1 journals — and this is what I most want you to remember: all three Q1 papers are first author, co-first author, or corresponding author. These are not background co-authorships. I led them.</a:t>
+              <a:t>Fifteen peer-reviewed papers. Ten English SCI or SCIE. Eight with impact factor. Three in Q1 — and this is what I want you to remember: all three Q1 papers are first, co-first, or corresponding author. I led them.</a:t>
             </a:r>
           </a:p>
           <a:p/>
           <a:p>
             <a:r>
-              <a:t>The three Q1 journals are: Building and Environment — in the top 5 of construction and building technology — where I am co-first author on a study of classroom thermal comfort and learning. Environmental Pollution, a top-tier environmental science journal, on PM2.5 health-effects assessment. And Energies, where I am first author on classroom comfort and learning efficiency.</a:t>
+              <a:t>The three Q1 journals — Building and Environment, in the top 5 of its field. Environmental Pollution, top-tier environmental science. And Energies.</a:t>
             </a:r>
           </a:p>
           <a:p/>
           <a:p>
             <a:r>
-              <a:t>What matters even more than the journals is the line that connects them. Building energy, then indoor comfort and learning, then PM2.5 health, then urban heat and land use, then green-blue infrastructure, and finally policy. This is not a scattered publication record. It is one continuous research agenda — moving from buildings to people to cities, and from technical analysis to social application.</a:t>
+              <a:t>What matters more than the journal count is the line that connects them — building energy, indoor comfort, PM2.5 health, urban heat, green infrastructure, policy. One continuous research agenda.</a:t>
             </a:r>
           </a:p>
           <a:p/>
@@ -1354,13 +1308,13 @@
           <a:lstStyle/>
           <a:p>
             <a:r>
-              <a:t>[SLIDE 7 — INTERNATIONAL COLLABORATION — ~65 seconds]</a:t>
+              <a:t>[SLIDE 7 — INTERNATIONAL COLLABORATION — ~55s]</a:t>
             </a:r>
           </a:p>
           <a:p/>
           <a:p>
             <a:r>
-              <a:t>International collaboration, for me, is not about attending conferences. It is about organizing actual cooperation between institutions.</a:t>
+              <a:t>International collaboration, for me, means organizing — not just attending.</a:t>
             </a:r>
           </a:p>
           <a:p/>
@@ -1372,31 +1326,31 @@
           <a:p/>
           <a:p>
             <a:r>
-              <a:t>First, the Sakura Science Program. I organized exchanges between Zhejiang Sci-Tech University and Japanese universities over multiple years — bringing students and researchers across the bridge. The program was paused by COVID, but the partnership is intact.</a:t>
+              <a:t>One — the Sakura Science Program. I organized exchanges between Zhejiang Sci-Tech University and Japanese universities over multiple years. Paused by COVID; friendship intact.</a:t>
             </a:r>
           </a:p>
           <a:p/>
           <a:p>
             <a:r>
-              <a:t>Second, during COVID, as a Zhejiang Sci-Tech University representative, I helped build the Zhejiang International Cooperation Center on Carbon Neutrality. Zhejiang Province established only four such centers — and ZSTU was the core unit of one of them. That gave me direct experience in setting up a provincial-level international research platform.</a:t>
+              <a:t>Two — during COVID, I helped build the Zhejiang International Cooperation Center on Carbon Neutrality. Only four such centers province-wide; ZSTU was the core unit of one.</a:t>
             </a:r>
           </a:p>
           <a:p/>
           <a:p>
             <a:r>
-              <a:t>Third, I organized an international online forum that brought together researchers from China, Japan, the UK — including UCL — Indonesia, and Bangladesh. Coordinating five countries during pandemic constraints is itself a track record.</a:t>
+              <a:t>Three — I organized a five-country online forum: China, Japan, UK at UCL, Indonesia, and Bangladesh.</a:t>
             </a:r>
           </a:p>
           <a:p/>
           <a:p>
             <a:r>
-              <a:t>The future network shown below is not a wish list — it builds on these existing friendships. Yamaguchi University at the center, connecting UCL, Zhejiang University, and Asian nodes that I have already worked with.</a:t>
+              <a:t>The future network below builds on these existing friendships, with Yamaguchi University at the center.</a:t>
             </a:r>
           </a:p>
           <a:p/>
           <a:p>
             <a:r>
-              <a:t>In all three cases, I was the organizer. Not just a participant.</a:t>
+              <a:t>In all three cases — I was the organizer.</a:t>
             </a:r>
           </a:p>
           <a:p/>
@@ -1467,37 +1421,37 @@
           <a:lstStyle/>
           <a:p>
             <a:r>
-              <a:t>[SLIDE 8 — FUNDING &amp; PROJECT LEADERSHIP — ~65 seconds]</a:t>
+              <a:t>[SLIDE 8 — FUNDING &amp; LEADERSHIP — ~60s]</a:t>
             </a:r>
           </a:p>
           <a:p/>
           <a:p>
             <a:r>
-              <a:t>Now, funding. I will give you the honest picture in three phases.</a:t>
+              <a:t>Funding — the honest picture in three phases.</a:t>
             </a:r>
           </a:p>
           <a:p/>
           <a:p>
             <a:r>
-              <a:t>China, 2018 to 2023: across 8 projects I have accumulated approximately 100 million yen equivalent in research funding, with 5 of those as Leading Researcher. I was also a collaborator on a National Social Science Fund of China General Project. The Chinese research environment is highly competitive, with many universities and many applicants — so this track record came from a competitive selection.</a:t>
+              <a:t>China, 2018 to 2023. Across eight projects, approximately 100 million yen total. Five as Leading Researcher, in a highly competitive environment.</a:t>
             </a:r>
           </a:p>
           <a:p/>
           <a:p>
             <a:r>
-              <a:t>Kumamoto, 2023 to 2025: my position there was at the Institute of Policy Research, a municipal post. The institutional rule was clear — external competitive grants such as JSPS Kakenhi were not permitted from that position. The absence of Japanese grants in that period reflects the role, not the ability. What I produced instead was policy-oriented output — including the MLIT EBPM case I mentioned earlier.</a:t>
+              <a:t>Kumamoto, 2023 to 2025. Municipal post — institutional rule did not permit external grants such as Kakenhi. What I produced instead was the MLIT EBPM-cited policy work.</a:t>
             </a:r>
           </a:p>
           <a:p/>
           <a:p>
             <a:r>
-              <a:t>Yamaguchi, from January 2026: the first time I have been eligible to apply in Japan. And within months of joining, I was ranked number one out of thirteen applicants in the Yamaguchi University regional research program — four were selected. The Japan pattern has started.</a:t>
+              <a:t>Yamaguchi, since January 2026 — the first time I could apply in Japan. Within months, I was ranked number one out of thirteen applicants in the Yamaguchi regional research program. Four were selected.</a:t>
             </a:r>
           </a:p>
           <a:p/>
           <a:p>
             <a:r>
-              <a:t>The path forward: Kakenhi Kiban C this autumn, then Kiban B during the HIRAKU-Global period — using the Chugoku-Shikoku evidence base as pilot foundation.</a:t>
+              <a:t>Forward path — Kakenhi Kiban C this autumn, building toward Kiban B during HIRAKU. The Japan pattern has started.</a:t>
             </a:r>
           </a:p>
           <a:p/>
@@ -1568,7 +1522,7 @@
           <a:lstStyle/>
           <a:p>
             <a:r>
-              <a:t>[SLIDE 9 — RESEARCH PLAN — ~75 seconds]</a:t>
+              <a:t>[SLIDE 9 — RESEARCH PLAN (CORE) — ~70s]</a:t>
             </a:r>
           </a:p>
           <a:p/>
@@ -1580,31 +1534,31 @@
           <a:p/>
           <a:p>
             <a:r>
-              <a:t>On the left, three cities — Yamaguchi, Ube, and Matsue — chosen because they span three contrasting wind regimes within one administrative region: inland basin, coastal sea-breeze, and Sea-of-Japan lakeside. That contrast is exactly what the science needs.</a:t>
+              <a:t>Left — three cities, three wind regimes within one region: Matsue lakeside, Yamaguchi basin, Ube coastal. The contrast is exactly what the science needs.</a:t>
             </a:r>
           </a:p>
           <a:p/>
           <a:p>
             <a:r>
-              <a:t>In the middle, the method chain. Step 1, satellite screening — already running. Step 2, block-scale CFD — methodology already established in my earlier work. Step 3, pedestrian-scale WBGT validation — co-developed with Yamaguchi City's elderly-care offices.</a:t>
+              <a:t>Middle — the method chain. Step 1 satellite screening — already running. Step 2 block CFD — methodology already established. Step 3 pedestrian WBGT — co-designed with Yamaguchi City's elderly-care offices.</a:t>
             </a:r>
           </a:p>
           <a:p/>
           <a:p>
             <a:r>
-              <a:t>On the right, the five-year plan. Year 1: city-scale diagnosis. Year 2: two-month stay at UCL with Dr. Huanfa Chen. Year 3: block CFD plus a short Zhejiang visit. Year 4: pedestrian validation and an international workshop at Yamaguchi. Year 5: synthesis and the Kakenhi Kiban B application.</a:t>
+              <a:t>Right — the five-year plan. Year 1 diagnosis. Year 2 UCL stay with Dr. Huanfa Chen. Year 3 CFD plus Zhejiang visit. Year 4 pedestrian field plus international workshop at Yamaguchi. Year 5 synthesis and Kakenhi B.</a:t>
             </a:r>
           </a:p>
           <a:p/>
           <a:p>
             <a:r>
-              <a:t>This plan does not start from zero. The satellite pipeline is already running. The international partners are already in place. The first Japanese grant is already won.</a:t>
+              <a:t>This plan does not start from zero. Pipeline running. Partners ready. First grant won.</a:t>
             </a:r>
           </a:p>
           <a:p/>
           <a:p>
             <a:r>
-              <a:t>I have also thought about risk. The main risk is over-extension. My approach is to anchor Yamaguchi first, expand stepwise to Ube and Matsue, use online collaboration when travel is constrained, and keep the Kumamoto data as a pre-validated reference. I want to deliver, not over-promise.</a:t>
+              <a:t>I also manage risk — anchor Yamaguchi first, expand stepwise, use online collaboration when needed. Deliver, not over-promise.</a:t>
             </a:r>
           </a:p>
           <a:p/>

--- a/interview_materials/HIRAKU_Global_Interview_Liu.pptx
+++ b/interview_materials/HIRAKU_Global_Interview_Liu.pptx
@@ -16,6 +16,10 @@
     <p:sldId id="264" r:id="rId16"/>
     <p:sldId id="265" r:id="rId17"/>
     <p:sldId id="266" r:id="rId18"/>
+    <p:sldId id="267" r:id="rId19"/>
+    <p:sldId id="268" r:id="rId20"/>
+    <p:sldId id="269" r:id="rId21"/>
+    <p:sldId id="270" r:id="rId22"/>
   </p:sldIdLst>
   <p:sldSz cx="12191695" cy="6858000" type="screen4x3"/>
   <p:notesSz cx="6858000" cy="9144000"/>
@@ -730,6 +734,286 @@
             </a:r>
           </a:p>
           <a:p/>
+        </p:txBody>
+      </p:sp>
+      <p:sp>
+        <p:nvSpPr>
+          <p:cNvPr id="4" name="Slide Number Placeholder 3"/>
+          <p:cNvSpPr>
+            <a:spLocks noGrp="1"/>
+          </p:cNvSpPr>
+          <p:nvPr>
+            <p:ph type="sldNum" idx="5" sz="quarter"/>
+          </p:nvPr>
+        </p:nvSpPr>
+        <p:spPr/>
+      </p:sp>
+    </p:spTree>
+  </p:cSld>
+  <p:clrMapOvr>
+    <a:masterClrMapping/>
+  </p:clrMapOvr>
+</p:notes>
+</file>
+
+<file path=ppt/notesSlides/notesSlide12.xml><?xml version="1.0" encoding="utf-8"?>
+<p:notes xmlns:a="http://schemas.openxmlformats.org/drawingml/2006/main" xmlns:p="http://schemas.openxmlformats.org/presentationml/2006/main" xmlns:r="http://schemas.openxmlformats.org/officeDocument/2006/relationships">
+  <p:cSld>
+    <p:spTree>
+      <p:nvGrpSpPr>
+        <p:cNvPr id="1" name=""/>
+        <p:cNvGrpSpPr/>
+        <p:nvPr/>
+      </p:nvGrpSpPr>
+      <p:grpSpPr>
+        <a:xfrm>
+          <a:off x="0" y="0"/>
+          <a:ext cx="0" cy="0"/>
+          <a:chOff x="0" y="0"/>
+          <a:chExt cx="0" cy="0"/>
+        </a:xfrm>
+      </p:grpSpPr>
+      <p:sp>
+        <p:nvSpPr>
+          <p:cNvPr id="2" name="Slide Image Placeholder 1"/>
+          <p:cNvSpPr>
+            <a:spLocks noGrp="1"/>
+          </p:cNvSpPr>
+          <p:nvPr>
+            <p:ph type="sldImg" idx="2"/>
+          </p:nvPr>
+        </p:nvSpPr>
+        <p:spPr/>
+      </p:sp>
+      <p:sp>
+        <p:nvSpPr>
+          <p:cNvPr id="3" name="Notes Placeholder 2"/>
+          <p:cNvSpPr>
+            <a:spLocks noGrp="1"/>
+          </p:cNvSpPr>
+          <p:nvPr>
+            <p:ph type="body" idx="3" sz="quarter"/>
+          </p:nvPr>
+        </p:nvSpPr>
+        <p:spPr/>
+        <p:txBody>
+          <a:bodyPr/>
+          <a:lstStyle/>
+          <a:p>
+            <a:r>
+              <a:t>[BACKUP A1 — Research Trajectory] Use if a reviewer asks for the detailed evolution of my research, the specific methods at each stage, or how the three stages connect. This is the full framework from my application; Slide 4 is its simplified version.</a:t>
+            </a:r>
+          </a:p>
+        </p:txBody>
+      </p:sp>
+      <p:sp>
+        <p:nvSpPr>
+          <p:cNvPr id="4" name="Slide Number Placeholder 3"/>
+          <p:cNvSpPr>
+            <a:spLocks noGrp="1"/>
+          </p:cNvSpPr>
+          <p:nvPr>
+            <p:ph type="sldNum" idx="5" sz="quarter"/>
+          </p:nvPr>
+        </p:nvSpPr>
+        <p:spPr/>
+      </p:sp>
+    </p:spTree>
+  </p:cSld>
+  <p:clrMapOvr>
+    <a:masterClrMapping/>
+  </p:clrMapOvr>
+</p:notes>
+</file>
+
+<file path=ppt/notesSlides/notesSlide13.xml><?xml version="1.0" encoding="utf-8"?>
+<p:notes xmlns:a="http://schemas.openxmlformats.org/drawingml/2006/main" xmlns:p="http://schemas.openxmlformats.org/presentationml/2006/main" xmlns:r="http://schemas.openxmlformats.org/officeDocument/2006/relationships">
+  <p:cSld>
+    <p:spTree>
+      <p:nvGrpSpPr>
+        <p:cNvPr id="1" name=""/>
+        <p:cNvGrpSpPr/>
+        <p:nvPr/>
+      </p:nvGrpSpPr>
+      <p:grpSpPr>
+        <a:xfrm>
+          <a:off x="0" y="0"/>
+          <a:ext cx="0" cy="0"/>
+          <a:chOff x="0" y="0"/>
+          <a:chExt cx="0" cy="0"/>
+        </a:xfrm>
+      </p:grpSpPr>
+      <p:sp>
+        <p:nvSpPr>
+          <p:cNvPr id="2" name="Slide Image Placeholder 1"/>
+          <p:cNvSpPr>
+            <a:spLocks noGrp="1"/>
+          </p:cNvSpPr>
+          <p:nvPr>
+            <p:ph type="sldImg" idx="2"/>
+          </p:nvPr>
+        </p:nvSpPr>
+        <p:spPr/>
+      </p:sp>
+      <p:sp>
+        <p:nvSpPr>
+          <p:cNvPr id="3" name="Notes Placeholder 2"/>
+          <p:cNvSpPr>
+            <a:spLocks noGrp="1"/>
+          </p:cNvSpPr>
+          <p:nvPr>
+            <p:ph type="body" idx="3" sz="quarter"/>
+          </p:nvPr>
+        </p:nvSpPr>
+        <p:spPr/>
+        <p:txBody>
+          <a:bodyPr/>
+          <a:lstStyle/>
+          <a:p>
+            <a:r>
+              <a:t>[BACKUP A2 — Cross-Scale Framework] Use if a reviewer wants the scientific depth behind Slide 5 — the Q0/Q1/Q2 questions, the three analytical scales, and how they integrate into one knowledge model.</a:t>
+            </a:r>
+          </a:p>
+        </p:txBody>
+      </p:sp>
+      <p:sp>
+        <p:nvSpPr>
+          <p:cNvPr id="4" name="Slide Number Placeholder 3"/>
+          <p:cNvSpPr>
+            <a:spLocks noGrp="1"/>
+          </p:cNvSpPr>
+          <p:nvPr>
+            <p:ph type="sldNum" idx="5" sz="quarter"/>
+          </p:nvPr>
+        </p:nvSpPr>
+        <p:spPr/>
+      </p:sp>
+    </p:spTree>
+  </p:cSld>
+  <p:clrMapOvr>
+    <a:masterClrMapping/>
+  </p:clrMapOvr>
+</p:notes>
+</file>
+
+<file path=ppt/notesSlides/notesSlide14.xml><?xml version="1.0" encoding="utf-8"?>
+<p:notes xmlns:a="http://schemas.openxmlformats.org/drawingml/2006/main" xmlns:p="http://schemas.openxmlformats.org/presentationml/2006/main" xmlns:r="http://schemas.openxmlformats.org/officeDocument/2006/relationships">
+  <p:cSld>
+    <p:spTree>
+      <p:nvGrpSpPr>
+        <p:cNvPr id="1" name=""/>
+        <p:cNvGrpSpPr/>
+        <p:nvPr/>
+      </p:nvGrpSpPr>
+      <p:grpSpPr>
+        <a:xfrm>
+          <a:off x="0" y="0"/>
+          <a:ext cx="0" cy="0"/>
+          <a:chOff x="0" y="0"/>
+          <a:chExt cx="0" cy="0"/>
+        </a:xfrm>
+      </p:grpSpPr>
+      <p:sp>
+        <p:nvSpPr>
+          <p:cNvPr id="2" name="Slide Image Placeholder 1"/>
+          <p:cNvSpPr>
+            <a:spLocks noGrp="1"/>
+          </p:cNvSpPr>
+          <p:nvPr>
+            <p:ph type="sldImg" idx="2"/>
+          </p:nvPr>
+        </p:nvSpPr>
+        <p:spPr/>
+      </p:sp>
+      <p:sp>
+        <p:nvSpPr>
+          <p:cNvPr id="3" name="Notes Placeholder 2"/>
+          <p:cNvSpPr>
+            <a:spLocks noGrp="1"/>
+          </p:cNvSpPr>
+          <p:nvPr>
+            <p:ph type="body" idx="3" sz="quarter"/>
+          </p:nvPr>
+        </p:nvSpPr>
+        <p:spPr/>
+        <p:txBody>
+          <a:bodyPr/>
+          <a:lstStyle/>
+          <a:p>
+            <a:r>
+              <a:t>[BACKUP A3 — Workflow &amp; Plan] Use if a reviewer probes feasibility or the year-by-year schedule. Shows the full screening-explanation-validation chain behind Slide 9.</a:t>
+            </a:r>
+          </a:p>
+        </p:txBody>
+      </p:sp>
+      <p:sp>
+        <p:nvSpPr>
+          <p:cNvPr id="4" name="Slide Number Placeholder 3"/>
+          <p:cNvSpPr>
+            <a:spLocks noGrp="1"/>
+          </p:cNvSpPr>
+          <p:nvPr>
+            <p:ph type="sldNum" idx="5" sz="quarter"/>
+          </p:nvPr>
+        </p:nvSpPr>
+        <p:spPr/>
+      </p:sp>
+    </p:spTree>
+  </p:cSld>
+  <p:clrMapOvr>
+    <a:masterClrMapping/>
+  </p:clrMapOvr>
+</p:notes>
+</file>
+
+<file path=ppt/notesSlides/notesSlide15.xml><?xml version="1.0" encoding="utf-8"?>
+<p:notes xmlns:a="http://schemas.openxmlformats.org/drawingml/2006/main" xmlns:p="http://schemas.openxmlformats.org/presentationml/2006/main" xmlns:r="http://schemas.openxmlformats.org/officeDocument/2006/relationships">
+  <p:cSld>
+    <p:spTree>
+      <p:nvGrpSpPr>
+        <p:cNvPr id="1" name=""/>
+        <p:cNvGrpSpPr/>
+        <p:nvPr/>
+      </p:nvGrpSpPr>
+      <p:grpSpPr>
+        <a:xfrm>
+          <a:off x="0" y="0"/>
+          <a:ext cx="0" cy="0"/>
+          <a:chOff x="0" y="0"/>
+          <a:chExt cx="0" cy="0"/>
+        </a:xfrm>
+      </p:grpSpPr>
+      <p:sp>
+        <p:nvSpPr>
+          <p:cNvPr id="2" name="Slide Image Placeholder 1"/>
+          <p:cNvSpPr>
+            <a:spLocks noGrp="1"/>
+          </p:cNvSpPr>
+          <p:nvPr>
+            <p:ph type="sldImg" idx="2"/>
+          </p:nvPr>
+        </p:nvSpPr>
+        <p:spPr/>
+      </p:sp>
+      <p:sp>
+        <p:nvSpPr>
+          <p:cNvPr id="3" name="Notes Placeholder 2"/>
+          <p:cNvSpPr>
+            <a:spLocks noGrp="1"/>
+          </p:cNvSpPr>
+          <p:nvPr>
+            <p:ph type="body" idx="3" sz="quarter"/>
+          </p:nvPr>
+        </p:nvSpPr>
+        <p:spPr/>
+        <p:txBody>
+          <a:bodyPr/>
+          <a:lstStyle/>
+          <a:p>
+            <a:r>
+              <a:t>[BACKUP A4 — Collaboration] Use if a reviewer asks for detail on partner roles, complementarity, or how the network expands. Expands the hub-and-spoke diagram on Slide 7.</a:t>
+            </a:r>
+          </a:p>
         </p:txBody>
       </p:sp>
       <p:sp>
@@ -14408,6 +14692,4870 @@
           </a:fontRef>
         </p:style>
       </p:cxnSp>
+    </p:spTree>
+  </p:cSld>
+  <p:clrMapOvr>
+    <a:masterClrMapping/>
+  </p:clrMapOvr>
+</p:sld>
+</file>
+
+<file path=ppt/slides/slide12.xml><?xml version="1.0" encoding="utf-8"?>
+<p:sld xmlns:a="http://schemas.openxmlformats.org/drawingml/2006/main" xmlns:p="http://schemas.openxmlformats.org/presentationml/2006/main" xmlns:r="http://schemas.openxmlformats.org/officeDocument/2006/relationships">
+  <p:cSld>
+    <p:spTree>
+      <p:nvGrpSpPr>
+        <p:cNvPr id="1" name=""/>
+        <p:cNvGrpSpPr/>
+        <p:nvPr/>
+      </p:nvGrpSpPr>
+      <p:grpSpPr/>
+      <p:sp>
+        <p:nvSpPr>
+          <p:cNvPr id="2" name="Rectangle 1"/>
+          <p:cNvSpPr/>
+          <p:nvPr/>
+        </p:nvSpPr>
+        <p:spPr>
+          <a:xfrm>
+            <a:off x="0" y="0"/>
+            <a:ext cx="12191695" cy="6858000"/>
+          </a:xfrm>
+          <a:prstGeom prst="rect">
+            <a:avLst/>
+          </a:prstGeom>
+          <a:solidFill>
+            <a:srgbClr val="FFFFFF"/>
+          </a:solidFill>
+          <a:ln>
+            <a:noFill/>
+          </a:ln>
+          <a:effectLst/>
+        </p:spPr>
+        <p:style>
+          <a:lnRef idx="1">
+            <a:schemeClr val="accent1"/>
+          </a:lnRef>
+          <a:fillRef idx="3">
+            <a:schemeClr val="accent1"/>
+          </a:fillRef>
+          <a:effectRef idx="2">
+            <a:schemeClr val="accent1"/>
+          </a:effectRef>
+          <a:fontRef idx="minor">
+            <a:schemeClr val="lt1"/>
+          </a:fontRef>
+        </p:style>
+        <p:txBody>
+          <a:bodyPr rtlCol="0" anchor="ctr"/>
+          <a:lstStyle/>
+          <a:p>
+            <a:pPr algn="ctr"/>
+          </a:p>
+        </p:txBody>
+      </p:sp>
+      <p:sp>
+        <p:nvSpPr>
+          <p:cNvPr id="3" name="Rectangle 2"/>
+          <p:cNvSpPr/>
+          <p:nvPr/>
+        </p:nvSpPr>
+        <p:spPr>
+          <a:xfrm>
+            <a:off x="0" y="0"/>
+            <a:ext cx="12191695" cy="164592"/>
+          </a:xfrm>
+          <a:prstGeom prst="rect">
+            <a:avLst/>
+          </a:prstGeom>
+          <a:solidFill>
+            <a:srgbClr val="8C6F33"/>
+          </a:solidFill>
+          <a:ln>
+            <a:noFill/>
+          </a:ln>
+          <a:effectLst/>
+        </p:spPr>
+        <p:style>
+          <a:lnRef idx="1">
+            <a:schemeClr val="accent1"/>
+          </a:lnRef>
+          <a:fillRef idx="3">
+            <a:schemeClr val="accent1"/>
+          </a:fillRef>
+          <a:effectRef idx="2">
+            <a:schemeClr val="accent1"/>
+          </a:effectRef>
+          <a:fontRef idx="minor">
+            <a:schemeClr val="lt1"/>
+          </a:fontRef>
+        </p:style>
+        <p:txBody>
+          <a:bodyPr rtlCol="0" anchor="ctr"/>
+          <a:lstStyle/>
+          <a:p>
+            <a:pPr algn="ctr"/>
+          </a:p>
+        </p:txBody>
+      </p:sp>
+      <p:sp>
+        <p:nvSpPr>
+          <p:cNvPr id="4" name="Rectangle 3"/>
+          <p:cNvSpPr/>
+          <p:nvPr/>
+        </p:nvSpPr>
+        <p:spPr>
+          <a:xfrm>
+            <a:off x="0" y="164592"/>
+            <a:ext cx="1828800" cy="38100"/>
+          </a:xfrm>
+          <a:prstGeom prst="rect">
+            <a:avLst/>
+          </a:prstGeom>
+          <a:solidFill>
+            <a:srgbClr val="142E55"/>
+          </a:solidFill>
+          <a:ln>
+            <a:noFill/>
+          </a:ln>
+          <a:effectLst/>
+        </p:spPr>
+        <p:style>
+          <a:lnRef idx="1">
+            <a:schemeClr val="accent1"/>
+          </a:lnRef>
+          <a:fillRef idx="3">
+            <a:schemeClr val="accent1"/>
+          </a:fillRef>
+          <a:effectRef idx="2">
+            <a:schemeClr val="accent1"/>
+          </a:effectRef>
+          <a:fontRef idx="minor">
+            <a:schemeClr val="lt1"/>
+          </a:fontRef>
+        </p:style>
+        <p:txBody>
+          <a:bodyPr rtlCol="0" anchor="ctr"/>
+          <a:lstStyle/>
+          <a:p>
+            <a:pPr algn="ctr"/>
+          </a:p>
+        </p:txBody>
+      </p:sp>
+      <p:sp>
+        <p:nvSpPr>
+          <p:cNvPr id="5" name="TextBox 4"/>
+          <p:cNvSpPr txBox="1"/>
+          <p:nvPr/>
+        </p:nvSpPr>
+        <p:spPr>
+          <a:xfrm>
+            <a:off x="411480" y="18288"/>
+            <a:ext cx="7315200" cy="146304"/>
+          </a:xfrm>
+          <a:prstGeom prst="rect">
+            <a:avLst/>
+          </a:prstGeom>
+          <a:noFill/>
+        </p:spPr>
+        <p:txBody>
+          <a:bodyPr wrap="square" lIns="0" rIns="0" tIns="0" bIns="0" anchor="ctr">
+            <a:spAutoFit/>
+          </a:bodyPr>
+          <a:lstStyle/>
+          <a:p>
+            <a:pPr algn="l">
+              <a:lnSpc>
+                <a:spcPct val="115000"/>
+              </a:lnSpc>
+            </a:pPr>
+            <a:r>
+              <a:rPr sz="800" b="1" i="0">
+                <a:solidFill>
+                  <a:srgbClr val="FFFFFF"/>
+                </a:solidFill>
+                <a:latin typeface="Calibri"/>
+              </a:rPr>
+              <a:t>APPENDIX  ·  BACKUP FOR Q&amp;A  ·  NOT PART OF THE 10-MIN TALK</a:t>
+            </a:r>
+          </a:p>
+        </p:txBody>
+      </p:sp>
+      <p:sp>
+        <p:nvSpPr>
+          <p:cNvPr id="6" name="TextBox 5"/>
+          <p:cNvSpPr txBox="1"/>
+          <p:nvPr/>
+        </p:nvSpPr>
+        <p:spPr>
+          <a:xfrm>
+            <a:off x="9601200" y="18288"/>
+            <a:ext cx="2468880" cy="146304"/>
+          </a:xfrm>
+          <a:prstGeom prst="rect">
+            <a:avLst/>
+          </a:prstGeom>
+          <a:noFill/>
+        </p:spPr>
+        <p:txBody>
+          <a:bodyPr wrap="square" lIns="0" rIns="0" tIns="0" bIns="0" anchor="ctr">
+            <a:spAutoFit/>
+          </a:bodyPr>
+          <a:lstStyle/>
+          <a:p>
+            <a:pPr algn="r">
+              <a:lnSpc>
+                <a:spcPct val="115000"/>
+              </a:lnSpc>
+            </a:pPr>
+            <a:r>
+              <a:rPr sz="800" b="1" i="0">
+                <a:solidFill>
+                  <a:srgbClr val="142E55"/>
+                </a:solidFill>
+                <a:latin typeface="Calibri"/>
+              </a:rPr>
+              <a:t>BACKUP  A1  /  A4</a:t>
+            </a:r>
+          </a:p>
+        </p:txBody>
+      </p:sp>
+      <p:sp>
+        <p:nvSpPr>
+          <p:cNvPr id="7" name="TextBox 6"/>
+          <p:cNvSpPr txBox="1"/>
+          <p:nvPr/>
+        </p:nvSpPr>
+        <p:spPr>
+          <a:xfrm>
+            <a:off x="411480" y="347472"/>
+            <a:ext cx="7315200" cy="274320"/>
+          </a:xfrm>
+          <a:prstGeom prst="rect">
+            <a:avLst/>
+          </a:prstGeom>
+          <a:noFill/>
+        </p:spPr>
+        <p:txBody>
+          <a:bodyPr wrap="square" lIns="0" rIns="0" tIns="0" bIns="0" anchor="t">
+            <a:spAutoFit/>
+          </a:bodyPr>
+          <a:lstStyle/>
+          <a:p>
+            <a:pPr algn="l">
+              <a:lnSpc>
+                <a:spcPct val="115000"/>
+              </a:lnSpc>
+            </a:pPr>
+            <a:r>
+              <a:rPr sz="1000" b="1" i="0">
+                <a:solidFill>
+                  <a:srgbClr val="8C6F33"/>
+                </a:solidFill>
+                <a:latin typeface="Calibri"/>
+              </a:rPr>
+              <a:t>ORIGINAL APPLICATION FIGURE</a:t>
+            </a:r>
+          </a:p>
+        </p:txBody>
+      </p:sp>
+      <p:sp>
+        <p:nvSpPr>
+          <p:cNvPr id="8" name="TextBox 7"/>
+          <p:cNvSpPr txBox="1"/>
+          <p:nvPr/>
+        </p:nvSpPr>
+        <p:spPr>
+          <a:xfrm>
+            <a:off x="411480" y="603504"/>
+            <a:ext cx="11430000" cy="411480"/>
+          </a:xfrm>
+          <a:prstGeom prst="rect">
+            <a:avLst/>
+          </a:prstGeom>
+          <a:noFill/>
+        </p:spPr>
+        <p:txBody>
+          <a:bodyPr wrap="square" lIns="0" rIns="0" tIns="0" bIns="0" anchor="t">
+            <a:spAutoFit/>
+          </a:bodyPr>
+          <a:lstStyle/>
+          <a:p>
+            <a:pPr algn="l">
+              <a:lnSpc>
+                <a:spcPct val="100000"/>
+              </a:lnSpc>
+            </a:pPr>
+            <a:r>
+              <a:rPr sz="2200" b="1" i="0">
+                <a:solidFill>
+                  <a:srgbClr val="142E55"/>
+                </a:solidFill>
+                <a:latin typeface="Calibri"/>
+              </a:rPr>
+              <a:t>Research Trajectory &amp; Academic Framework</a:t>
+            </a:r>
+          </a:p>
+        </p:txBody>
+      </p:sp>
+      <p:sp>
+        <p:nvSpPr>
+          <p:cNvPr id="9" name="TextBox 8"/>
+          <p:cNvSpPr txBox="1"/>
+          <p:nvPr/>
+        </p:nvSpPr>
+        <p:spPr>
+          <a:xfrm>
+            <a:off x="411480" y="1078992"/>
+            <a:ext cx="11430000" cy="274320"/>
+          </a:xfrm>
+          <a:prstGeom prst="rect">
+            <a:avLst/>
+          </a:prstGeom>
+          <a:noFill/>
+        </p:spPr>
+        <p:txBody>
+          <a:bodyPr wrap="square" lIns="0" rIns="0" tIns="0" bIns="0" anchor="t">
+            <a:spAutoFit/>
+          </a:bodyPr>
+          <a:lstStyle/>
+          <a:p>
+            <a:pPr algn="l">
+              <a:lnSpc>
+                <a:spcPct val="115000"/>
+              </a:lnSpc>
+            </a:pPr>
+            <a:r>
+              <a:rPr sz="1100" b="0" i="1">
+                <a:solidFill>
+                  <a:srgbClr val="4A5568"/>
+                </a:solidFill>
+                <a:latin typeface="Calibri"/>
+              </a:rPr>
+              <a:t>Figure 1 (application) — full Building → Person → City framework with key actions, methods, and significance.</a:t>
+            </a:r>
+          </a:p>
+        </p:txBody>
+      </p:sp>
+      <p:cxnSp>
+        <p:nvCxnSpPr>
+          <p:cNvPr id="10" name="Connector 9"/>
+          <p:cNvCxnSpPr/>
+          <p:nvPr/>
+        </p:nvCxnSpPr>
+        <p:spPr>
+          <a:xfrm>
+            <a:off x="182880" y="411480"/>
+            <a:ext cx="182880" cy="0"/>
+          </a:xfrm>
+          <a:prstGeom prst="line">
+            <a:avLst/>
+          </a:prstGeom>
+          <a:ln w="6350">
+            <a:solidFill>
+              <a:srgbClr val="B8C2CC"/>
+            </a:solidFill>
+          </a:ln>
+        </p:spPr>
+        <p:style>
+          <a:lnRef idx="2">
+            <a:schemeClr val="accent1"/>
+          </a:lnRef>
+          <a:fillRef idx="0">
+            <a:schemeClr val="accent1"/>
+          </a:fillRef>
+          <a:effectRef idx="1">
+            <a:schemeClr val="accent1"/>
+          </a:effectRef>
+          <a:fontRef idx="minor">
+            <a:schemeClr val="tx1"/>
+          </a:fontRef>
+        </p:style>
+      </p:cxnSp>
+      <p:cxnSp>
+        <p:nvCxnSpPr>
+          <p:cNvPr id="11" name="Connector 10"/>
+          <p:cNvCxnSpPr/>
+          <p:nvPr/>
+        </p:nvCxnSpPr>
+        <p:spPr>
+          <a:xfrm>
+            <a:off x="274320" y="320040"/>
+            <a:ext cx="0" cy="182880"/>
+          </a:xfrm>
+          <a:prstGeom prst="line">
+            <a:avLst/>
+          </a:prstGeom>
+          <a:ln w="6350">
+            <a:solidFill>
+              <a:srgbClr val="B8C2CC"/>
+            </a:solidFill>
+          </a:ln>
+        </p:spPr>
+        <p:style>
+          <a:lnRef idx="2">
+            <a:schemeClr val="accent1"/>
+          </a:lnRef>
+          <a:fillRef idx="0">
+            <a:schemeClr val="accent1"/>
+          </a:fillRef>
+          <a:effectRef idx="1">
+            <a:schemeClr val="accent1"/>
+          </a:effectRef>
+          <a:fontRef idx="minor">
+            <a:schemeClr val="tx1"/>
+          </a:fontRef>
+        </p:style>
+      </p:cxnSp>
+      <p:cxnSp>
+        <p:nvCxnSpPr>
+          <p:cNvPr id="12" name="Connector 11"/>
+          <p:cNvCxnSpPr/>
+          <p:nvPr/>
+        </p:nvCxnSpPr>
+        <p:spPr>
+          <a:xfrm>
+            <a:off x="11825935" y="411480"/>
+            <a:ext cx="182880" cy="0"/>
+          </a:xfrm>
+          <a:prstGeom prst="line">
+            <a:avLst/>
+          </a:prstGeom>
+          <a:ln w="6350">
+            <a:solidFill>
+              <a:srgbClr val="B8C2CC"/>
+            </a:solidFill>
+          </a:ln>
+        </p:spPr>
+        <p:style>
+          <a:lnRef idx="2">
+            <a:schemeClr val="accent1"/>
+          </a:lnRef>
+          <a:fillRef idx="0">
+            <a:schemeClr val="accent1"/>
+          </a:fillRef>
+          <a:effectRef idx="1">
+            <a:schemeClr val="accent1"/>
+          </a:effectRef>
+          <a:fontRef idx="minor">
+            <a:schemeClr val="tx1"/>
+          </a:fontRef>
+        </p:style>
+      </p:cxnSp>
+      <p:cxnSp>
+        <p:nvCxnSpPr>
+          <p:cNvPr id="13" name="Connector 12"/>
+          <p:cNvCxnSpPr/>
+          <p:nvPr/>
+        </p:nvCxnSpPr>
+        <p:spPr>
+          <a:xfrm>
+            <a:off x="11917375" y="320040"/>
+            <a:ext cx="0" cy="182880"/>
+          </a:xfrm>
+          <a:prstGeom prst="line">
+            <a:avLst/>
+          </a:prstGeom>
+          <a:ln w="6350">
+            <a:solidFill>
+              <a:srgbClr val="B8C2CC"/>
+            </a:solidFill>
+          </a:ln>
+        </p:spPr>
+        <p:style>
+          <a:lnRef idx="2">
+            <a:schemeClr val="accent1"/>
+          </a:lnRef>
+          <a:fillRef idx="0">
+            <a:schemeClr val="accent1"/>
+          </a:fillRef>
+          <a:effectRef idx="1">
+            <a:schemeClr val="accent1"/>
+          </a:effectRef>
+          <a:fontRef idx="minor">
+            <a:schemeClr val="tx1"/>
+          </a:fontRef>
+        </p:style>
+      </p:cxnSp>
+      <p:cxnSp>
+        <p:nvCxnSpPr>
+          <p:cNvPr id="14" name="Connector 13"/>
+          <p:cNvCxnSpPr/>
+          <p:nvPr/>
+        </p:nvCxnSpPr>
+        <p:spPr>
+          <a:xfrm>
+            <a:off x="182880" y="6583680"/>
+            <a:ext cx="182880" cy="0"/>
+          </a:xfrm>
+          <a:prstGeom prst="line">
+            <a:avLst/>
+          </a:prstGeom>
+          <a:ln w="6350">
+            <a:solidFill>
+              <a:srgbClr val="B8C2CC"/>
+            </a:solidFill>
+          </a:ln>
+        </p:spPr>
+        <p:style>
+          <a:lnRef idx="2">
+            <a:schemeClr val="accent1"/>
+          </a:lnRef>
+          <a:fillRef idx="0">
+            <a:schemeClr val="accent1"/>
+          </a:fillRef>
+          <a:effectRef idx="1">
+            <a:schemeClr val="accent1"/>
+          </a:effectRef>
+          <a:fontRef idx="minor">
+            <a:schemeClr val="tx1"/>
+          </a:fontRef>
+        </p:style>
+      </p:cxnSp>
+      <p:cxnSp>
+        <p:nvCxnSpPr>
+          <p:cNvPr id="15" name="Connector 14"/>
+          <p:cNvCxnSpPr/>
+          <p:nvPr/>
+        </p:nvCxnSpPr>
+        <p:spPr>
+          <a:xfrm>
+            <a:off x="274320" y="6492240"/>
+            <a:ext cx="0" cy="182880"/>
+          </a:xfrm>
+          <a:prstGeom prst="line">
+            <a:avLst/>
+          </a:prstGeom>
+          <a:ln w="6350">
+            <a:solidFill>
+              <a:srgbClr val="B8C2CC"/>
+            </a:solidFill>
+          </a:ln>
+        </p:spPr>
+        <p:style>
+          <a:lnRef idx="2">
+            <a:schemeClr val="accent1"/>
+          </a:lnRef>
+          <a:fillRef idx="0">
+            <a:schemeClr val="accent1"/>
+          </a:fillRef>
+          <a:effectRef idx="1">
+            <a:schemeClr val="accent1"/>
+          </a:effectRef>
+          <a:fontRef idx="minor">
+            <a:schemeClr val="tx1"/>
+          </a:fontRef>
+        </p:style>
+      </p:cxnSp>
+      <p:cxnSp>
+        <p:nvCxnSpPr>
+          <p:cNvPr id="16" name="Connector 15"/>
+          <p:cNvCxnSpPr/>
+          <p:nvPr/>
+        </p:nvCxnSpPr>
+        <p:spPr>
+          <a:xfrm>
+            <a:off x="11825935" y="6583680"/>
+            <a:ext cx="182880" cy="0"/>
+          </a:xfrm>
+          <a:prstGeom prst="line">
+            <a:avLst/>
+          </a:prstGeom>
+          <a:ln w="6350">
+            <a:solidFill>
+              <a:srgbClr val="B8C2CC"/>
+            </a:solidFill>
+          </a:ln>
+        </p:spPr>
+        <p:style>
+          <a:lnRef idx="2">
+            <a:schemeClr val="accent1"/>
+          </a:lnRef>
+          <a:fillRef idx="0">
+            <a:schemeClr val="accent1"/>
+          </a:fillRef>
+          <a:effectRef idx="1">
+            <a:schemeClr val="accent1"/>
+          </a:effectRef>
+          <a:fontRef idx="minor">
+            <a:schemeClr val="tx1"/>
+          </a:fontRef>
+        </p:style>
+      </p:cxnSp>
+      <p:cxnSp>
+        <p:nvCxnSpPr>
+          <p:cNvPr id="17" name="Connector 16"/>
+          <p:cNvCxnSpPr/>
+          <p:nvPr/>
+        </p:nvCxnSpPr>
+        <p:spPr>
+          <a:xfrm>
+            <a:off x="11917375" y="6492240"/>
+            <a:ext cx="0" cy="182880"/>
+          </a:xfrm>
+          <a:prstGeom prst="line">
+            <a:avLst/>
+          </a:prstGeom>
+          <a:ln w="6350">
+            <a:solidFill>
+              <a:srgbClr val="B8C2CC"/>
+            </a:solidFill>
+          </a:ln>
+        </p:spPr>
+        <p:style>
+          <a:lnRef idx="2">
+            <a:schemeClr val="accent1"/>
+          </a:lnRef>
+          <a:fillRef idx="0">
+            <a:schemeClr val="accent1"/>
+          </a:fillRef>
+          <a:effectRef idx="1">
+            <a:schemeClr val="accent1"/>
+          </a:effectRef>
+          <a:fontRef idx="minor">
+            <a:schemeClr val="tx1"/>
+          </a:fontRef>
+        </p:style>
+      </p:cxnSp>
+      <p:sp>
+        <p:nvSpPr>
+          <p:cNvPr id="18" name="Rectangle 17"/>
+          <p:cNvSpPr/>
+          <p:nvPr/>
+        </p:nvSpPr>
+        <p:spPr>
+          <a:xfrm>
+            <a:off x="1476203" y="1499235"/>
+            <a:ext cx="6740233" cy="4773930"/>
+          </a:xfrm>
+          <a:prstGeom prst="rect">
+            <a:avLst/>
+          </a:prstGeom>
+          <a:noFill/>
+          <a:ln w="9525">
+            <a:solidFill>
+              <a:srgbClr val="B8C2CC"/>
+            </a:solidFill>
+          </a:ln>
+          <a:effectLst/>
+        </p:spPr>
+        <p:style>
+          <a:lnRef idx="1">
+            <a:schemeClr val="accent1"/>
+          </a:lnRef>
+          <a:fillRef idx="3">
+            <a:schemeClr val="accent1"/>
+          </a:fillRef>
+          <a:effectRef idx="2">
+            <a:schemeClr val="accent1"/>
+          </a:effectRef>
+          <a:fontRef idx="minor">
+            <a:schemeClr val="lt1"/>
+          </a:fontRef>
+        </p:style>
+        <p:txBody>
+          <a:bodyPr rtlCol="0" anchor="ctr"/>
+          <a:lstStyle/>
+          <a:p>
+            <a:pPr algn="ctr"/>
+          </a:p>
+        </p:txBody>
+      </p:sp>
+      <p:pic>
+        <p:nvPicPr>
+          <p:cNvPr id="19" name="Picture 18" descr="fig1_trajectory.png"/>
+          <p:cNvPicPr>
+            <a:picLocks noChangeAspect="1"/>
+          </p:cNvPicPr>
+          <p:nvPr/>
+        </p:nvPicPr>
+        <p:blipFill>
+          <a:blip r:embed="rId2"/>
+          <a:stretch>
+            <a:fillRect/>
+          </a:stretch>
+        </p:blipFill>
+        <p:spPr>
+          <a:xfrm>
+            <a:off x="1485728" y="1508760"/>
+            <a:ext cx="6721183" cy="4754880"/>
+          </a:xfrm>
+          <a:prstGeom prst="rect">
+            <a:avLst/>
+          </a:prstGeom>
+        </p:spPr>
+      </p:pic>
+      <p:sp>
+        <p:nvSpPr>
+          <p:cNvPr id="20" name="Rectangle 19"/>
+          <p:cNvSpPr/>
+          <p:nvPr/>
+        </p:nvSpPr>
+        <p:spPr>
+          <a:xfrm>
+            <a:off x="9372600" y="1508760"/>
+            <a:ext cx="2423160" cy="4754880"/>
+          </a:xfrm>
+          <a:prstGeom prst="rect">
+            <a:avLst/>
+          </a:prstGeom>
+          <a:solidFill>
+            <a:srgbClr val="F6F8FA"/>
+          </a:solidFill>
+          <a:ln>
+            <a:noFill/>
+          </a:ln>
+          <a:effectLst/>
+        </p:spPr>
+        <p:style>
+          <a:lnRef idx="1">
+            <a:schemeClr val="accent1"/>
+          </a:lnRef>
+          <a:fillRef idx="3">
+            <a:schemeClr val="accent1"/>
+          </a:fillRef>
+          <a:effectRef idx="2">
+            <a:schemeClr val="accent1"/>
+          </a:effectRef>
+          <a:fontRef idx="minor">
+            <a:schemeClr val="lt1"/>
+          </a:fontRef>
+        </p:style>
+        <p:txBody>
+          <a:bodyPr rtlCol="0" anchor="ctr"/>
+          <a:lstStyle/>
+          <a:p>
+            <a:pPr algn="ctr"/>
+          </a:p>
+        </p:txBody>
+      </p:sp>
+      <p:sp>
+        <p:nvSpPr>
+          <p:cNvPr id="21" name="Rectangle 20"/>
+          <p:cNvSpPr/>
+          <p:nvPr/>
+        </p:nvSpPr>
+        <p:spPr>
+          <a:xfrm>
+            <a:off x="9372600" y="1508760"/>
+            <a:ext cx="2423160" cy="411480"/>
+          </a:xfrm>
+          <a:prstGeom prst="rect">
+            <a:avLst/>
+          </a:prstGeom>
+          <a:solidFill>
+            <a:srgbClr val="142E55"/>
+          </a:solidFill>
+          <a:ln>
+            <a:noFill/>
+          </a:ln>
+          <a:effectLst/>
+        </p:spPr>
+        <p:style>
+          <a:lnRef idx="1">
+            <a:schemeClr val="accent1"/>
+          </a:lnRef>
+          <a:fillRef idx="3">
+            <a:schemeClr val="accent1"/>
+          </a:fillRef>
+          <a:effectRef idx="2">
+            <a:schemeClr val="accent1"/>
+          </a:effectRef>
+          <a:fontRef idx="minor">
+            <a:schemeClr val="lt1"/>
+          </a:fontRef>
+        </p:style>
+        <p:txBody>
+          <a:bodyPr rtlCol="0" anchor="ctr"/>
+          <a:lstStyle/>
+          <a:p>
+            <a:pPr algn="ctr"/>
+          </a:p>
+        </p:txBody>
+      </p:sp>
+      <p:sp>
+        <p:nvSpPr>
+          <p:cNvPr id="22" name="TextBox 21"/>
+          <p:cNvSpPr txBox="1"/>
+          <p:nvPr/>
+        </p:nvSpPr>
+        <p:spPr>
+          <a:xfrm>
+            <a:off x="9537192" y="1508760"/>
+            <a:ext cx="2194560" cy="411480"/>
+          </a:xfrm>
+          <a:prstGeom prst="rect">
+            <a:avLst/>
+          </a:prstGeom>
+          <a:noFill/>
+        </p:spPr>
+        <p:txBody>
+          <a:bodyPr wrap="square" lIns="0" rIns="0" tIns="0" bIns="0" anchor="ctr">
+            <a:spAutoFit/>
+          </a:bodyPr>
+          <a:lstStyle/>
+          <a:p>
+            <a:pPr algn="l">
+              <a:lnSpc>
+                <a:spcPct val="115000"/>
+              </a:lnSpc>
+            </a:pPr>
+            <a:r>
+              <a:rPr sz="1000" b="1" i="0">
+                <a:solidFill>
+                  <a:srgbClr val="C9A961"/>
+                </a:solidFill>
+                <a:latin typeface="Calibri"/>
+              </a:rPr>
+              <a:t>IF ASKED ABOUT…</a:t>
+            </a:r>
+          </a:p>
+        </p:txBody>
+      </p:sp>
+      <p:sp>
+        <p:nvSpPr>
+          <p:cNvPr id="23" name="Rectangle 22"/>
+          <p:cNvSpPr/>
+          <p:nvPr/>
+        </p:nvSpPr>
+        <p:spPr>
+          <a:xfrm>
+            <a:off x="9537192" y="2139696"/>
+            <a:ext cx="73152" cy="73152"/>
+          </a:xfrm>
+          <a:prstGeom prst="rect">
+            <a:avLst/>
+          </a:prstGeom>
+          <a:solidFill>
+            <a:srgbClr val="C9A961"/>
+          </a:solidFill>
+          <a:ln>
+            <a:noFill/>
+          </a:ln>
+          <a:effectLst/>
+        </p:spPr>
+        <p:style>
+          <a:lnRef idx="1">
+            <a:schemeClr val="accent1"/>
+          </a:lnRef>
+          <a:fillRef idx="3">
+            <a:schemeClr val="accent1"/>
+          </a:fillRef>
+          <a:effectRef idx="2">
+            <a:schemeClr val="accent1"/>
+          </a:effectRef>
+          <a:fontRef idx="minor">
+            <a:schemeClr val="lt1"/>
+          </a:fontRef>
+        </p:style>
+        <p:txBody>
+          <a:bodyPr rtlCol="0" anchor="ctr"/>
+          <a:lstStyle/>
+          <a:p>
+            <a:pPr algn="ctr"/>
+          </a:p>
+        </p:txBody>
+      </p:sp>
+      <p:sp>
+        <p:nvSpPr>
+          <p:cNvPr id="24" name="TextBox 23"/>
+          <p:cNvSpPr txBox="1"/>
+          <p:nvPr/>
+        </p:nvSpPr>
+        <p:spPr>
+          <a:xfrm>
+            <a:off x="9720072" y="2103120"/>
+            <a:ext cx="1965960" cy="640080"/>
+          </a:xfrm>
+          <a:prstGeom prst="rect">
+            <a:avLst/>
+          </a:prstGeom>
+          <a:noFill/>
+        </p:spPr>
+        <p:txBody>
+          <a:bodyPr wrap="square" lIns="0" rIns="0" tIns="0" bIns="0" anchor="t">
+            <a:spAutoFit/>
+          </a:bodyPr>
+          <a:lstStyle/>
+          <a:p>
+            <a:pPr algn="l">
+              <a:lnSpc>
+                <a:spcPct val="125000"/>
+              </a:lnSpc>
+            </a:pPr>
+            <a:r>
+              <a:rPr sz="1000" b="0" i="0">
+                <a:solidFill>
+                  <a:srgbClr val="1A1A1A"/>
+                </a:solidFill>
+                <a:latin typeface="Calibri"/>
+              </a:rPr>
+              <a:t>My three research</a:t>
+            </a:r>
+          </a:p>
+          <a:p>
+            <a:pPr algn="l">
+              <a:lnSpc>
+                <a:spcPct val="125000"/>
+              </a:lnSpc>
+            </a:pPr>
+            <a:r>
+              <a:rPr sz="1000" b="0" i="0">
+                <a:solidFill>
+                  <a:srgbClr val="1A1A1A"/>
+                </a:solidFill>
+                <a:latin typeface="Calibri"/>
+              </a:rPr>
+              <a:t>stages in detail</a:t>
+            </a:r>
+          </a:p>
+        </p:txBody>
+      </p:sp>
+      <p:sp>
+        <p:nvSpPr>
+          <p:cNvPr id="25" name="Rectangle 24"/>
+          <p:cNvSpPr/>
+          <p:nvPr/>
+        </p:nvSpPr>
+        <p:spPr>
+          <a:xfrm>
+            <a:off x="9537192" y="2825496"/>
+            <a:ext cx="73152" cy="73152"/>
+          </a:xfrm>
+          <a:prstGeom prst="rect">
+            <a:avLst/>
+          </a:prstGeom>
+          <a:solidFill>
+            <a:srgbClr val="C9A961"/>
+          </a:solidFill>
+          <a:ln>
+            <a:noFill/>
+          </a:ln>
+          <a:effectLst/>
+        </p:spPr>
+        <p:style>
+          <a:lnRef idx="1">
+            <a:schemeClr val="accent1"/>
+          </a:lnRef>
+          <a:fillRef idx="3">
+            <a:schemeClr val="accent1"/>
+          </a:fillRef>
+          <a:effectRef idx="2">
+            <a:schemeClr val="accent1"/>
+          </a:effectRef>
+          <a:fontRef idx="minor">
+            <a:schemeClr val="lt1"/>
+          </a:fontRef>
+        </p:style>
+        <p:txBody>
+          <a:bodyPr rtlCol="0" anchor="ctr"/>
+          <a:lstStyle/>
+          <a:p>
+            <a:pPr algn="ctr"/>
+          </a:p>
+        </p:txBody>
+      </p:sp>
+      <p:sp>
+        <p:nvSpPr>
+          <p:cNvPr id="26" name="TextBox 25"/>
+          <p:cNvSpPr txBox="1"/>
+          <p:nvPr/>
+        </p:nvSpPr>
+        <p:spPr>
+          <a:xfrm>
+            <a:off x="9720072" y="2788920"/>
+            <a:ext cx="1965960" cy="640080"/>
+          </a:xfrm>
+          <a:prstGeom prst="rect">
+            <a:avLst/>
+          </a:prstGeom>
+          <a:noFill/>
+        </p:spPr>
+        <p:txBody>
+          <a:bodyPr wrap="square" lIns="0" rIns="0" tIns="0" bIns="0" anchor="t">
+            <a:spAutoFit/>
+          </a:bodyPr>
+          <a:lstStyle/>
+          <a:p>
+            <a:pPr algn="l">
+              <a:lnSpc>
+                <a:spcPct val="125000"/>
+              </a:lnSpc>
+            </a:pPr>
+            <a:r>
+              <a:rPr sz="1000" b="0" i="0">
+                <a:solidFill>
+                  <a:srgbClr val="1A1A1A"/>
+                </a:solidFill>
+                <a:latin typeface="Calibri"/>
+              </a:rPr>
+              <a:t>Why each stage</a:t>
+            </a:r>
+          </a:p>
+          <a:p>
+            <a:pPr algn="l">
+              <a:lnSpc>
+                <a:spcPct val="125000"/>
+              </a:lnSpc>
+            </a:pPr>
+            <a:r>
+              <a:rPr sz="1000" b="0" i="0">
+                <a:solidFill>
+                  <a:srgbClr val="1A1A1A"/>
+                </a:solidFill>
+                <a:latin typeface="Calibri"/>
+              </a:rPr>
+              <a:t>led to the next</a:t>
+            </a:r>
+          </a:p>
+        </p:txBody>
+      </p:sp>
+      <p:sp>
+        <p:nvSpPr>
+          <p:cNvPr id="27" name="Rectangle 26"/>
+          <p:cNvSpPr/>
+          <p:nvPr/>
+        </p:nvSpPr>
+        <p:spPr>
+          <a:xfrm>
+            <a:off x="9537192" y="3511296"/>
+            <a:ext cx="73152" cy="73152"/>
+          </a:xfrm>
+          <a:prstGeom prst="rect">
+            <a:avLst/>
+          </a:prstGeom>
+          <a:solidFill>
+            <a:srgbClr val="C9A961"/>
+          </a:solidFill>
+          <a:ln>
+            <a:noFill/>
+          </a:ln>
+          <a:effectLst/>
+        </p:spPr>
+        <p:style>
+          <a:lnRef idx="1">
+            <a:schemeClr val="accent1"/>
+          </a:lnRef>
+          <a:fillRef idx="3">
+            <a:schemeClr val="accent1"/>
+          </a:fillRef>
+          <a:effectRef idx="2">
+            <a:schemeClr val="accent1"/>
+          </a:effectRef>
+          <a:fontRef idx="minor">
+            <a:schemeClr val="lt1"/>
+          </a:fontRef>
+        </p:style>
+        <p:txBody>
+          <a:bodyPr rtlCol="0" anchor="ctr"/>
+          <a:lstStyle/>
+          <a:p>
+            <a:pPr algn="ctr"/>
+          </a:p>
+        </p:txBody>
+      </p:sp>
+      <p:sp>
+        <p:nvSpPr>
+          <p:cNvPr id="28" name="TextBox 27"/>
+          <p:cNvSpPr txBox="1"/>
+          <p:nvPr/>
+        </p:nvSpPr>
+        <p:spPr>
+          <a:xfrm>
+            <a:off x="9720072" y="3474720"/>
+            <a:ext cx="1965960" cy="640080"/>
+          </a:xfrm>
+          <a:prstGeom prst="rect">
+            <a:avLst/>
+          </a:prstGeom>
+          <a:noFill/>
+        </p:spPr>
+        <p:txBody>
+          <a:bodyPr wrap="square" lIns="0" rIns="0" tIns="0" bIns="0" anchor="t">
+            <a:spAutoFit/>
+          </a:bodyPr>
+          <a:lstStyle/>
+          <a:p>
+            <a:pPr algn="l">
+              <a:lnSpc>
+                <a:spcPct val="125000"/>
+              </a:lnSpc>
+            </a:pPr>
+            <a:r>
+              <a:rPr sz="1000" b="0" i="0">
+                <a:solidFill>
+                  <a:srgbClr val="1A1A1A"/>
+                </a:solidFill>
+                <a:latin typeface="Calibri"/>
+              </a:rPr>
+              <a:t>Specific methods</a:t>
+            </a:r>
+          </a:p>
+          <a:p>
+            <a:pPr algn="l">
+              <a:lnSpc>
+                <a:spcPct val="125000"/>
+              </a:lnSpc>
+            </a:pPr>
+            <a:r>
+              <a:rPr sz="1000" b="0" i="0">
+                <a:solidFill>
+                  <a:srgbClr val="1A1A1A"/>
+                </a:solidFill>
+                <a:latin typeface="Calibri"/>
+              </a:rPr>
+              <a:t>per stage</a:t>
+            </a:r>
+          </a:p>
+        </p:txBody>
+      </p:sp>
+      <p:sp>
+        <p:nvSpPr>
+          <p:cNvPr id="29" name="Rectangle 28"/>
+          <p:cNvSpPr/>
+          <p:nvPr/>
+        </p:nvSpPr>
+        <p:spPr>
+          <a:xfrm>
+            <a:off x="9537192" y="4197096"/>
+            <a:ext cx="73152" cy="73152"/>
+          </a:xfrm>
+          <a:prstGeom prst="rect">
+            <a:avLst/>
+          </a:prstGeom>
+          <a:solidFill>
+            <a:srgbClr val="C9A961"/>
+          </a:solidFill>
+          <a:ln>
+            <a:noFill/>
+          </a:ln>
+          <a:effectLst/>
+        </p:spPr>
+        <p:style>
+          <a:lnRef idx="1">
+            <a:schemeClr val="accent1"/>
+          </a:lnRef>
+          <a:fillRef idx="3">
+            <a:schemeClr val="accent1"/>
+          </a:fillRef>
+          <a:effectRef idx="2">
+            <a:schemeClr val="accent1"/>
+          </a:effectRef>
+          <a:fontRef idx="minor">
+            <a:schemeClr val="lt1"/>
+          </a:fontRef>
+        </p:style>
+        <p:txBody>
+          <a:bodyPr rtlCol="0" anchor="ctr"/>
+          <a:lstStyle/>
+          <a:p>
+            <a:pPr algn="ctr"/>
+          </a:p>
+        </p:txBody>
+      </p:sp>
+      <p:sp>
+        <p:nvSpPr>
+          <p:cNvPr id="30" name="TextBox 29"/>
+          <p:cNvSpPr txBox="1"/>
+          <p:nvPr/>
+        </p:nvSpPr>
+        <p:spPr>
+          <a:xfrm>
+            <a:off x="9720072" y="4160520"/>
+            <a:ext cx="1965960" cy="640080"/>
+          </a:xfrm>
+          <a:prstGeom prst="rect">
+            <a:avLst/>
+          </a:prstGeom>
+          <a:noFill/>
+        </p:spPr>
+        <p:txBody>
+          <a:bodyPr wrap="square" lIns="0" rIns="0" tIns="0" bIns="0" anchor="t">
+            <a:spAutoFit/>
+          </a:bodyPr>
+          <a:lstStyle/>
+          <a:p>
+            <a:pPr algn="l">
+              <a:lnSpc>
+                <a:spcPct val="125000"/>
+              </a:lnSpc>
+            </a:pPr>
+            <a:r>
+              <a:rPr sz="1000" b="0" i="0">
+                <a:solidFill>
+                  <a:srgbClr val="1A1A1A"/>
+                </a:solidFill>
+                <a:latin typeface="Calibri"/>
+              </a:rPr>
+              <a:t>How Stage 3 leads</a:t>
+            </a:r>
+          </a:p>
+          <a:p>
+            <a:pPr algn="l">
+              <a:lnSpc>
+                <a:spcPct val="125000"/>
+              </a:lnSpc>
+            </a:pPr>
+            <a:r>
+              <a:rPr sz="1000" b="0" i="0">
+                <a:solidFill>
+                  <a:srgbClr val="1A1A1A"/>
+                </a:solidFill>
+                <a:latin typeface="Calibri"/>
+              </a:rPr>
+              <a:t>to this project</a:t>
+            </a:r>
+          </a:p>
+        </p:txBody>
+      </p:sp>
+    </p:spTree>
+  </p:cSld>
+  <p:clrMapOvr>
+    <a:masterClrMapping/>
+  </p:clrMapOvr>
+</p:sld>
+</file>
+
+<file path=ppt/slides/slide13.xml><?xml version="1.0" encoding="utf-8"?>
+<p:sld xmlns:a="http://schemas.openxmlformats.org/drawingml/2006/main" xmlns:p="http://schemas.openxmlformats.org/presentationml/2006/main" xmlns:r="http://schemas.openxmlformats.org/officeDocument/2006/relationships">
+  <p:cSld>
+    <p:spTree>
+      <p:nvGrpSpPr>
+        <p:cNvPr id="1" name=""/>
+        <p:cNvGrpSpPr/>
+        <p:nvPr/>
+      </p:nvGrpSpPr>
+      <p:grpSpPr/>
+      <p:sp>
+        <p:nvSpPr>
+          <p:cNvPr id="2" name="Rectangle 1"/>
+          <p:cNvSpPr/>
+          <p:nvPr/>
+        </p:nvSpPr>
+        <p:spPr>
+          <a:xfrm>
+            <a:off x="0" y="0"/>
+            <a:ext cx="12191695" cy="6858000"/>
+          </a:xfrm>
+          <a:prstGeom prst="rect">
+            <a:avLst/>
+          </a:prstGeom>
+          <a:solidFill>
+            <a:srgbClr val="FFFFFF"/>
+          </a:solidFill>
+          <a:ln>
+            <a:noFill/>
+          </a:ln>
+          <a:effectLst/>
+        </p:spPr>
+        <p:style>
+          <a:lnRef idx="1">
+            <a:schemeClr val="accent1"/>
+          </a:lnRef>
+          <a:fillRef idx="3">
+            <a:schemeClr val="accent1"/>
+          </a:fillRef>
+          <a:effectRef idx="2">
+            <a:schemeClr val="accent1"/>
+          </a:effectRef>
+          <a:fontRef idx="minor">
+            <a:schemeClr val="lt1"/>
+          </a:fontRef>
+        </p:style>
+        <p:txBody>
+          <a:bodyPr rtlCol="0" anchor="ctr"/>
+          <a:lstStyle/>
+          <a:p>
+            <a:pPr algn="ctr"/>
+          </a:p>
+        </p:txBody>
+      </p:sp>
+      <p:sp>
+        <p:nvSpPr>
+          <p:cNvPr id="3" name="Rectangle 2"/>
+          <p:cNvSpPr/>
+          <p:nvPr/>
+        </p:nvSpPr>
+        <p:spPr>
+          <a:xfrm>
+            <a:off x="0" y="0"/>
+            <a:ext cx="12191695" cy="164592"/>
+          </a:xfrm>
+          <a:prstGeom prst="rect">
+            <a:avLst/>
+          </a:prstGeom>
+          <a:solidFill>
+            <a:srgbClr val="8C6F33"/>
+          </a:solidFill>
+          <a:ln>
+            <a:noFill/>
+          </a:ln>
+          <a:effectLst/>
+        </p:spPr>
+        <p:style>
+          <a:lnRef idx="1">
+            <a:schemeClr val="accent1"/>
+          </a:lnRef>
+          <a:fillRef idx="3">
+            <a:schemeClr val="accent1"/>
+          </a:fillRef>
+          <a:effectRef idx="2">
+            <a:schemeClr val="accent1"/>
+          </a:effectRef>
+          <a:fontRef idx="minor">
+            <a:schemeClr val="lt1"/>
+          </a:fontRef>
+        </p:style>
+        <p:txBody>
+          <a:bodyPr rtlCol="0" anchor="ctr"/>
+          <a:lstStyle/>
+          <a:p>
+            <a:pPr algn="ctr"/>
+          </a:p>
+        </p:txBody>
+      </p:sp>
+      <p:sp>
+        <p:nvSpPr>
+          <p:cNvPr id="4" name="Rectangle 3"/>
+          <p:cNvSpPr/>
+          <p:nvPr/>
+        </p:nvSpPr>
+        <p:spPr>
+          <a:xfrm>
+            <a:off x="0" y="164592"/>
+            <a:ext cx="1828800" cy="38100"/>
+          </a:xfrm>
+          <a:prstGeom prst="rect">
+            <a:avLst/>
+          </a:prstGeom>
+          <a:solidFill>
+            <a:srgbClr val="142E55"/>
+          </a:solidFill>
+          <a:ln>
+            <a:noFill/>
+          </a:ln>
+          <a:effectLst/>
+        </p:spPr>
+        <p:style>
+          <a:lnRef idx="1">
+            <a:schemeClr val="accent1"/>
+          </a:lnRef>
+          <a:fillRef idx="3">
+            <a:schemeClr val="accent1"/>
+          </a:fillRef>
+          <a:effectRef idx="2">
+            <a:schemeClr val="accent1"/>
+          </a:effectRef>
+          <a:fontRef idx="minor">
+            <a:schemeClr val="lt1"/>
+          </a:fontRef>
+        </p:style>
+        <p:txBody>
+          <a:bodyPr rtlCol="0" anchor="ctr"/>
+          <a:lstStyle/>
+          <a:p>
+            <a:pPr algn="ctr"/>
+          </a:p>
+        </p:txBody>
+      </p:sp>
+      <p:sp>
+        <p:nvSpPr>
+          <p:cNvPr id="5" name="TextBox 4"/>
+          <p:cNvSpPr txBox="1"/>
+          <p:nvPr/>
+        </p:nvSpPr>
+        <p:spPr>
+          <a:xfrm>
+            <a:off x="411480" y="18288"/>
+            <a:ext cx="7315200" cy="146304"/>
+          </a:xfrm>
+          <a:prstGeom prst="rect">
+            <a:avLst/>
+          </a:prstGeom>
+          <a:noFill/>
+        </p:spPr>
+        <p:txBody>
+          <a:bodyPr wrap="square" lIns="0" rIns="0" tIns="0" bIns="0" anchor="ctr">
+            <a:spAutoFit/>
+          </a:bodyPr>
+          <a:lstStyle/>
+          <a:p>
+            <a:pPr algn="l">
+              <a:lnSpc>
+                <a:spcPct val="115000"/>
+              </a:lnSpc>
+            </a:pPr>
+            <a:r>
+              <a:rPr sz="800" b="1" i="0">
+                <a:solidFill>
+                  <a:srgbClr val="FFFFFF"/>
+                </a:solidFill>
+                <a:latin typeface="Calibri"/>
+              </a:rPr>
+              <a:t>APPENDIX  ·  BACKUP FOR Q&amp;A  ·  NOT PART OF THE 10-MIN TALK</a:t>
+            </a:r>
+          </a:p>
+        </p:txBody>
+      </p:sp>
+      <p:sp>
+        <p:nvSpPr>
+          <p:cNvPr id="6" name="TextBox 5"/>
+          <p:cNvSpPr txBox="1"/>
+          <p:nvPr/>
+        </p:nvSpPr>
+        <p:spPr>
+          <a:xfrm>
+            <a:off x="9601200" y="18288"/>
+            <a:ext cx="2468880" cy="146304"/>
+          </a:xfrm>
+          <a:prstGeom prst="rect">
+            <a:avLst/>
+          </a:prstGeom>
+          <a:noFill/>
+        </p:spPr>
+        <p:txBody>
+          <a:bodyPr wrap="square" lIns="0" rIns="0" tIns="0" bIns="0" anchor="ctr">
+            <a:spAutoFit/>
+          </a:bodyPr>
+          <a:lstStyle/>
+          <a:p>
+            <a:pPr algn="r">
+              <a:lnSpc>
+                <a:spcPct val="115000"/>
+              </a:lnSpc>
+            </a:pPr>
+            <a:r>
+              <a:rPr sz="800" b="1" i="0">
+                <a:solidFill>
+                  <a:srgbClr val="142E55"/>
+                </a:solidFill>
+                <a:latin typeface="Calibri"/>
+              </a:rPr>
+              <a:t>BACKUP  A2  /  A4</a:t>
+            </a:r>
+          </a:p>
+        </p:txBody>
+      </p:sp>
+      <p:sp>
+        <p:nvSpPr>
+          <p:cNvPr id="7" name="TextBox 6"/>
+          <p:cNvSpPr txBox="1"/>
+          <p:nvPr/>
+        </p:nvSpPr>
+        <p:spPr>
+          <a:xfrm>
+            <a:off x="411480" y="347472"/>
+            <a:ext cx="7315200" cy="274320"/>
+          </a:xfrm>
+          <a:prstGeom prst="rect">
+            <a:avLst/>
+          </a:prstGeom>
+          <a:noFill/>
+        </p:spPr>
+        <p:txBody>
+          <a:bodyPr wrap="square" lIns="0" rIns="0" tIns="0" bIns="0" anchor="t">
+            <a:spAutoFit/>
+          </a:bodyPr>
+          <a:lstStyle/>
+          <a:p>
+            <a:pPr algn="l">
+              <a:lnSpc>
+                <a:spcPct val="115000"/>
+              </a:lnSpc>
+            </a:pPr>
+            <a:r>
+              <a:rPr sz="1000" b="1" i="0">
+                <a:solidFill>
+                  <a:srgbClr val="8C6F33"/>
+                </a:solidFill>
+                <a:latin typeface="Calibri"/>
+              </a:rPr>
+              <a:t>ORIGINAL APPLICATION FIGURE</a:t>
+            </a:r>
+          </a:p>
+        </p:txBody>
+      </p:sp>
+      <p:sp>
+        <p:nvSpPr>
+          <p:cNvPr id="8" name="TextBox 7"/>
+          <p:cNvSpPr txBox="1"/>
+          <p:nvPr/>
+        </p:nvSpPr>
+        <p:spPr>
+          <a:xfrm>
+            <a:off x="411480" y="603504"/>
+            <a:ext cx="11430000" cy="411480"/>
+          </a:xfrm>
+          <a:prstGeom prst="rect">
+            <a:avLst/>
+          </a:prstGeom>
+          <a:noFill/>
+        </p:spPr>
+        <p:txBody>
+          <a:bodyPr wrap="square" lIns="0" rIns="0" tIns="0" bIns="0" anchor="t">
+            <a:spAutoFit/>
+          </a:bodyPr>
+          <a:lstStyle/>
+          <a:p>
+            <a:pPr algn="l">
+              <a:lnSpc>
+                <a:spcPct val="100000"/>
+              </a:lnSpc>
+            </a:pPr>
+            <a:r>
+              <a:rPr sz="2200" b="1" i="0">
+                <a:solidFill>
+                  <a:srgbClr val="142E55"/>
+                </a:solidFill>
+                <a:latin typeface="Calibri"/>
+              </a:rPr>
+              <a:t>Cross-Scale Scientific Framework</a:t>
+            </a:r>
+          </a:p>
+        </p:txBody>
+      </p:sp>
+      <p:sp>
+        <p:nvSpPr>
+          <p:cNvPr id="9" name="TextBox 8"/>
+          <p:cNvSpPr txBox="1"/>
+          <p:nvPr/>
+        </p:nvSpPr>
+        <p:spPr>
+          <a:xfrm>
+            <a:off x="411480" y="1078992"/>
+            <a:ext cx="11430000" cy="274320"/>
+          </a:xfrm>
+          <a:prstGeom prst="rect">
+            <a:avLst/>
+          </a:prstGeom>
+          <a:noFill/>
+        </p:spPr>
+        <p:txBody>
+          <a:bodyPr wrap="square" lIns="0" rIns="0" tIns="0" bIns="0" anchor="t">
+            <a:spAutoFit/>
+          </a:bodyPr>
+          <a:lstStyle/>
+          <a:p>
+            <a:pPr algn="l">
+              <a:lnSpc>
+                <a:spcPct val="115000"/>
+              </a:lnSpc>
+            </a:pPr>
+            <a:r>
+              <a:rPr sz="1100" b="0" i="1">
+                <a:solidFill>
+                  <a:srgbClr val="4A5568"/>
+                </a:solidFill>
+                <a:latin typeface="Calibri"/>
+              </a:rPr>
+              <a:t>Figure 2 (application) — green-blue-wind mechanisms, three core scientific questions, technical pathway, and domain-specific knowledge model.</a:t>
+            </a:r>
+          </a:p>
+        </p:txBody>
+      </p:sp>
+      <p:cxnSp>
+        <p:nvCxnSpPr>
+          <p:cNvPr id="10" name="Connector 9"/>
+          <p:cNvCxnSpPr/>
+          <p:nvPr/>
+        </p:nvCxnSpPr>
+        <p:spPr>
+          <a:xfrm>
+            <a:off x="182880" y="411480"/>
+            <a:ext cx="182880" cy="0"/>
+          </a:xfrm>
+          <a:prstGeom prst="line">
+            <a:avLst/>
+          </a:prstGeom>
+          <a:ln w="6350">
+            <a:solidFill>
+              <a:srgbClr val="B8C2CC"/>
+            </a:solidFill>
+          </a:ln>
+        </p:spPr>
+        <p:style>
+          <a:lnRef idx="2">
+            <a:schemeClr val="accent1"/>
+          </a:lnRef>
+          <a:fillRef idx="0">
+            <a:schemeClr val="accent1"/>
+          </a:fillRef>
+          <a:effectRef idx="1">
+            <a:schemeClr val="accent1"/>
+          </a:effectRef>
+          <a:fontRef idx="minor">
+            <a:schemeClr val="tx1"/>
+          </a:fontRef>
+        </p:style>
+      </p:cxnSp>
+      <p:cxnSp>
+        <p:nvCxnSpPr>
+          <p:cNvPr id="11" name="Connector 10"/>
+          <p:cNvCxnSpPr/>
+          <p:nvPr/>
+        </p:nvCxnSpPr>
+        <p:spPr>
+          <a:xfrm>
+            <a:off x="274320" y="320040"/>
+            <a:ext cx="0" cy="182880"/>
+          </a:xfrm>
+          <a:prstGeom prst="line">
+            <a:avLst/>
+          </a:prstGeom>
+          <a:ln w="6350">
+            <a:solidFill>
+              <a:srgbClr val="B8C2CC"/>
+            </a:solidFill>
+          </a:ln>
+        </p:spPr>
+        <p:style>
+          <a:lnRef idx="2">
+            <a:schemeClr val="accent1"/>
+          </a:lnRef>
+          <a:fillRef idx="0">
+            <a:schemeClr val="accent1"/>
+          </a:fillRef>
+          <a:effectRef idx="1">
+            <a:schemeClr val="accent1"/>
+          </a:effectRef>
+          <a:fontRef idx="minor">
+            <a:schemeClr val="tx1"/>
+          </a:fontRef>
+        </p:style>
+      </p:cxnSp>
+      <p:cxnSp>
+        <p:nvCxnSpPr>
+          <p:cNvPr id="12" name="Connector 11"/>
+          <p:cNvCxnSpPr/>
+          <p:nvPr/>
+        </p:nvCxnSpPr>
+        <p:spPr>
+          <a:xfrm>
+            <a:off x="11825935" y="411480"/>
+            <a:ext cx="182880" cy="0"/>
+          </a:xfrm>
+          <a:prstGeom prst="line">
+            <a:avLst/>
+          </a:prstGeom>
+          <a:ln w="6350">
+            <a:solidFill>
+              <a:srgbClr val="B8C2CC"/>
+            </a:solidFill>
+          </a:ln>
+        </p:spPr>
+        <p:style>
+          <a:lnRef idx="2">
+            <a:schemeClr val="accent1"/>
+          </a:lnRef>
+          <a:fillRef idx="0">
+            <a:schemeClr val="accent1"/>
+          </a:fillRef>
+          <a:effectRef idx="1">
+            <a:schemeClr val="accent1"/>
+          </a:effectRef>
+          <a:fontRef idx="minor">
+            <a:schemeClr val="tx1"/>
+          </a:fontRef>
+        </p:style>
+      </p:cxnSp>
+      <p:cxnSp>
+        <p:nvCxnSpPr>
+          <p:cNvPr id="13" name="Connector 12"/>
+          <p:cNvCxnSpPr/>
+          <p:nvPr/>
+        </p:nvCxnSpPr>
+        <p:spPr>
+          <a:xfrm>
+            <a:off x="11917375" y="320040"/>
+            <a:ext cx="0" cy="182880"/>
+          </a:xfrm>
+          <a:prstGeom prst="line">
+            <a:avLst/>
+          </a:prstGeom>
+          <a:ln w="6350">
+            <a:solidFill>
+              <a:srgbClr val="B8C2CC"/>
+            </a:solidFill>
+          </a:ln>
+        </p:spPr>
+        <p:style>
+          <a:lnRef idx="2">
+            <a:schemeClr val="accent1"/>
+          </a:lnRef>
+          <a:fillRef idx="0">
+            <a:schemeClr val="accent1"/>
+          </a:fillRef>
+          <a:effectRef idx="1">
+            <a:schemeClr val="accent1"/>
+          </a:effectRef>
+          <a:fontRef idx="minor">
+            <a:schemeClr val="tx1"/>
+          </a:fontRef>
+        </p:style>
+      </p:cxnSp>
+      <p:cxnSp>
+        <p:nvCxnSpPr>
+          <p:cNvPr id="14" name="Connector 13"/>
+          <p:cNvCxnSpPr/>
+          <p:nvPr/>
+        </p:nvCxnSpPr>
+        <p:spPr>
+          <a:xfrm>
+            <a:off x="182880" y="6583680"/>
+            <a:ext cx="182880" cy="0"/>
+          </a:xfrm>
+          <a:prstGeom prst="line">
+            <a:avLst/>
+          </a:prstGeom>
+          <a:ln w="6350">
+            <a:solidFill>
+              <a:srgbClr val="B8C2CC"/>
+            </a:solidFill>
+          </a:ln>
+        </p:spPr>
+        <p:style>
+          <a:lnRef idx="2">
+            <a:schemeClr val="accent1"/>
+          </a:lnRef>
+          <a:fillRef idx="0">
+            <a:schemeClr val="accent1"/>
+          </a:fillRef>
+          <a:effectRef idx="1">
+            <a:schemeClr val="accent1"/>
+          </a:effectRef>
+          <a:fontRef idx="minor">
+            <a:schemeClr val="tx1"/>
+          </a:fontRef>
+        </p:style>
+      </p:cxnSp>
+      <p:cxnSp>
+        <p:nvCxnSpPr>
+          <p:cNvPr id="15" name="Connector 14"/>
+          <p:cNvCxnSpPr/>
+          <p:nvPr/>
+        </p:nvCxnSpPr>
+        <p:spPr>
+          <a:xfrm>
+            <a:off x="274320" y="6492240"/>
+            <a:ext cx="0" cy="182880"/>
+          </a:xfrm>
+          <a:prstGeom prst="line">
+            <a:avLst/>
+          </a:prstGeom>
+          <a:ln w="6350">
+            <a:solidFill>
+              <a:srgbClr val="B8C2CC"/>
+            </a:solidFill>
+          </a:ln>
+        </p:spPr>
+        <p:style>
+          <a:lnRef idx="2">
+            <a:schemeClr val="accent1"/>
+          </a:lnRef>
+          <a:fillRef idx="0">
+            <a:schemeClr val="accent1"/>
+          </a:fillRef>
+          <a:effectRef idx="1">
+            <a:schemeClr val="accent1"/>
+          </a:effectRef>
+          <a:fontRef idx="minor">
+            <a:schemeClr val="tx1"/>
+          </a:fontRef>
+        </p:style>
+      </p:cxnSp>
+      <p:cxnSp>
+        <p:nvCxnSpPr>
+          <p:cNvPr id="16" name="Connector 15"/>
+          <p:cNvCxnSpPr/>
+          <p:nvPr/>
+        </p:nvCxnSpPr>
+        <p:spPr>
+          <a:xfrm>
+            <a:off x="11825935" y="6583680"/>
+            <a:ext cx="182880" cy="0"/>
+          </a:xfrm>
+          <a:prstGeom prst="line">
+            <a:avLst/>
+          </a:prstGeom>
+          <a:ln w="6350">
+            <a:solidFill>
+              <a:srgbClr val="B8C2CC"/>
+            </a:solidFill>
+          </a:ln>
+        </p:spPr>
+        <p:style>
+          <a:lnRef idx="2">
+            <a:schemeClr val="accent1"/>
+          </a:lnRef>
+          <a:fillRef idx="0">
+            <a:schemeClr val="accent1"/>
+          </a:fillRef>
+          <a:effectRef idx="1">
+            <a:schemeClr val="accent1"/>
+          </a:effectRef>
+          <a:fontRef idx="minor">
+            <a:schemeClr val="tx1"/>
+          </a:fontRef>
+        </p:style>
+      </p:cxnSp>
+      <p:cxnSp>
+        <p:nvCxnSpPr>
+          <p:cNvPr id="17" name="Connector 16"/>
+          <p:cNvCxnSpPr/>
+          <p:nvPr/>
+        </p:nvCxnSpPr>
+        <p:spPr>
+          <a:xfrm>
+            <a:off x="11917375" y="6492240"/>
+            <a:ext cx="0" cy="182880"/>
+          </a:xfrm>
+          <a:prstGeom prst="line">
+            <a:avLst/>
+          </a:prstGeom>
+          <a:ln w="6350">
+            <a:solidFill>
+              <a:srgbClr val="B8C2CC"/>
+            </a:solidFill>
+          </a:ln>
+        </p:spPr>
+        <p:style>
+          <a:lnRef idx="2">
+            <a:schemeClr val="accent1"/>
+          </a:lnRef>
+          <a:fillRef idx="0">
+            <a:schemeClr val="accent1"/>
+          </a:fillRef>
+          <a:effectRef idx="1">
+            <a:schemeClr val="accent1"/>
+          </a:effectRef>
+          <a:fontRef idx="minor">
+            <a:schemeClr val="tx1"/>
+          </a:fontRef>
+        </p:style>
+      </p:cxnSp>
+      <p:sp>
+        <p:nvSpPr>
+          <p:cNvPr id="18" name="Rectangle 17"/>
+          <p:cNvSpPr/>
+          <p:nvPr/>
+        </p:nvSpPr>
+        <p:spPr>
+          <a:xfrm>
+            <a:off x="1794337" y="1499235"/>
+            <a:ext cx="6103966" cy="4773930"/>
+          </a:xfrm>
+          <a:prstGeom prst="rect">
+            <a:avLst/>
+          </a:prstGeom>
+          <a:noFill/>
+          <a:ln w="9525">
+            <a:solidFill>
+              <a:srgbClr val="B8C2CC"/>
+            </a:solidFill>
+          </a:ln>
+          <a:effectLst/>
+        </p:spPr>
+        <p:style>
+          <a:lnRef idx="1">
+            <a:schemeClr val="accent1"/>
+          </a:lnRef>
+          <a:fillRef idx="3">
+            <a:schemeClr val="accent1"/>
+          </a:fillRef>
+          <a:effectRef idx="2">
+            <a:schemeClr val="accent1"/>
+          </a:effectRef>
+          <a:fontRef idx="minor">
+            <a:schemeClr val="lt1"/>
+          </a:fontRef>
+        </p:style>
+        <p:txBody>
+          <a:bodyPr rtlCol="0" anchor="ctr"/>
+          <a:lstStyle/>
+          <a:p>
+            <a:pPr algn="ctr"/>
+          </a:p>
+        </p:txBody>
+      </p:sp>
+      <p:pic>
+        <p:nvPicPr>
+          <p:cNvPr id="19" name="Picture 18" descr="fig2_crossscale.png"/>
+          <p:cNvPicPr>
+            <a:picLocks noChangeAspect="1"/>
+          </p:cNvPicPr>
+          <p:nvPr/>
+        </p:nvPicPr>
+        <p:blipFill>
+          <a:blip r:embed="rId2"/>
+          <a:stretch>
+            <a:fillRect/>
+          </a:stretch>
+        </p:blipFill>
+        <p:spPr>
+          <a:xfrm>
+            <a:off x="1803862" y="1508760"/>
+            <a:ext cx="6084916" cy="4754880"/>
+          </a:xfrm>
+          <a:prstGeom prst="rect">
+            <a:avLst/>
+          </a:prstGeom>
+        </p:spPr>
+      </p:pic>
+      <p:sp>
+        <p:nvSpPr>
+          <p:cNvPr id="20" name="Rectangle 19"/>
+          <p:cNvSpPr/>
+          <p:nvPr/>
+        </p:nvSpPr>
+        <p:spPr>
+          <a:xfrm>
+            <a:off x="9372600" y="1508760"/>
+            <a:ext cx="2423160" cy="4754880"/>
+          </a:xfrm>
+          <a:prstGeom prst="rect">
+            <a:avLst/>
+          </a:prstGeom>
+          <a:solidFill>
+            <a:srgbClr val="F6F8FA"/>
+          </a:solidFill>
+          <a:ln>
+            <a:noFill/>
+          </a:ln>
+          <a:effectLst/>
+        </p:spPr>
+        <p:style>
+          <a:lnRef idx="1">
+            <a:schemeClr val="accent1"/>
+          </a:lnRef>
+          <a:fillRef idx="3">
+            <a:schemeClr val="accent1"/>
+          </a:fillRef>
+          <a:effectRef idx="2">
+            <a:schemeClr val="accent1"/>
+          </a:effectRef>
+          <a:fontRef idx="minor">
+            <a:schemeClr val="lt1"/>
+          </a:fontRef>
+        </p:style>
+        <p:txBody>
+          <a:bodyPr rtlCol="0" anchor="ctr"/>
+          <a:lstStyle/>
+          <a:p>
+            <a:pPr algn="ctr"/>
+          </a:p>
+        </p:txBody>
+      </p:sp>
+      <p:sp>
+        <p:nvSpPr>
+          <p:cNvPr id="21" name="Rectangle 20"/>
+          <p:cNvSpPr/>
+          <p:nvPr/>
+        </p:nvSpPr>
+        <p:spPr>
+          <a:xfrm>
+            <a:off x="9372600" y="1508760"/>
+            <a:ext cx="2423160" cy="411480"/>
+          </a:xfrm>
+          <a:prstGeom prst="rect">
+            <a:avLst/>
+          </a:prstGeom>
+          <a:solidFill>
+            <a:srgbClr val="142E55"/>
+          </a:solidFill>
+          <a:ln>
+            <a:noFill/>
+          </a:ln>
+          <a:effectLst/>
+        </p:spPr>
+        <p:style>
+          <a:lnRef idx="1">
+            <a:schemeClr val="accent1"/>
+          </a:lnRef>
+          <a:fillRef idx="3">
+            <a:schemeClr val="accent1"/>
+          </a:fillRef>
+          <a:effectRef idx="2">
+            <a:schemeClr val="accent1"/>
+          </a:effectRef>
+          <a:fontRef idx="minor">
+            <a:schemeClr val="lt1"/>
+          </a:fontRef>
+        </p:style>
+        <p:txBody>
+          <a:bodyPr rtlCol="0" anchor="ctr"/>
+          <a:lstStyle/>
+          <a:p>
+            <a:pPr algn="ctr"/>
+          </a:p>
+        </p:txBody>
+      </p:sp>
+      <p:sp>
+        <p:nvSpPr>
+          <p:cNvPr id="22" name="TextBox 21"/>
+          <p:cNvSpPr txBox="1"/>
+          <p:nvPr/>
+        </p:nvSpPr>
+        <p:spPr>
+          <a:xfrm>
+            <a:off x="9537192" y="1508760"/>
+            <a:ext cx="2194560" cy="411480"/>
+          </a:xfrm>
+          <a:prstGeom prst="rect">
+            <a:avLst/>
+          </a:prstGeom>
+          <a:noFill/>
+        </p:spPr>
+        <p:txBody>
+          <a:bodyPr wrap="square" lIns="0" rIns="0" tIns="0" bIns="0" anchor="ctr">
+            <a:spAutoFit/>
+          </a:bodyPr>
+          <a:lstStyle/>
+          <a:p>
+            <a:pPr algn="l">
+              <a:lnSpc>
+                <a:spcPct val="115000"/>
+              </a:lnSpc>
+            </a:pPr>
+            <a:r>
+              <a:rPr sz="1000" b="1" i="0">
+                <a:solidFill>
+                  <a:srgbClr val="C9A961"/>
+                </a:solidFill>
+                <a:latin typeface="Calibri"/>
+              </a:rPr>
+              <a:t>IF ASKED ABOUT…</a:t>
+            </a:r>
+          </a:p>
+        </p:txBody>
+      </p:sp>
+      <p:sp>
+        <p:nvSpPr>
+          <p:cNvPr id="23" name="Rectangle 22"/>
+          <p:cNvSpPr/>
+          <p:nvPr/>
+        </p:nvSpPr>
+        <p:spPr>
+          <a:xfrm>
+            <a:off x="9537192" y="2139696"/>
+            <a:ext cx="73152" cy="73152"/>
+          </a:xfrm>
+          <a:prstGeom prst="rect">
+            <a:avLst/>
+          </a:prstGeom>
+          <a:solidFill>
+            <a:srgbClr val="C9A961"/>
+          </a:solidFill>
+          <a:ln>
+            <a:noFill/>
+          </a:ln>
+          <a:effectLst/>
+        </p:spPr>
+        <p:style>
+          <a:lnRef idx="1">
+            <a:schemeClr val="accent1"/>
+          </a:lnRef>
+          <a:fillRef idx="3">
+            <a:schemeClr val="accent1"/>
+          </a:fillRef>
+          <a:effectRef idx="2">
+            <a:schemeClr val="accent1"/>
+          </a:effectRef>
+          <a:fontRef idx="minor">
+            <a:schemeClr val="lt1"/>
+          </a:fontRef>
+        </p:style>
+        <p:txBody>
+          <a:bodyPr rtlCol="0" anchor="ctr"/>
+          <a:lstStyle/>
+          <a:p>
+            <a:pPr algn="ctr"/>
+          </a:p>
+        </p:txBody>
+      </p:sp>
+      <p:sp>
+        <p:nvSpPr>
+          <p:cNvPr id="24" name="TextBox 23"/>
+          <p:cNvSpPr txBox="1"/>
+          <p:nvPr/>
+        </p:nvSpPr>
+        <p:spPr>
+          <a:xfrm>
+            <a:off x="9720072" y="2103120"/>
+            <a:ext cx="1965960" cy="640080"/>
+          </a:xfrm>
+          <a:prstGeom prst="rect">
+            <a:avLst/>
+          </a:prstGeom>
+          <a:noFill/>
+        </p:spPr>
+        <p:txBody>
+          <a:bodyPr wrap="square" lIns="0" rIns="0" tIns="0" bIns="0" anchor="t">
+            <a:spAutoFit/>
+          </a:bodyPr>
+          <a:lstStyle/>
+          <a:p>
+            <a:pPr algn="l">
+              <a:lnSpc>
+                <a:spcPct val="125000"/>
+              </a:lnSpc>
+            </a:pPr>
+            <a:r>
+              <a:rPr sz="1000" b="0" i="0">
+                <a:solidFill>
+                  <a:srgbClr val="1A1A1A"/>
+                </a:solidFill>
+                <a:latin typeface="Calibri"/>
+              </a:rPr>
+              <a:t>The 3 core</a:t>
+            </a:r>
+          </a:p>
+          <a:p>
+            <a:pPr algn="l">
+              <a:lnSpc>
+                <a:spcPct val="125000"/>
+              </a:lnSpc>
+            </a:pPr>
+            <a:r>
+              <a:rPr sz="1000" b="0" i="0">
+                <a:solidFill>
+                  <a:srgbClr val="1A1A1A"/>
+                </a:solidFill>
+                <a:latin typeface="Calibri"/>
+              </a:rPr>
+              <a:t>scientific questions</a:t>
+            </a:r>
+          </a:p>
+        </p:txBody>
+      </p:sp>
+      <p:sp>
+        <p:nvSpPr>
+          <p:cNvPr id="25" name="Rectangle 24"/>
+          <p:cNvSpPr/>
+          <p:nvPr/>
+        </p:nvSpPr>
+        <p:spPr>
+          <a:xfrm>
+            <a:off x="9537192" y="2825496"/>
+            <a:ext cx="73152" cy="73152"/>
+          </a:xfrm>
+          <a:prstGeom prst="rect">
+            <a:avLst/>
+          </a:prstGeom>
+          <a:solidFill>
+            <a:srgbClr val="C9A961"/>
+          </a:solidFill>
+          <a:ln>
+            <a:noFill/>
+          </a:ln>
+          <a:effectLst/>
+        </p:spPr>
+        <p:style>
+          <a:lnRef idx="1">
+            <a:schemeClr val="accent1"/>
+          </a:lnRef>
+          <a:fillRef idx="3">
+            <a:schemeClr val="accent1"/>
+          </a:fillRef>
+          <a:effectRef idx="2">
+            <a:schemeClr val="accent1"/>
+          </a:effectRef>
+          <a:fontRef idx="minor">
+            <a:schemeClr val="lt1"/>
+          </a:fontRef>
+        </p:style>
+        <p:txBody>
+          <a:bodyPr rtlCol="0" anchor="ctr"/>
+          <a:lstStyle/>
+          <a:p>
+            <a:pPr algn="ctr"/>
+          </a:p>
+        </p:txBody>
+      </p:sp>
+      <p:sp>
+        <p:nvSpPr>
+          <p:cNvPr id="26" name="TextBox 25"/>
+          <p:cNvSpPr txBox="1"/>
+          <p:nvPr/>
+        </p:nvSpPr>
+        <p:spPr>
+          <a:xfrm>
+            <a:off x="9720072" y="2788920"/>
+            <a:ext cx="1965960" cy="640080"/>
+          </a:xfrm>
+          <a:prstGeom prst="rect">
+            <a:avLst/>
+          </a:prstGeom>
+          <a:noFill/>
+        </p:spPr>
+        <p:txBody>
+          <a:bodyPr wrap="square" lIns="0" rIns="0" tIns="0" bIns="0" anchor="t">
+            <a:spAutoFit/>
+          </a:bodyPr>
+          <a:lstStyle/>
+          <a:p>
+            <a:pPr algn="l">
+              <a:lnSpc>
+                <a:spcPct val="125000"/>
+              </a:lnSpc>
+            </a:pPr>
+            <a:r>
+              <a:rPr sz="1000" b="0" i="0">
+                <a:solidFill>
+                  <a:srgbClr val="1A1A1A"/>
+                </a:solidFill>
+                <a:latin typeface="Calibri"/>
+              </a:rPr>
+              <a:t>City / Block /</a:t>
+            </a:r>
+          </a:p>
+          <a:p>
+            <a:pPr algn="l">
+              <a:lnSpc>
+                <a:spcPct val="125000"/>
+              </a:lnSpc>
+            </a:pPr>
+            <a:r>
+              <a:rPr sz="1000" b="0" i="0">
+                <a:solidFill>
+                  <a:srgbClr val="1A1A1A"/>
+                </a:solidFill>
+                <a:latin typeface="Calibri"/>
+              </a:rPr>
+              <a:t>Human scale detail</a:t>
+            </a:r>
+          </a:p>
+        </p:txBody>
+      </p:sp>
+      <p:sp>
+        <p:nvSpPr>
+          <p:cNvPr id="27" name="Rectangle 26"/>
+          <p:cNvSpPr/>
+          <p:nvPr/>
+        </p:nvSpPr>
+        <p:spPr>
+          <a:xfrm>
+            <a:off x="9537192" y="3511296"/>
+            <a:ext cx="73152" cy="73152"/>
+          </a:xfrm>
+          <a:prstGeom prst="rect">
+            <a:avLst/>
+          </a:prstGeom>
+          <a:solidFill>
+            <a:srgbClr val="C9A961"/>
+          </a:solidFill>
+          <a:ln>
+            <a:noFill/>
+          </a:ln>
+          <a:effectLst/>
+        </p:spPr>
+        <p:style>
+          <a:lnRef idx="1">
+            <a:schemeClr val="accent1"/>
+          </a:lnRef>
+          <a:fillRef idx="3">
+            <a:schemeClr val="accent1"/>
+          </a:fillRef>
+          <a:effectRef idx="2">
+            <a:schemeClr val="accent1"/>
+          </a:effectRef>
+          <a:fontRef idx="minor">
+            <a:schemeClr val="lt1"/>
+          </a:fontRef>
+        </p:style>
+        <p:txBody>
+          <a:bodyPr rtlCol="0" anchor="ctr"/>
+          <a:lstStyle/>
+          <a:p>
+            <a:pPr algn="ctr"/>
+          </a:p>
+        </p:txBody>
+      </p:sp>
+      <p:sp>
+        <p:nvSpPr>
+          <p:cNvPr id="28" name="TextBox 27"/>
+          <p:cNvSpPr txBox="1"/>
+          <p:nvPr/>
+        </p:nvSpPr>
+        <p:spPr>
+          <a:xfrm>
+            <a:off x="9720072" y="3474720"/>
+            <a:ext cx="1965960" cy="640080"/>
+          </a:xfrm>
+          <a:prstGeom prst="rect">
+            <a:avLst/>
+          </a:prstGeom>
+          <a:noFill/>
+        </p:spPr>
+        <p:txBody>
+          <a:bodyPr wrap="square" lIns="0" rIns="0" tIns="0" bIns="0" anchor="t">
+            <a:spAutoFit/>
+          </a:bodyPr>
+          <a:lstStyle/>
+          <a:p>
+            <a:pPr algn="l">
+              <a:lnSpc>
+                <a:spcPct val="125000"/>
+              </a:lnSpc>
+            </a:pPr>
+            <a:r>
+              <a:rPr sz="1000" b="0" i="0">
+                <a:solidFill>
+                  <a:srgbClr val="1A1A1A"/>
+                </a:solidFill>
+                <a:latin typeface="Calibri"/>
+              </a:rPr>
+              <a:t>How the scales</a:t>
+            </a:r>
+          </a:p>
+          <a:p>
+            <a:pPr algn="l">
+              <a:lnSpc>
+                <a:spcPct val="125000"/>
+              </a:lnSpc>
+            </a:pPr>
+            <a:r>
+              <a:rPr sz="1000" b="0" i="0">
+                <a:solidFill>
+                  <a:srgbClr val="1A1A1A"/>
+                </a:solidFill>
+                <a:latin typeface="Calibri"/>
+              </a:rPr>
+              <a:t>are integrated</a:t>
+            </a:r>
+          </a:p>
+        </p:txBody>
+      </p:sp>
+      <p:sp>
+        <p:nvSpPr>
+          <p:cNvPr id="29" name="Rectangle 28"/>
+          <p:cNvSpPr/>
+          <p:nvPr/>
+        </p:nvSpPr>
+        <p:spPr>
+          <a:xfrm>
+            <a:off x="9537192" y="4197096"/>
+            <a:ext cx="73152" cy="73152"/>
+          </a:xfrm>
+          <a:prstGeom prst="rect">
+            <a:avLst/>
+          </a:prstGeom>
+          <a:solidFill>
+            <a:srgbClr val="C9A961"/>
+          </a:solidFill>
+          <a:ln>
+            <a:noFill/>
+          </a:ln>
+          <a:effectLst/>
+        </p:spPr>
+        <p:style>
+          <a:lnRef idx="1">
+            <a:schemeClr val="accent1"/>
+          </a:lnRef>
+          <a:fillRef idx="3">
+            <a:schemeClr val="accent1"/>
+          </a:fillRef>
+          <a:effectRef idx="2">
+            <a:schemeClr val="accent1"/>
+          </a:effectRef>
+          <a:fontRef idx="minor">
+            <a:schemeClr val="lt1"/>
+          </a:fontRef>
+        </p:style>
+        <p:txBody>
+          <a:bodyPr rtlCol="0" anchor="ctr"/>
+          <a:lstStyle/>
+          <a:p>
+            <a:pPr algn="ctr"/>
+          </a:p>
+        </p:txBody>
+      </p:sp>
+      <p:sp>
+        <p:nvSpPr>
+          <p:cNvPr id="30" name="TextBox 29"/>
+          <p:cNvSpPr txBox="1"/>
+          <p:nvPr/>
+        </p:nvSpPr>
+        <p:spPr>
+          <a:xfrm>
+            <a:off x="9720072" y="4160520"/>
+            <a:ext cx="1965960" cy="640080"/>
+          </a:xfrm>
+          <a:prstGeom prst="rect">
+            <a:avLst/>
+          </a:prstGeom>
+          <a:noFill/>
+        </p:spPr>
+        <p:txBody>
+          <a:bodyPr wrap="square" lIns="0" rIns="0" tIns="0" bIns="0" anchor="t">
+            <a:spAutoFit/>
+          </a:bodyPr>
+          <a:lstStyle/>
+          <a:p>
+            <a:pPr algn="l">
+              <a:lnSpc>
+                <a:spcPct val="125000"/>
+              </a:lnSpc>
+            </a:pPr>
+            <a:r>
+              <a:rPr sz="1000" b="0" i="0">
+                <a:solidFill>
+                  <a:srgbClr val="1A1A1A"/>
+                </a:solidFill>
+                <a:latin typeface="Calibri"/>
+              </a:rPr>
+              <a:t>Expected academic</a:t>
+            </a:r>
+          </a:p>
+          <a:p>
+            <a:pPr algn="l">
+              <a:lnSpc>
+                <a:spcPct val="125000"/>
+              </a:lnSpc>
+            </a:pPr>
+            <a:r>
+              <a:rPr sz="1000" b="0" i="0">
+                <a:solidFill>
+                  <a:srgbClr val="1A1A1A"/>
+                </a:solidFill>
+                <a:latin typeface="Calibri"/>
+              </a:rPr>
+              <a:t>&amp; applied outcomes</a:t>
+            </a:r>
+          </a:p>
+        </p:txBody>
+      </p:sp>
+    </p:spTree>
+  </p:cSld>
+  <p:clrMapOvr>
+    <a:masterClrMapping/>
+  </p:clrMapOvr>
+</p:sld>
+</file>
+
+<file path=ppt/slides/slide14.xml><?xml version="1.0" encoding="utf-8"?>
+<p:sld xmlns:a="http://schemas.openxmlformats.org/drawingml/2006/main" xmlns:p="http://schemas.openxmlformats.org/presentationml/2006/main" xmlns:r="http://schemas.openxmlformats.org/officeDocument/2006/relationships">
+  <p:cSld>
+    <p:spTree>
+      <p:nvGrpSpPr>
+        <p:cNvPr id="1" name=""/>
+        <p:cNvGrpSpPr/>
+        <p:nvPr/>
+      </p:nvGrpSpPr>
+      <p:grpSpPr/>
+      <p:sp>
+        <p:nvSpPr>
+          <p:cNvPr id="2" name="Rectangle 1"/>
+          <p:cNvSpPr/>
+          <p:nvPr/>
+        </p:nvSpPr>
+        <p:spPr>
+          <a:xfrm>
+            <a:off x="0" y="0"/>
+            <a:ext cx="12191695" cy="6858000"/>
+          </a:xfrm>
+          <a:prstGeom prst="rect">
+            <a:avLst/>
+          </a:prstGeom>
+          <a:solidFill>
+            <a:srgbClr val="FFFFFF"/>
+          </a:solidFill>
+          <a:ln>
+            <a:noFill/>
+          </a:ln>
+          <a:effectLst/>
+        </p:spPr>
+        <p:style>
+          <a:lnRef idx="1">
+            <a:schemeClr val="accent1"/>
+          </a:lnRef>
+          <a:fillRef idx="3">
+            <a:schemeClr val="accent1"/>
+          </a:fillRef>
+          <a:effectRef idx="2">
+            <a:schemeClr val="accent1"/>
+          </a:effectRef>
+          <a:fontRef idx="minor">
+            <a:schemeClr val="lt1"/>
+          </a:fontRef>
+        </p:style>
+        <p:txBody>
+          <a:bodyPr rtlCol="0" anchor="ctr"/>
+          <a:lstStyle/>
+          <a:p>
+            <a:pPr algn="ctr"/>
+          </a:p>
+        </p:txBody>
+      </p:sp>
+      <p:sp>
+        <p:nvSpPr>
+          <p:cNvPr id="3" name="Rectangle 2"/>
+          <p:cNvSpPr/>
+          <p:nvPr/>
+        </p:nvSpPr>
+        <p:spPr>
+          <a:xfrm>
+            <a:off x="0" y="0"/>
+            <a:ext cx="12191695" cy="164592"/>
+          </a:xfrm>
+          <a:prstGeom prst="rect">
+            <a:avLst/>
+          </a:prstGeom>
+          <a:solidFill>
+            <a:srgbClr val="8C6F33"/>
+          </a:solidFill>
+          <a:ln>
+            <a:noFill/>
+          </a:ln>
+          <a:effectLst/>
+        </p:spPr>
+        <p:style>
+          <a:lnRef idx="1">
+            <a:schemeClr val="accent1"/>
+          </a:lnRef>
+          <a:fillRef idx="3">
+            <a:schemeClr val="accent1"/>
+          </a:fillRef>
+          <a:effectRef idx="2">
+            <a:schemeClr val="accent1"/>
+          </a:effectRef>
+          <a:fontRef idx="minor">
+            <a:schemeClr val="lt1"/>
+          </a:fontRef>
+        </p:style>
+        <p:txBody>
+          <a:bodyPr rtlCol="0" anchor="ctr"/>
+          <a:lstStyle/>
+          <a:p>
+            <a:pPr algn="ctr"/>
+          </a:p>
+        </p:txBody>
+      </p:sp>
+      <p:sp>
+        <p:nvSpPr>
+          <p:cNvPr id="4" name="Rectangle 3"/>
+          <p:cNvSpPr/>
+          <p:nvPr/>
+        </p:nvSpPr>
+        <p:spPr>
+          <a:xfrm>
+            <a:off x="0" y="164592"/>
+            <a:ext cx="1828800" cy="38100"/>
+          </a:xfrm>
+          <a:prstGeom prst="rect">
+            <a:avLst/>
+          </a:prstGeom>
+          <a:solidFill>
+            <a:srgbClr val="142E55"/>
+          </a:solidFill>
+          <a:ln>
+            <a:noFill/>
+          </a:ln>
+          <a:effectLst/>
+        </p:spPr>
+        <p:style>
+          <a:lnRef idx="1">
+            <a:schemeClr val="accent1"/>
+          </a:lnRef>
+          <a:fillRef idx="3">
+            <a:schemeClr val="accent1"/>
+          </a:fillRef>
+          <a:effectRef idx="2">
+            <a:schemeClr val="accent1"/>
+          </a:effectRef>
+          <a:fontRef idx="minor">
+            <a:schemeClr val="lt1"/>
+          </a:fontRef>
+        </p:style>
+        <p:txBody>
+          <a:bodyPr rtlCol="0" anchor="ctr"/>
+          <a:lstStyle/>
+          <a:p>
+            <a:pPr algn="ctr"/>
+          </a:p>
+        </p:txBody>
+      </p:sp>
+      <p:sp>
+        <p:nvSpPr>
+          <p:cNvPr id="5" name="TextBox 4"/>
+          <p:cNvSpPr txBox="1"/>
+          <p:nvPr/>
+        </p:nvSpPr>
+        <p:spPr>
+          <a:xfrm>
+            <a:off x="411480" y="18288"/>
+            <a:ext cx="7315200" cy="146304"/>
+          </a:xfrm>
+          <a:prstGeom prst="rect">
+            <a:avLst/>
+          </a:prstGeom>
+          <a:noFill/>
+        </p:spPr>
+        <p:txBody>
+          <a:bodyPr wrap="square" lIns="0" rIns="0" tIns="0" bIns="0" anchor="ctr">
+            <a:spAutoFit/>
+          </a:bodyPr>
+          <a:lstStyle/>
+          <a:p>
+            <a:pPr algn="l">
+              <a:lnSpc>
+                <a:spcPct val="115000"/>
+              </a:lnSpc>
+            </a:pPr>
+            <a:r>
+              <a:rPr sz="800" b="1" i="0">
+                <a:solidFill>
+                  <a:srgbClr val="FFFFFF"/>
+                </a:solidFill>
+                <a:latin typeface="Calibri"/>
+              </a:rPr>
+              <a:t>APPENDIX  ·  BACKUP FOR Q&amp;A  ·  NOT PART OF THE 10-MIN TALK</a:t>
+            </a:r>
+          </a:p>
+        </p:txBody>
+      </p:sp>
+      <p:sp>
+        <p:nvSpPr>
+          <p:cNvPr id="6" name="TextBox 5"/>
+          <p:cNvSpPr txBox="1"/>
+          <p:nvPr/>
+        </p:nvSpPr>
+        <p:spPr>
+          <a:xfrm>
+            <a:off x="9601200" y="18288"/>
+            <a:ext cx="2468880" cy="146304"/>
+          </a:xfrm>
+          <a:prstGeom prst="rect">
+            <a:avLst/>
+          </a:prstGeom>
+          <a:noFill/>
+        </p:spPr>
+        <p:txBody>
+          <a:bodyPr wrap="square" lIns="0" rIns="0" tIns="0" bIns="0" anchor="ctr">
+            <a:spAutoFit/>
+          </a:bodyPr>
+          <a:lstStyle/>
+          <a:p>
+            <a:pPr algn="r">
+              <a:lnSpc>
+                <a:spcPct val="115000"/>
+              </a:lnSpc>
+            </a:pPr>
+            <a:r>
+              <a:rPr sz="800" b="1" i="0">
+                <a:solidFill>
+                  <a:srgbClr val="142E55"/>
+                </a:solidFill>
+                <a:latin typeface="Calibri"/>
+              </a:rPr>
+              <a:t>BACKUP  A3  /  A4</a:t>
+            </a:r>
+          </a:p>
+        </p:txBody>
+      </p:sp>
+      <p:sp>
+        <p:nvSpPr>
+          <p:cNvPr id="7" name="TextBox 6"/>
+          <p:cNvSpPr txBox="1"/>
+          <p:nvPr/>
+        </p:nvSpPr>
+        <p:spPr>
+          <a:xfrm>
+            <a:off x="411480" y="347472"/>
+            <a:ext cx="7315200" cy="274320"/>
+          </a:xfrm>
+          <a:prstGeom prst="rect">
+            <a:avLst/>
+          </a:prstGeom>
+          <a:noFill/>
+        </p:spPr>
+        <p:txBody>
+          <a:bodyPr wrap="square" lIns="0" rIns="0" tIns="0" bIns="0" anchor="t">
+            <a:spAutoFit/>
+          </a:bodyPr>
+          <a:lstStyle/>
+          <a:p>
+            <a:pPr algn="l">
+              <a:lnSpc>
+                <a:spcPct val="115000"/>
+              </a:lnSpc>
+            </a:pPr>
+            <a:r>
+              <a:rPr sz="1000" b="1" i="0">
+                <a:solidFill>
+                  <a:srgbClr val="8C6F33"/>
+                </a:solidFill>
+                <a:latin typeface="Calibri"/>
+              </a:rPr>
+              <a:t>ORIGINAL APPLICATION FIGURE</a:t>
+            </a:r>
+          </a:p>
+        </p:txBody>
+      </p:sp>
+      <p:sp>
+        <p:nvSpPr>
+          <p:cNvPr id="8" name="TextBox 7"/>
+          <p:cNvSpPr txBox="1"/>
+          <p:nvPr/>
+        </p:nvSpPr>
+        <p:spPr>
+          <a:xfrm>
+            <a:off x="411480" y="603504"/>
+            <a:ext cx="11430000" cy="411480"/>
+          </a:xfrm>
+          <a:prstGeom prst="rect">
+            <a:avLst/>
+          </a:prstGeom>
+          <a:noFill/>
+        </p:spPr>
+        <p:txBody>
+          <a:bodyPr wrap="square" lIns="0" rIns="0" tIns="0" bIns="0" anchor="t">
+            <a:spAutoFit/>
+          </a:bodyPr>
+          <a:lstStyle/>
+          <a:p>
+            <a:pPr algn="l">
+              <a:lnSpc>
+                <a:spcPct val="100000"/>
+              </a:lnSpc>
+            </a:pPr>
+            <a:r>
+              <a:rPr sz="2200" b="1" i="0">
+                <a:solidFill>
+                  <a:srgbClr val="142E55"/>
+                </a:solidFill>
+                <a:latin typeface="Calibri"/>
+              </a:rPr>
+              <a:t>Diagnostic Workflow &amp; 5-Year Plan</a:t>
+            </a:r>
+          </a:p>
+        </p:txBody>
+      </p:sp>
+      <p:sp>
+        <p:nvSpPr>
+          <p:cNvPr id="9" name="TextBox 8"/>
+          <p:cNvSpPr txBox="1"/>
+          <p:nvPr/>
+        </p:nvSpPr>
+        <p:spPr>
+          <a:xfrm>
+            <a:off x="411480" y="1078992"/>
+            <a:ext cx="11430000" cy="274320"/>
+          </a:xfrm>
+          <a:prstGeom prst="rect">
+            <a:avLst/>
+          </a:prstGeom>
+          <a:noFill/>
+        </p:spPr>
+        <p:txBody>
+          <a:bodyPr wrap="square" lIns="0" rIns="0" tIns="0" bIns="0" anchor="t">
+            <a:spAutoFit/>
+          </a:bodyPr>
+          <a:lstStyle/>
+          <a:p>
+            <a:pPr algn="l">
+              <a:lnSpc>
+                <a:spcPct val="115000"/>
+              </a:lnSpc>
+            </a:pPr>
+            <a:r>
+              <a:rPr sz="1100" b="0" i="1">
+                <a:solidFill>
+                  <a:srgbClr val="4A5568"/>
+                </a:solidFill>
+                <a:latin typeface="Calibri"/>
+              </a:rPr>
+              <a:t>Figure 3 (application) — three-step sequential chain (screening → mechanism → validation) mapped onto the five-year HIRAKU timeline.</a:t>
+            </a:r>
+          </a:p>
+        </p:txBody>
+      </p:sp>
+      <p:cxnSp>
+        <p:nvCxnSpPr>
+          <p:cNvPr id="10" name="Connector 9"/>
+          <p:cNvCxnSpPr/>
+          <p:nvPr/>
+        </p:nvCxnSpPr>
+        <p:spPr>
+          <a:xfrm>
+            <a:off x="182880" y="411480"/>
+            <a:ext cx="182880" cy="0"/>
+          </a:xfrm>
+          <a:prstGeom prst="line">
+            <a:avLst/>
+          </a:prstGeom>
+          <a:ln w="6350">
+            <a:solidFill>
+              <a:srgbClr val="B8C2CC"/>
+            </a:solidFill>
+          </a:ln>
+        </p:spPr>
+        <p:style>
+          <a:lnRef idx="2">
+            <a:schemeClr val="accent1"/>
+          </a:lnRef>
+          <a:fillRef idx="0">
+            <a:schemeClr val="accent1"/>
+          </a:fillRef>
+          <a:effectRef idx="1">
+            <a:schemeClr val="accent1"/>
+          </a:effectRef>
+          <a:fontRef idx="minor">
+            <a:schemeClr val="tx1"/>
+          </a:fontRef>
+        </p:style>
+      </p:cxnSp>
+      <p:cxnSp>
+        <p:nvCxnSpPr>
+          <p:cNvPr id="11" name="Connector 10"/>
+          <p:cNvCxnSpPr/>
+          <p:nvPr/>
+        </p:nvCxnSpPr>
+        <p:spPr>
+          <a:xfrm>
+            <a:off x="274320" y="320040"/>
+            <a:ext cx="0" cy="182880"/>
+          </a:xfrm>
+          <a:prstGeom prst="line">
+            <a:avLst/>
+          </a:prstGeom>
+          <a:ln w="6350">
+            <a:solidFill>
+              <a:srgbClr val="B8C2CC"/>
+            </a:solidFill>
+          </a:ln>
+        </p:spPr>
+        <p:style>
+          <a:lnRef idx="2">
+            <a:schemeClr val="accent1"/>
+          </a:lnRef>
+          <a:fillRef idx="0">
+            <a:schemeClr val="accent1"/>
+          </a:fillRef>
+          <a:effectRef idx="1">
+            <a:schemeClr val="accent1"/>
+          </a:effectRef>
+          <a:fontRef idx="minor">
+            <a:schemeClr val="tx1"/>
+          </a:fontRef>
+        </p:style>
+      </p:cxnSp>
+      <p:cxnSp>
+        <p:nvCxnSpPr>
+          <p:cNvPr id="12" name="Connector 11"/>
+          <p:cNvCxnSpPr/>
+          <p:nvPr/>
+        </p:nvCxnSpPr>
+        <p:spPr>
+          <a:xfrm>
+            <a:off x="11825935" y="411480"/>
+            <a:ext cx="182880" cy="0"/>
+          </a:xfrm>
+          <a:prstGeom prst="line">
+            <a:avLst/>
+          </a:prstGeom>
+          <a:ln w="6350">
+            <a:solidFill>
+              <a:srgbClr val="B8C2CC"/>
+            </a:solidFill>
+          </a:ln>
+        </p:spPr>
+        <p:style>
+          <a:lnRef idx="2">
+            <a:schemeClr val="accent1"/>
+          </a:lnRef>
+          <a:fillRef idx="0">
+            <a:schemeClr val="accent1"/>
+          </a:fillRef>
+          <a:effectRef idx="1">
+            <a:schemeClr val="accent1"/>
+          </a:effectRef>
+          <a:fontRef idx="minor">
+            <a:schemeClr val="tx1"/>
+          </a:fontRef>
+        </p:style>
+      </p:cxnSp>
+      <p:cxnSp>
+        <p:nvCxnSpPr>
+          <p:cNvPr id="13" name="Connector 12"/>
+          <p:cNvCxnSpPr/>
+          <p:nvPr/>
+        </p:nvCxnSpPr>
+        <p:spPr>
+          <a:xfrm>
+            <a:off x="11917375" y="320040"/>
+            <a:ext cx="0" cy="182880"/>
+          </a:xfrm>
+          <a:prstGeom prst="line">
+            <a:avLst/>
+          </a:prstGeom>
+          <a:ln w="6350">
+            <a:solidFill>
+              <a:srgbClr val="B8C2CC"/>
+            </a:solidFill>
+          </a:ln>
+        </p:spPr>
+        <p:style>
+          <a:lnRef idx="2">
+            <a:schemeClr val="accent1"/>
+          </a:lnRef>
+          <a:fillRef idx="0">
+            <a:schemeClr val="accent1"/>
+          </a:fillRef>
+          <a:effectRef idx="1">
+            <a:schemeClr val="accent1"/>
+          </a:effectRef>
+          <a:fontRef idx="minor">
+            <a:schemeClr val="tx1"/>
+          </a:fontRef>
+        </p:style>
+      </p:cxnSp>
+      <p:cxnSp>
+        <p:nvCxnSpPr>
+          <p:cNvPr id="14" name="Connector 13"/>
+          <p:cNvCxnSpPr/>
+          <p:nvPr/>
+        </p:nvCxnSpPr>
+        <p:spPr>
+          <a:xfrm>
+            <a:off x="182880" y="6583680"/>
+            <a:ext cx="182880" cy="0"/>
+          </a:xfrm>
+          <a:prstGeom prst="line">
+            <a:avLst/>
+          </a:prstGeom>
+          <a:ln w="6350">
+            <a:solidFill>
+              <a:srgbClr val="B8C2CC"/>
+            </a:solidFill>
+          </a:ln>
+        </p:spPr>
+        <p:style>
+          <a:lnRef idx="2">
+            <a:schemeClr val="accent1"/>
+          </a:lnRef>
+          <a:fillRef idx="0">
+            <a:schemeClr val="accent1"/>
+          </a:fillRef>
+          <a:effectRef idx="1">
+            <a:schemeClr val="accent1"/>
+          </a:effectRef>
+          <a:fontRef idx="minor">
+            <a:schemeClr val="tx1"/>
+          </a:fontRef>
+        </p:style>
+      </p:cxnSp>
+      <p:cxnSp>
+        <p:nvCxnSpPr>
+          <p:cNvPr id="15" name="Connector 14"/>
+          <p:cNvCxnSpPr/>
+          <p:nvPr/>
+        </p:nvCxnSpPr>
+        <p:spPr>
+          <a:xfrm>
+            <a:off x="274320" y="6492240"/>
+            <a:ext cx="0" cy="182880"/>
+          </a:xfrm>
+          <a:prstGeom prst="line">
+            <a:avLst/>
+          </a:prstGeom>
+          <a:ln w="6350">
+            <a:solidFill>
+              <a:srgbClr val="B8C2CC"/>
+            </a:solidFill>
+          </a:ln>
+        </p:spPr>
+        <p:style>
+          <a:lnRef idx="2">
+            <a:schemeClr val="accent1"/>
+          </a:lnRef>
+          <a:fillRef idx="0">
+            <a:schemeClr val="accent1"/>
+          </a:fillRef>
+          <a:effectRef idx="1">
+            <a:schemeClr val="accent1"/>
+          </a:effectRef>
+          <a:fontRef idx="minor">
+            <a:schemeClr val="tx1"/>
+          </a:fontRef>
+        </p:style>
+      </p:cxnSp>
+      <p:cxnSp>
+        <p:nvCxnSpPr>
+          <p:cNvPr id="16" name="Connector 15"/>
+          <p:cNvCxnSpPr/>
+          <p:nvPr/>
+        </p:nvCxnSpPr>
+        <p:spPr>
+          <a:xfrm>
+            <a:off x="11825935" y="6583680"/>
+            <a:ext cx="182880" cy="0"/>
+          </a:xfrm>
+          <a:prstGeom prst="line">
+            <a:avLst/>
+          </a:prstGeom>
+          <a:ln w="6350">
+            <a:solidFill>
+              <a:srgbClr val="B8C2CC"/>
+            </a:solidFill>
+          </a:ln>
+        </p:spPr>
+        <p:style>
+          <a:lnRef idx="2">
+            <a:schemeClr val="accent1"/>
+          </a:lnRef>
+          <a:fillRef idx="0">
+            <a:schemeClr val="accent1"/>
+          </a:fillRef>
+          <a:effectRef idx="1">
+            <a:schemeClr val="accent1"/>
+          </a:effectRef>
+          <a:fontRef idx="minor">
+            <a:schemeClr val="tx1"/>
+          </a:fontRef>
+        </p:style>
+      </p:cxnSp>
+      <p:cxnSp>
+        <p:nvCxnSpPr>
+          <p:cNvPr id="17" name="Connector 16"/>
+          <p:cNvCxnSpPr/>
+          <p:nvPr/>
+        </p:nvCxnSpPr>
+        <p:spPr>
+          <a:xfrm>
+            <a:off x="11917375" y="6492240"/>
+            <a:ext cx="0" cy="182880"/>
+          </a:xfrm>
+          <a:prstGeom prst="line">
+            <a:avLst/>
+          </a:prstGeom>
+          <a:ln w="6350">
+            <a:solidFill>
+              <a:srgbClr val="B8C2CC"/>
+            </a:solidFill>
+          </a:ln>
+        </p:spPr>
+        <p:style>
+          <a:lnRef idx="2">
+            <a:schemeClr val="accent1"/>
+          </a:lnRef>
+          <a:fillRef idx="0">
+            <a:schemeClr val="accent1"/>
+          </a:fillRef>
+          <a:effectRef idx="1">
+            <a:schemeClr val="accent1"/>
+          </a:effectRef>
+          <a:fontRef idx="minor">
+            <a:schemeClr val="tx1"/>
+          </a:fontRef>
+        </p:style>
+      </p:cxnSp>
+      <p:sp>
+        <p:nvSpPr>
+          <p:cNvPr id="18" name="Rectangle 17"/>
+          <p:cNvSpPr/>
+          <p:nvPr/>
+        </p:nvSpPr>
+        <p:spPr>
+          <a:xfrm>
+            <a:off x="539115" y="2144642"/>
+            <a:ext cx="8614410" cy="3483115"/>
+          </a:xfrm>
+          <a:prstGeom prst="rect">
+            <a:avLst/>
+          </a:prstGeom>
+          <a:noFill/>
+          <a:ln w="9525">
+            <a:solidFill>
+              <a:srgbClr val="B8C2CC"/>
+            </a:solidFill>
+          </a:ln>
+          <a:effectLst/>
+        </p:spPr>
+        <p:style>
+          <a:lnRef idx="1">
+            <a:schemeClr val="accent1"/>
+          </a:lnRef>
+          <a:fillRef idx="3">
+            <a:schemeClr val="accent1"/>
+          </a:fillRef>
+          <a:effectRef idx="2">
+            <a:schemeClr val="accent1"/>
+          </a:effectRef>
+          <a:fontRef idx="minor">
+            <a:schemeClr val="lt1"/>
+          </a:fontRef>
+        </p:style>
+        <p:txBody>
+          <a:bodyPr rtlCol="0" anchor="ctr"/>
+          <a:lstStyle/>
+          <a:p>
+            <a:pPr algn="ctr"/>
+          </a:p>
+        </p:txBody>
+      </p:sp>
+      <p:pic>
+        <p:nvPicPr>
+          <p:cNvPr id="19" name="Picture 18" descr="fig3_workflow.png"/>
+          <p:cNvPicPr>
+            <a:picLocks noChangeAspect="1"/>
+          </p:cNvPicPr>
+          <p:nvPr/>
+        </p:nvPicPr>
+        <p:blipFill>
+          <a:blip r:embed="rId2"/>
+          <a:stretch>
+            <a:fillRect/>
+          </a:stretch>
+        </p:blipFill>
+        <p:spPr>
+          <a:xfrm>
+            <a:off x="548640" y="2154167"/>
+            <a:ext cx="8595360" cy="3464065"/>
+          </a:xfrm>
+          <a:prstGeom prst="rect">
+            <a:avLst/>
+          </a:prstGeom>
+        </p:spPr>
+      </p:pic>
+      <p:sp>
+        <p:nvSpPr>
+          <p:cNvPr id="20" name="Rectangle 19"/>
+          <p:cNvSpPr/>
+          <p:nvPr/>
+        </p:nvSpPr>
+        <p:spPr>
+          <a:xfrm>
+            <a:off x="9372600" y="1508760"/>
+            <a:ext cx="2423160" cy="4754880"/>
+          </a:xfrm>
+          <a:prstGeom prst="rect">
+            <a:avLst/>
+          </a:prstGeom>
+          <a:solidFill>
+            <a:srgbClr val="F6F8FA"/>
+          </a:solidFill>
+          <a:ln>
+            <a:noFill/>
+          </a:ln>
+          <a:effectLst/>
+        </p:spPr>
+        <p:style>
+          <a:lnRef idx="1">
+            <a:schemeClr val="accent1"/>
+          </a:lnRef>
+          <a:fillRef idx="3">
+            <a:schemeClr val="accent1"/>
+          </a:fillRef>
+          <a:effectRef idx="2">
+            <a:schemeClr val="accent1"/>
+          </a:effectRef>
+          <a:fontRef idx="minor">
+            <a:schemeClr val="lt1"/>
+          </a:fontRef>
+        </p:style>
+        <p:txBody>
+          <a:bodyPr rtlCol="0" anchor="ctr"/>
+          <a:lstStyle/>
+          <a:p>
+            <a:pPr algn="ctr"/>
+          </a:p>
+        </p:txBody>
+      </p:sp>
+      <p:sp>
+        <p:nvSpPr>
+          <p:cNvPr id="21" name="Rectangle 20"/>
+          <p:cNvSpPr/>
+          <p:nvPr/>
+        </p:nvSpPr>
+        <p:spPr>
+          <a:xfrm>
+            <a:off x="9372600" y="1508760"/>
+            <a:ext cx="2423160" cy="411480"/>
+          </a:xfrm>
+          <a:prstGeom prst="rect">
+            <a:avLst/>
+          </a:prstGeom>
+          <a:solidFill>
+            <a:srgbClr val="142E55"/>
+          </a:solidFill>
+          <a:ln>
+            <a:noFill/>
+          </a:ln>
+          <a:effectLst/>
+        </p:spPr>
+        <p:style>
+          <a:lnRef idx="1">
+            <a:schemeClr val="accent1"/>
+          </a:lnRef>
+          <a:fillRef idx="3">
+            <a:schemeClr val="accent1"/>
+          </a:fillRef>
+          <a:effectRef idx="2">
+            <a:schemeClr val="accent1"/>
+          </a:effectRef>
+          <a:fontRef idx="minor">
+            <a:schemeClr val="lt1"/>
+          </a:fontRef>
+        </p:style>
+        <p:txBody>
+          <a:bodyPr rtlCol="0" anchor="ctr"/>
+          <a:lstStyle/>
+          <a:p>
+            <a:pPr algn="ctr"/>
+          </a:p>
+        </p:txBody>
+      </p:sp>
+      <p:sp>
+        <p:nvSpPr>
+          <p:cNvPr id="22" name="TextBox 21"/>
+          <p:cNvSpPr txBox="1"/>
+          <p:nvPr/>
+        </p:nvSpPr>
+        <p:spPr>
+          <a:xfrm>
+            <a:off x="9537192" y="1508760"/>
+            <a:ext cx="2194560" cy="411480"/>
+          </a:xfrm>
+          <a:prstGeom prst="rect">
+            <a:avLst/>
+          </a:prstGeom>
+          <a:noFill/>
+        </p:spPr>
+        <p:txBody>
+          <a:bodyPr wrap="square" lIns="0" rIns="0" tIns="0" bIns="0" anchor="ctr">
+            <a:spAutoFit/>
+          </a:bodyPr>
+          <a:lstStyle/>
+          <a:p>
+            <a:pPr algn="l">
+              <a:lnSpc>
+                <a:spcPct val="115000"/>
+              </a:lnSpc>
+            </a:pPr>
+            <a:r>
+              <a:rPr sz="1000" b="1" i="0">
+                <a:solidFill>
+                  <a:srgbClr val="C9A961"/>
+                </a:solidFill>
+                <a:latin typeface="Calibri"/>
+              </a:rPr>
+              <a:t>IF ASKED ABOUT…</a:t>
+            </a:r>
+          </a:p>
+        </p:txBody>
+      </p:sp>
+      <p:sp>
+        <p:nvSpPr>
+          <p:cNvPr id="23" name="Rectangle 22"/>
+          <p:cNvSpPr/>
+          <p:nvPr/>
+        </p:nvSpPr>
+        <p:spPr>
+          <a:xfrm>
+            <a:off x="9537192" y="2139696"/>
+            <a:ext cx="73152" cy="73152"/>
+          </a:xfrm>
+          <a:prstGeom prst="rect">
+            <a:avLst/>
+          </a:prstGeom>
+          <a:solidFill>
+            <a:srgbClr val="C9A961"/>
+          </a:solidFill>
+          <a:ln>
+            <a:noFill/>
+          </a:ln>
+          <a:effectLst/>
+        </p:spPr>
+        <p:style>
+          <a:lnRef idx="1">
+            <a:schemeClr val="accent1"/>
+          </a:lnRef>
+          <a:fillRef idx="3">
+            <a:schemeClr val="accent1"/>
+          </a:fillRef>
+          <a:effectRef idx="2">
+            <a:schemeClr val="accent1"/>
+          </a:effectRef>
+          <a:fontRef idx="minor">
+            <a:schemeClr val="lt1"/>
+          </a:fontRef>
+        </p:style>
+        <p:txBody>
+          <a:bodyPr rtlCol="0" anchor="ctr"/>
+          <a:lstStyle/>
+          <a:p>
+            <a:pPr algn="ctr"/>
+          </a:p>
+        </p:txBody>
+      </p:sp>
+      <p:sp>
+        <p:nvSpPr>
+          <p:cNvPr id="24" name="TextBox 23"/>
+          <p:cNvSpPr txBox="1"/>
+          <p:nvPr/>
+        </p:nvSpPr>
+        <p:spPr>
+          <a:xfrm>
+            <a:off x="9720072" y="2103120"/>
+            <a:ext cx="1965960" cy="640080"/>
+          </a:xfrm>
+          <a:prstGeom prst="rect">
+            <a:avLst/>
+          </a:prstGeom>
+          <a:noFill/>
+        </p:spPr>
+        <p:txBody>
+          <a:bodyPr wrap="square" lIns="0" rIns="0" tIns="0" bIns="0" anchor="t">
+            <a:spAutoFit/>
+          </a:bodyPr>
+          <a:lstStyle/>
+          <a:p>
+            <a:pPr algn="l">
+              <a:lnSpc>
+                <a:spcPct val="125000"/>
+              </a:lnSpc>
+            </a:pPr>
+            <a:r>
+              <a:rPr sz="1000" b="0" i="0">
+                <a:solidFill>
+                  <a:srgbClr val="1A1A1A"/>
+                </a:solidFill>
+                <a:latin typeface="Calibri"/>
+              </a:rPr>
+              <a:t>Year-by-year</a:t>
+            </a:r>
+          </a:p>
+          <a:p>
+            <a:pPr algn="l">
+              <a:lnSpc>
+                <a:spcPct val="125000"/>
+              </a:lnSpc>
+            </a:pPr>
+            <a:r>
+              <a:rPr sz="1000" b="0" i="0">
+                <a:solidFill>
+                  <a:srgbClr val="1A1A1A"/>
+                </a:solidFill>
+                <a:latin typeface="Calibri"/>
+              </a:rPr>
+              <a:t>deliverables</a:t>
+            </a:r>
+          </a:p>
+        </p:txBody>
+      </p:sp>
+      <p:sp>
+        <p:nvSpPr>
+          <p:cNvPr id="25" name="Rectangle 24"/>
+          <p:cNvSpPr/>
+          <p:nvPr/>
+        </p:nvSpPr>
+        <p:spPr>
+          <a:xfrm>
+            <a:off x="9537192" y="2825496"/>
+            <a:ext cx="73152" cy="73152"/>
+          </a:xfrm>
+          <a:prstGeom prst="rect">
+            <a:avLst/>
+          </a:prstGeom>
+          <a:solidFill>
+            <a:srgbClr val="C9A961"/>
+          </a:solidFill>
+          <a:ln>
+            <a:noFill/>
+          </a:ln>
+          <a:effectLst/>
+        </p:spPr>
+        <p:style>
+          <a:lnRef idx="1">
+            <a:schemeClr val="accent1"/>
+          </a:lnRef>
+          <a:fillRef idx="3">
+            <a:schemeClr val="accent1"/>
+          </a:fillRef>
+          <a:effectRef idx="2">
+            <a:schemeClr val="accent1"/>
+          </a:effectRef>
+          <a:fontRef idx="minor">
+            <a:schemeClr val="lt1"/>
+          </a:fontRef>
+        </p:style>
+        <p:txBody>
+          <a:bodyPr rtlCol="0" anchor="ctr"/>
+          <a:lstStyle/>
+          <a:p>
+            <a:pPr algn="ctr"/>
+          </a:p>
+        </p:txBody>
+      </p:sp>
+      <p:sp>
+        <p:nvSpPr>
+          <p:cNvPr id="26" name="TextBox 25"/>
+          <p:cNvSpPr txBox="1"/>
+          <p:nvPr/>
+        </p:nvSpPr>
+        <p:spPr>
+          <a:xfrm>
+            <a:off x="9720072" y="2788920"/>
+            <a:ext cx="1965960" cy="640080"/>
+          </a:xfrm>
+          <a:prstGeom prst="rect">
+            <a:avLst/>
+          </a:prstGeom>
+          <a:noFill/>
+        </p:spPr>
+        <p:txBody>
+          <a:bodyPr wrap="square" lIns="0" rIns="0" tIns="0" bIns="0" anchor="t">
+            <a:spAutoFit/>
+          </a:bodyPr>
+          <a:lstStyle/>
+          <a:p>
+            <a:pPr algn="l">
+              <a:lnSpc>
+                <a:spcPct val="125000"/>
+              </a:lnSpc>
+            </a:pPr>
+            <a:r>
+              <a:rPr sz="1000" b="0" i="0">
+                <a:solidFill>
+                  <a:srgbClr val="1A1A1A"/>
+                </a:solidFill>
+                <a:latin typeface="Calibri"/>
+              </a:rPr>
+              <a:t>The 3-step</a:t>
+            </a:r>
+          </a:p>
+          <a:p>
+            <a:pPr algn="l">
+              <a:lnSpc>
+                <a:spcPct val="125000"/>
+              </a:lnSpc>
+            </a:pPr>
+            <a:r>
+              <a:rPr sz="1000" b="0" i="0">
+                <a:solidFill>
+                  <a:srgbClr val="1A1A1A"/>
+                </a:solidFill>
+                <a:latin typeface="Calibri"/>
+              </a:rPr>
+              <a:t>method chain</a:t>
+            </a:r>
+          </a:p>
+        </p:txBody>
+      </p:sp>
+      <p:sp>
+        <p:nvSpPr>
+          <p:cNvPr id="27" name="Rectangle 26"/>
+          <p:cNvSpPr/>
+          <p:nvPr/>
+        </p:nvSpPr>
+        <p:spPr>
+          <a:xfrm>
+            <a:off x="9537192" y="3511296"/>
+            <a:ext cx="73152" cy="73152"/>
+          </a:xfrm>
+          <a:prstGeom prst="rect">
+            <a:avLst/>
+          </a:prstGeom>
+          <a:solidFill>
+            <a:srgbClr val="C9A961"/>
+          </a:solidFill>
+          <a:ln>
+            <a:noFill/>
+          </a:ln>
+          <a:effectLst/>
+        </p:spPr>
+        <p:style>
+          <a:lnRef idx="1">
+            <a:schemeClr val="accent1"/>
+          </a:lnRef>
+          <a:fillRef idx="3">
+            <a:schemeClr val="accent1"/>
+          </a:fillRef>
+          <a:effectRef idx="2">
+            <a:schemeClr val="accent1"/>
+          </a:effectRef>
+          <a:fontRef idx="minor">
+            <a:schemeClr val="lt1"/>
+          </a:fontRef>
+        </p:style>
+        <p:txBody>
+          <a:bodyPr rtlCol="0" anchor="ctr"/>
+          <a:lstStyle/>
+          <a:p>
+            <a:pPr algn="ctr"/>
+          </a:p>
+        </p:txBody>
+      </p:sp>
+      <p:sp>
+        <p:nvSpPr>
+          <p:cNvPr id="28" name="TextBox 27"/>
+          <p:cNvSpPr txBox="1"/>
+          <p:nvPr/>
+        </p:nvSpPr>
+        <p:spPr>
+          <a:xfrm>
+            <a:off x="9720072" y="3474720"/>
+            <a:ext cx="1965960" cy="640080"/>
+          </a:xfrm>
+          <a:prstGeom prst="rect">
+            <a:avLst/>
+          </a:prstGeom>
+          <a:noFill/>
+        </p:spPr>
+        <p:txBody>
+          <a:bodyPr wrap="square" lIns="0" rIns="0" tIns="0" bIns="0" anchor="t">
+            <a:spAutoFit/>
+          </a:bodyPr>
+          <a:lstStyle/>
+          <a:p>
+            <a:pPr algn="l">
+              <a:lnSpc>
+                <a:spcPct val="125000"/>
+              </a:lnSpc>
+            </a:pPr>
+            <a:r>
+              <a:rPr sz="1000" b="0" i="0">
+                <a:solidFill>
+                  <a:srgbClr val="1A1A1A"/>
+                </a:solidFill>
+                <a:latin typeface="Calibri"/>
+              </a:rPr>
+              <a:t>Where UCL &amp;</a:t>
+            </a:r>
+          </a:p>
+          <a:p>
+            <a:pPr algn="l">
+              <a:lnSpc>
+                <a:spcPct val="125000"/>
+              </a:lnSpc>
+            </a:pPr>
+            <a:r>
+              <a:rPr sz="1000" b="0" i="0">
+                <a:solidFill>
+                  <a:srgbClr val="1A1A1A"/>
+                </a:solidFill>
+                <a:latin typeface="Calibri"/>
+              </a:rPr>
+              <a:t>Zhejiang fit in</a:t>
+            </a:r>
+          </a:p>
+        </p:txBody>
+      </p:sp>
+      <p:sp>
+        <p:nvSpPr>
+          <p:cNvPr id="29" name="Rectangle 28"/>
+          <p:cNvSpPr/>
+          <p:nvPr/>
+        </p:nvSpPr>
+        <p:spPr>
+          <a:xfrm>
+            <a:off x="9537192" y="4197096"/>
+            <a:ext cx="73152" cy="73152"/>
+          </a:xfrm>
+          <a:prstGeom prst="rect">
+            <a:avLst/>
+          </a:prstGeom>
+          <a:solidFill>
+            <a:srgbClr val="C9A961"/>
+          </a:solidFill>
+          <a:ln>
+            <a:noFill/>
+          </a:ln>
+          <a:effectLst/>
+        </p:spPr>
+        <p:style>
+          <a:lnRef idx="1">
+            <a:schemeClr val="accent1"/>
+          </a:lnRef>
+          <a:fillRef idx="3">
+            <a:schemeClr val="accent1"/>
+          </a:fillRef>
+          <a:effectRef idx="2">
+            <a:schemeClr val="accent1"/>
+          </a:effectRef>
+          <a:fontRef idx="minor">
+            <a:schemeClr val="lt1"/>
+          </a:fontRef>
+        </p:style>
+        <p:txBody>
+          <a:bodyPr rtlCol="0" anchor="ctr"/>
+          <a:lstStyle/>
+          <a:p>
+            <a:pPr algn="ctr"/>
+          </a:p>
+        </p:txBody>
+      </p:sp>
+      <p:sp>
+        <p:nvSpPr>
+          <p:cNvPr id="30" name="TextBox 29"/>
+          <p:cNvSpPr txBox="1"/>
+          <p:nvPr/>
+        </p:nvSpPr>
+        <p:spPr>
+          <a:xfrm>
+            <a:off x="9720072" y="4160520"/>
+            <a:ext cx="1965960" cy="640080"/>
+          </a:xfrm>
+          <a:prstGeom prst="rect">
+            <a:avLst/>
+          </a:prstGeom>
+          <a:noFill/>
+        </p:spPr>
+        <p:txBody>
+          <a:bodyPr wrap="square" lIns="0" rIns="0" tIns="0" bIns="0" anchor="t">
+            <a:spAutoFit/>
+          </a:bodyPr>
+          <a:lstStyle/>
+          <a:p>
+            <a:pPr algn="l">
+              <a:lnSpc>
+                <a:spcPct val="125000"/>
+              </a:lnSpc>
+            </a:pPr>
+            <a:r>
+              <a:rPr sz="1000" b="0" i="0">
+                <a:solidFill>
+                  <a:srgbClr val="1A1A1A"/>
+                </a:solidFill>
+                <a:latin typeface="Calibri"/>
+              </a:rPr>
+              <a:t>Screening →</a:t>
+            </a:r>
+          </a:p>
+          <a:p>
+            <a:pPr algn="l">
+              <a:lnSpc>
+                <a:spcPct val="125000"/>
+              </a:lnSpc>
+            </a:pPr>
+            <a:r>
+              <a:rPr sz="1000" b="0" i="0">
+                <a:solidFill>
+                  <a:srgbClr val="1A1A1A"/>
+                </a:solidFill>
+                <a:latin typeface="Calibri"/>
+              </a:rPr>
+              <a:t>validation logic</a:t>
+            </a:r>
+          </a:p>
+        </p:txBody>
+      </p:sp>
+    </p:spTree>
+  </p:cSld>
+  <p:clrMapOvr>
+    <a:masterClrMapping/>
+  </p:clrMapOvr>
+</p:sld>
+</file>
+
+<file path=ppt/slides/slide15.xml><?xml version="1.0" encoding="utf-8"?>
+<p:sld xmlns:a="http://schemas.openxmlformats.org/drawingml/2006/main" xmlns:p="http://schemas.openxmlformats.org/presentationml/2006/main" xmlns:r="http://schemas.openxmlformats.org/officeDocument/2006/relationships">
+  <p:cSld>
+    <p:spTree>
+      <p:nvGrpSpPr>
+        <p:cNvPr id="1" name=""/>
+        <p:cNvGrpSpPr/>
+        <p:nvPr/>
+      </p:nvGrpSpPr>
+      <p:grpSpPr/>
+      <p:sp>
+        <p:nvSpPr>
+          <p:cNvPr id="2" name="Rectangle 1"/>
+          <p:cNvSpPr/>
+          <p:nvPr/>
+        </p:nvSpPr>
+        <p:spPr>
+          <a:xfrm>
+            <a:off x="0" y="0"/>
+            <a:ext cx="12191695" cy="6858000"/>
+          </a:xfrm>
+          <a:prstGeom prst="rect">
+            <a:avLst/>
+          </a:prstGeom>
+          <a:solidFill>
+            <a:srgbClr val="FFFFFF"/>
+          </a:solidFill>
+          <a:ln>
+            <a:noFill/>
+          </a:ln>
+          <a:effectLst/>
+        </p:spPr>
+        <p:style>
+          <a:lnRef idx="1">
+            <a:schemeClr val="accent1"/>
+          </a:lnRef>
+          <a:fillRef idx="3">
+            <a:schemeClr val="accent1"/>
+          </a:fillRef>
+          <a:effectRef idx="2">
+            <a:schemeClr val="accent1"/>
+          </a:effectRef>
+          <a:fontRef idx="minor">
+            <a:schemeClr val="lt1"/>
+          </a:fontRef>
+        </p:style>
+        <p:txBody>
+          <a:bodyPr rtlCol="0" anchor="ctr"/>
+          <a:lstStyle/>
+          <a:p>
+            <a:pPr algn="ctr"/>
+          </a:p>
+        </p:txBody>
+      </p:sp>
+      <p:sp>
+        <p:nvSpPr>
+          <p:cNvPr id="3" name="Rectangle 2"/>
+          <p:cNvSpPr/>
+          <p:nvPr/>
+        </p:nvSpPr>
+        <p:spPr>
+          <a:xfrm>
+            <a:off x="0" y="0"/>
+            <a:ext cx="12191695" cy="164592"/>
+          </a:xfrm>
+          <a:prstGeom prst="rect">
+            <a:avLst/>
+          </a:prstGeom>
+          <a:solidFill>
+            <a:srgbClr val="8C6F33"/>
+          </a:solidFill>
+          <a:ln>
+            <a:noFill/>
+          </a:ln>
+          <a:effectLst/>
+        </p:spPr>
+        <p:style>
+          <a:lnRef idx="1">
+            <a:schemeClr val="accent1"/>
+          </a:lnRef>
+          <a:fillRef idx="3">
+            <a:schemeClr val="accent1"/>
+          </a:fillRef>
+          <a:effectRef idx="2">
+            <a:schemeClr val="accent1"/>
+          </a:effectRef>
+          <a:fontRef idx="minor">
+            <a:schemeClr val="lt1"/>
+          </a:fontRef>
+        </p:style>
+        <p:txBody>
+          <a:bodyPr rtlCol="0" anchor="ctr"/>
+          <a:lstStyle/>
+          <a:p>
+            <a:pPr algn="ctr"/>
+          </a:p>
+        </p:txBody>
+      </p:sp>
+      <p:sp>
+        <p:nvSpPr>
+          <p:cNvPr id="4" name="Rectangle 3"/>
+          <p:cNvSpPr/>
+          <p:nvPr/>
+        </p:nvSpPr>
+        <p:spPr>
+          <a:xfrm>
+            <a:off x="0" y="164592"/>
+            <a:ext cx="1828800" cy="38100"/>
+          </a:xfrm>
+          <a:prstGeom prst="rect">
+            <a:avLst/>
+          </a:prstGeom>
+          <a:solidFill>
+            <a:srgbClr val="142E55"/>
+          </a:solidFill>
+          <a:ln>
+            <a:noFill/>
+          </a:ln>
+          <a:effectLst/>
+        </p:spPr>
+        <p:style>
+          <a:lnRef idx="1">
+            <a:schemeClr val="accent1"/>
+          </a:lnRef>
+          <a:fillRef idx="3">
+            <a:schemeClr val="accent1"/>
+          </a:fillRef>
+          <a:effectRef idx="2">
+            <a:schemeClr val="accent1"/>
+          </a:effectRef>
+          <a:fontRef idx="minor">
+            <a:schemeClr val="lt1"/>
+          </a:fontRef>
+        </p:style>
+        <p:txBody>
+          <a:bodyPr rtlCol="0" anchor="ctr"/>
+          <a:lstStyle/>
+          <a:p>
+            <a:pPr algn="ctr"/>
+          </a:p>
+        </p:txBody>
+      </p:sp>
+      <p:sp>
+        <p:nvSpPr>
+          <p:cNvPr id="5" name="TextBox 4"/>
+          <p:cNvSpPr txBox="1"/>
+          <p:nvPr/>
+        </p:nvSpPr>
+        <p:spPr>
+          <a:xfrm>
+            <a:off x="411480" y="18288"/>
+            <a:ext cx="7315200" cy="146304"/>
+          </a:xfrm>
+          <a:prstGeom prst="rect">
+            <a:avLst/>
+          </a:prstGeom>
+          <a:noFill/>
+        </p:spPr>
+        <p:txBody>
+          <a:bodyPr wrap="square" lIns="0" rIns="0" tIns="0" bIns="0" anchor="ctr">
+            <a:spAutoFit/>
+          </a:bodyPr>
+          <a:lstStyle/>
+          <a:p>
+            <a:pPr algn="l">
+              <a:lnSpc>
+                <a:spcPct val="115000"/>
+              </a:lnSpc>
+            </a:pPr>
+            <a:r>
+              <a:rPr sz="800" b="1" i="0">
+                <a:solidFill>
+                  <a:srgbClr val="FFFFFF"/>
+                </a:solidFill>
+                <a:latin typeface="Calibri"/>
+              </a:rPr>
+              <a:t>APPENDIX  ·  BACKUP FOR Q&amp;A  ·  NOT PART OF THE 10-MIN TALK</a:t>
+            </a:r>
+          </a:p>
+        </p:txBody>
+      </p:sp>
+      <p:sp>
+        <p:nvSpPr>
+          <p:cNvPr id="6" name="TextBox 5"/>
+          <p:cNvSpPr txBox="1"/>
+          <p:nvPr/>
+        </p:nvSpPr>
+        <p:spPr>
+          <a:xfrm>
+            <a:off x="9601200" y="18288"/>
+            <a:ext cx="2468880" cy="146304"/>
+          </a:xfrm>
+          <a:prstGeom prst="rect">
+            <a:avLst/>
+          </a:prstGeom>
+          <a:noFill/>
+        </p:spPr>
+        <p:txBody>
+          <a:bodyPr wrap="square" lIns="0" rIns="0" tIns="0" bIns="0" anchor="ctr">
+            <a:spAutoFit/>
+          </a:bodyPr>
+          <a:lstStyle/>
+          <a:p>
+            <a:pPr algn="r">
+              <a:lnSpc>
+                <a:spcPct val="115000"/>
+              </a:lnSpc>
+            </a:pPr>
+            <a:r>
+              <a:rPr sz="800" b="1" i="0">
+                <a:solidFill>
+                  <a:srgbClr val="142E55"/>
+                </a:solidFill>
+                <a:latin typeface="Calibri"/>
+              </a:rPr>
+              <a:t>BACKUP  A4  /  A4</a:t>
+            </a:r>
+          </a:p>
+        </p:txBody>
+      </p:sp>
+      <p:sp>
+        <p:nvSpPr>
+          <p:cNvPr id="7" name="TextBox 6"/>
+          <p:cNvSpPr txBox="1"/>
+          <p:nvPr/>
+        </p:nvSpPr>
+        <p:spPr>
+          <a:xfrm>
+            <a:off x="411480" y="347472"/>
+            <a:ext cx="7315200" cy="274320"/>
+          </a:xfrm>
+          <a:prstGeom prst="rect">
+            <a:avLst/>
+          </a:prstGeom>
+          <a:noFill/>
+        </p:spPr>
+        <p:txBody>
+          <a:bodyPr wrap="square" lIns="0" rIns="0" tIns="0" bIns="0" anchor="t">
+            <a:spAutoFit/>
+          </a:bodyPr>
+          <a:lstStyle/>
+          <a:p>
+            <a:pPr algn="l">
+              <a:lnSpc>
+                <a:spcPct val="115000"/>
+              </a:lnSpc>
+            </a:pPr>
+            <a:r>
+              <a:rPr sz="1000" b="1" i="0">
+                <a:solidFill>
+                  <a:srgbClr val="8C6F33"/>
+                </a:solidFill>
+                <a:latin typeface="Calibri"/>
+              </a:rPr>
+              <a:t>ORIGINAL APPLICATION FIGURE</a:t>
+            </a:r>
+          </a:p>
+        </p:txBody>
+      </p:sp>
+      <p:sp>
+        <p:nvSpPr>
+          <p:cNvPr id="8" name="TextBox 7"/>
+          <p:cNvSpPr txBox="1"/>
+          <p:nvPr/>
+        </p:nvSpPr>
+        <p:spPr>
+          <a:xfrm>
+            <a:off x="411480" y="603504"/>
+            <a:ext cx="11430000" cy="411480"/>
+          </a:xfrm>
+          <a:prstGeom prst="rect">
+            <a:avLst/>
+          </a:prstGeom>
+          <a:noFill/>
+        </p:spPr>
+        <p:txBody>
+          <a:bodyPr wrap="square" lIns="0" rIns="0" tIns="0" bIns="0" anchor="t">
+            <a:spAutoFit/>
+          </a:bodyPr>
+          <a:lstStyle/>
+          <a:p>
+            <a:pPr algn="l">
+              <a:lnSpc>
+                <a:spcPct val="100000"/>
+              </a:lnSpc>
+            </a:pPr>
+            <a:r>
+              <a:rPr sz="2200" b="1" i="0">
+                <a:solidFill>
+                  <a:srgbClr val="142E55"/>
+                </a:solidFill>
+                <a:latin typeface="Calibri"/>
+              </a:rPr>
+              <a:t>International Collaboration Framework</a:t>
+            </a:r>
+          </a:p>
+        </p:txBody>
+      </p:sp>
+      <p:sp>
+        <p:nvSpPr>
+          <p:cNvPr id="9" name="TextBox 8"/>
+          <p:cNvSpPr txBox="1"/>
+          <p:nvPr/>
+        </p:nvSpPr>
+        <p:spPr>
+          <a:xfrm>
+            <a:off x="411480" y="1078992"/>
+            <a:ext cx="11430000" cy="274320"/>
+          </a:xfrm>
+          <a:prstGeom prst="rect">
+            <a:avLst/>
+          </a:prstGeom>
+          <a:noFill/>
+        </p:spPr>
+        <p:txBody>
+          <a:bodyPr wrap="square" lIns="0" rIns="0" tIns="0" bIns="0" anchor="t">
+            <a:spAutoFit/>
+          </a:bodyPr>
+          <a:lstStyle/>
+          <a:p>
+            <a:pPr algn="l">
+              <a:lnSpc>
+                <a:spcPct val="115000"/>
+              </a:lnSpc>
+            </a:pPr>
+            <a:r>
+              <a:rPr sz="1100" b="0" i="1">
+                <a:solidFill>
+                  <a:srgbClr val="4A5568"/>
+                </a:solidFill>
+                <a:latin typeface="Calibri"/>
+              </a:rPr>
+              <a:t>Figure 4 (application) — core project team at Yamaguchi with UCL and Zhejiang as primary nodes; US and Thailand as reserve expansion nodes.</a:t>
+            </a:r>
+          </a:p>
+        </p:txBody>
+      </p:sp>
+      <p:cxnSp>
+        <p:nvCxnSpPr>
+          <p:cNvPr id="10" name="Connector 9"/>
+          <p:cNvCxnSpPr/>
+          <p:nvPr/>
+        </p:nvCxnSpPr>
+        <p:spPr>
+          <a:xfrm>
+            <a:off x="182880" y="411480"/>
+            <a:ext cx="182880" cy="0"/>
+          </a:xfrm>
+          <a:prstGeom prst="line">
+            <a:avLst/>
+          </a:prstGeom>
+          <a:ln w="6350">
+            <a:solidFill>
+              <a:srgbClr val="B8C2CC"/>
+            </a:solidFill>
+          </a:ln>
+        </p:spPr>
+        <p:style>
+          <a:lnRef idx="2">
+            <a:schemeClr val="accent1"/>
+          </a:lnRef>
+          <a:fillRef idx="0">
+            <a:schemeClr val="accent1"/>
+          </a:fillRef>
+          <a:effectRef idx="1">
+            <a:schemeClr val="accent1"/>
+          </a:effectRef>
+          <a:fontRef idx="minor">
+            <a:schemeClr val="tx1"/>
+          </a:fontRef>
+        </p:style>
+      </p:cxnSp>
+      <p:cxnSp>
+        <p:nvCxnSpPr>
+          <p:cNvPr id="11" name="Connector 10"/>
+          <p:cNvCxnSpPr/>
+          <p:nvPr/>
+        </p:nvCxnSpPr>
+        <p:spPr>
+          <a:xfrm>
+            <a:off x="274320" y="320040"/>
+            <a:ext cx="0" cy="182880"/>
+          </a:xfrm>
+          <a:prstGeom prst="line">
+            <a:avLst/>
+          </a:prstGeom>
+          <a:ln w="6350">
+            <a:solidFill>
+              <a:srgbClr val="B8C2CC"/>
+            </a:solidFill>
+          </a:ln>
+        </p:spPr>
+        <p:style>
+          <a:lnRef idx="2">
+            <a:schemeClr val="accent1"/>
+          </a:lnRef>
+          <a:fillRef idx="0">
+            <a:schemeClr val="accent1"/>
+          </a:fillRef>
+          <a:effectRef idx="1">
+            <a:schemeClr val="accent1"/>
+          </a:effectRef>
+          <a:fontRef idx="minor">
+            <a:schemeClr val="tx1"/>
+          </a:fontRef>
+        </p:style>
+      </p:cxnSp>
+      <p:cxnSp>
+        <p:nvCxnSpPr>
+          <p:cNvPr id="12" name="Connector 11"/>
+          <p:cNvCxnSpPr/>
+          <p:nvPr/>
+        </p:nvCxnSpPr>
+        <p:spPr>
+          <a:xfrm>
+            <a:off x="11825935" y="411480"/>
+            <a:ext cx="182880" cy="0"/>
+          </a:xfrm>
+          <a:prstGeom prst="line">
+            <a:avLst/>
+          </a:prstGeom>
+          <a:ln w="6350">
+            <a:solidFill>
+              <a:srgbClr val="B8C2CC"/>
+            </a:solidFill>
+          </a:ln>
+        </p:spPr>
+        <p:style>
+          <a:lnRef idx="2">
+            <a:schemeClr val="accent1"/>
+          </a:lnRef>
+          <a:fillRef idx="0">
+            <a:schemeClr val="accent1"/>
+          </a:fillRef>
+          <a:effectRef idx="1">
+            <a:schemeClr val="accent1"/>
+          </a:effectRef>
+          <a:fontRef idx="minor">
+            <a:schemeClr val="tx1"/>
+          </a:fontRef>
+        </p:style>
+      </p:cxnSp>
+      <p:cxnSp>
+        <p:nvCxnSpPr>
+          <p:cNvPr id="13" name="Connector 12"/>
+          <p:cNvCxnSpPr/>
+          <p:nvPr/>
+        </p:nvCxnSpPr>
+        <p:spPr>
+          <a:xfrm>
+            <a:off x="11917375" y="320040"/>
+            <a:ext cx="0" cy="182880"/>
+          </a:xfrm>
+          <a:prstGeom prst="line">
+            <a:avLst/>
+          </a:prstGeom>
+          <a:ln w="6350">
+            <a:solidFill>
+              <a:srgbClr val="B8C2CC"/>
+            </a:solidFill>
+          </a:ln>
+        </p:spPr>
+        <p:style>
+          <a:lnRef idx="2">
+            <a:schemeClr val="accent1"/>
+          </a:lnRef>
+          <a:fillRef idx="0">
+            <a:schemeClr val="accent1"/>
+          </a:fillRef>
+          <a:effectRef idx="1">
+            <a:schemeClr val="accent1"/>
+          </a:effectRef>
+          <a:fontRef idx="minor">
+            <a:schemeClr val="tx1"/>
+          </a:fontRef>
+        </p:style>
+      </p:cxnSp>
+      <p:cxnSp>
+        <p:nvCxnSpPr>
+          <p:cNvPr id="14" name="Connector 13"/>
+          <p:cNvCxnSpPr/>
+          <p:nvPr/>
+        </p:nvCxnSpPr>
+        <p:spPr>
+          <a:xfrm>
+            <a:off x="182880" y="6583680"/>
+            <a:ext cx="182880" cy="0"/>
+          </a:xfrm>
+          <a:prstGeom prst="line">
+            <a:avLst/>
+          </a:prstGeom>
+          <a:ln w="6350">
+            <a:solidFill>
+              <a:srgbClr val="B8C2CC"/>
+            </a:solidFill>
+          </a:ln>
+        </p:spPr>
+        <p:style>
+          <a:lnRef idx="2">
+            <a:schemeClr val="accent1"/>
+          </a:lnRef>
+          <a:fillRef idx="0">
+            <a:schemeClr val="accent1"/>
+          </a:fillRef>
+          <a:effectRef idx="1">
+            <a:schemeClr val="accent1"/>
+          </a:effectRef>
+          <a:fontRef idx="minor">
+            <a:schemeClr val="tx1"/>
+          </a:fontRef>
+        </p:style>
+      </p:cxnSp>
+      <p:cxnSp>
+        <p:nvCxnSpPr>
+          <p:cNvPr id="15" name="Connector 14"/>
+          <p:cNvCxnSpPr/>
+          <p:nvPr/>
+        </p:nvCxnSpPr>
+        <p:spPr>
+          <a:xfrm>
+            <a:off x="274320" y="6492240"/>
+            <a:ext cx="0" cy="182880"/>
+          </a:xfrm>
+          <a:prstGeom prst="line">
+            <a:avLst/>
+          </a:prstGeom>
+          <a:ln w="6350">
+            <a:solidFill>
+              <a:srgbClr val="B8C2CC"/>
+            </a:solidFill>
+          </a:ln>
+        </p:spPr>
+        <p:style>
+          <a:lnRef idx="2">
+            <a:schemeClr val="accent1"/>
+          </a:lnRef>
+          <a:fillRef idx="0">
+            <a:schemeClr val="accent1"/>
+          </a:fillRef>
+          <a:effectRef idx="1">
+            <a:schemeClr val="accent1"/>
+          </a:effectRef>
+          <a:fontRef idx="minor">
+            <a:schemeClr val="tx1"/>
+          </a:fontRef>
+        </p:style>
+      </p:cxnSp>
+      <p:cxnSp>
+        <p:nvCxnSpPr>
+          <p:cNvPr id="16" name="Connector 15"/>
+          <p:cNvCxnSpPr/>
+          <p:nvPr/>
+        </p:nvCxnSpPr>
+        <p:spPr>
+          <a:xfrm>
+            <a:off x="11825935" y="6583680"/>
+            <a:ext cx="182880" cy="0"/>
+          </a:xfrm>
+          <a:prstGeom prst="line">
+            <a:avLst/>
+          </a:prstGeom>
+          <a:ln w="6350">
+            <a:solidFill>
+              <a:srgbClr val="B8C2CC"/>
+            </a:solidFill>
+          </a:ln>
+        </p:spPr>
+        <p:style>
+          <a:lnRef idx="2">
+            <a:schemeClr val="accent1"/>
+          </a:lnRef>
+          <a:fillRef idx="0">
+            <a:schemeClr val="accent1"/>
+          </a:fillRef>
+          <a:effectRef idx="1">
+            <a:schemeClr val="accent1"/>
+          </a:effectRef>
+          <a:fontRef idx="minor">
+            <a:schemeClr val="tx1"/>
+          </a:fontRef>
+        </p:style>
+      </p:cxnSp>
+      <p:cxnSp>
+        <p:nvCxnSpPr>
+          <p:cNvPr id="17" name="Connector 16"/>
+          <p:cNvCxnSpPr/>
+          <p:nvPr/>
+        </p:nvCxnSpPr>
+        <p:spPr>
+          <a:xfrm>
+            <a:off x="11917375" y="6492240"/>
+            <a:ext cx="0" cy="182880"/>
+          </a:xfrm>
+          <a:prstGeom prst="line">
+            <a:avLst/>
+          </a:prstGeom>
+          <a:ln w="6350">
+            <a:solidFill>
+              <a:srgbClr val="B8C2CC"/>
+            </a:solidFill>
+          </a:ln>
+        </p:spPr>
+        <p:style>
+          <a:lnRef idx="2">
+            <a:schemeClr val="accent1"/>
+          </a:lnRef>
+          <a:fillRef idx="0">
+            <a:schemeClr val="accent1"/>
+          </a:fillRef>
+          <a:effectRef idx="1">
+            <a:schemeClr val="accent1"/>
+          </a:effectRef>
+          <a:fontRef idx="minor">
+            <a:schemeClr val="tx1"/>
+          </a:fontRef>
+        </p:style>
+      </p:cxnSp>
+      <p:sp>
+        <p:nvSpPr>
+          <p:cNvPr id="18" name="Rectangle 17"/>
+          <p:cNvSpPr/>
+          <p:nvPr/>
+        </p:nvSpPr>
+        <p:spPr>
+          <a:xfrm>
+            <a:off x="986155" y="1499235"/>
+            <a:ext cx="7720330" cy="4773930"/>
+          </a:xfrm>
+          <a:prstGeom prst="rect">
+            <a:avLst/>
+          </a:prstGeom>
+          <a:noFill/>
+          <a:ln w="9525">
+            <a:solidFill>
+              <a:srgbClr val="B8C2CC"/>
+            </a:solidFill>
+          </a:ln>
+          <a:effectLst/>
+        </p:spPr>
+        <p:style>
+          <a:lnRef idx="1">
+            <a:schemeClr val="accent1"/>
+          </a:lnRef>
+          <a:fillRef idx="3">
+            <a:schemeClr val="accent1"/>
+          </a:fillRef>
+          <a:effectRef idx="2">
+            <a:schemeClr val="accent1"/>
+          </a:effectRef>
+          <a:fontRef idx="minor">
+            <a:schemeClr val="lt1"/>
+          </a:fontRef>
+        </p:style>
+        <p:txBody>
+          <a:bodyPr rtlCol="0" anchor="ctr"/>
+          <a:lstStyle/>
+          <a:p>
+            <a:pPr algn="ctr"/>
+          </a:p>
+        </p:txBody>
+      </p:sp>
+      <p:pic>
+        <p:nvPicPr>
+          <p:cNvPr id="19" name="Picture 18" descr="fig4_collaboration.png"/>
+          <p:cNvPicPr>
+            <a:picLocks noChangeAspect="1"/>
+          </p:cNvPicPr>
+          <p:nvPr/>
+        </p:nvPicPr>
+        <p:blipFill>
+          <a:blip r:embed="rId2"/>
+          <a:stretch>
+            <a:fillRect/>
+          </a:stretch>
+        </p:blipFill>
+        <p:spPr>
+          <a:xfrm>
+            <a:off x="995680" y="1508760"/>
+            <a:ext cx="7701280" cy="4754880"/>
+          </a:xfrm>
+          <a:prstGeom prst="rect">
+            <a:avLst/>
+          </a:prstGeom>
+        </p:spPr>
+      </p:pic>
+      <p:sp>
+        <p:nvSpPr>
+          <p:cNvPr id="20" name="Rectangle 19"/>
+          <p:cNvSpPr/>
+          <p:nvPr/>
+        </p:nvSpPr>
+        <p:spPr>
+          <a:xfrm>
+            <a:off x="9372600" y="1508760"/>
+            <a:ext cx="2423160" cy="4754880"/>
+          </a:xfrm>
+          <a:prstGeom prst="rect">
+            <a:avLst/>
+          </a:prstGeom>
+          <a:solidFill>
+            <a:srgbClr val="F6F8FA"/>
+          </a:solidFill>
+          <a:ln>
+            <a:noFill/>
+          </a:ln>
+          <a:effectLst/>
+        </p:spPr>
+        <p:style>
+          <a:lnRef idx="1">
+            <a:schemeClr val="accent1"/>
+          </a:lnRef>
+          <a:fillRef idx="3">
+            <a:schemeClr val="accent1"/>
+          </a:fillRef>
+          <a:effectRef idx="2">
+            <a:schemeClr val="accent1"/>
+          </a:effectRef>
+          <a:fontRef idx="minor">
+            <a:schemeClr val="lt1"/>
+          </a:fontRef>
+        </p:style>
+        <p:txBody>
+          <a:bodyPr rtlCol="0" anchor="ctr"/>
+          <a:lstStyle/>
+          <a:p>
+            <a:pPr algn="ctr"/>
+          </a:p>
+        </p:txBody>
+      </p:sp>
+      <p:sp>
+        <p:nvSpPr>
+          <p:cNvPr id="21" name="Rectangle 20"/>
+          <p:cNvSpPr/>
+          <p:nvPr/>
+        </p:nvSpPr>
+        <p:spPr>
+          <a:xfrm>
+            <a:off x="9372600" y="1508760"/>
+            <a:ext cx="2423160" cy="411480"/>
+          </a:xfrm>
+          <a:prstGeom prst="rect">
+            <a:avLst/>
+          </a:prstGeom>
+          <a:solidFill>
+            <a:srgbClr val="142E55"/>
+          </a:solidFill>
+          <a:ln>
+            <a:noFill/>
+          </a:ln>
+          <a:effectLst/>
+        </p:spPr>
+        <p:style>
+          <a:lnRef idx="1">
+            <a:schemeClr val="accent1"/>
+          </a:lnRef>
+          <a:fillRef idx="3">
+            <a:schemeClr val="accent1"/>
+          </a:fillRef>
+          <a:effectRef idx="2">
+            <a:schemeClr val="accent1"/>
+          </a:effectRef>
+          <a:fontRef idx="minor">
+            <a:schemeClr val="lt1"/>
+          </a:fontRef>
+        </p:style>
+        <p:txBody>
+          <a:bodyPr rtlCol="0" anchor="ctr"/>
+          <a:lstStyle/>
+          <a:p>
+            <a:pPr algn="ctr"/>
+          </a:p>
+        </p:txBody>
+      </p:sp>
+      <p:sp>
+        <p:nvSpPr>
+          <p:cNvPr id="22" name="TextBox 21"/>
+          <p:cNvSpPr txBox="1"/>
+          <p:nvPr/>
+        </p:nvSpPr>
+        <p:spPr>
+          <a:xfrm>
+            <a:off x="9537192" y="1508760"/>
+            <a:ext cx="2194560" cy="411480"/>
+          </a:xfrm>
+          <a:prstGeom prst="rect">
+            <a:avLst/>
+          </a:prstGeom>
+          <a:noFill/>
+        </p:spPr>
+        <p:txBody>
+          <a:bodyPr wrap="square" lIns="0" rIns="0" tIns="0" bIns="0" anchor="ctr">
+            <a:spAutoFit/>
+          </a:bodyPr>
+          <a:lstStyle/>
+          <a:p>
+            <a:pPr algn="l">
+              <a:lnSpc>
+                <a:spcPct val="115000"/>
+              </a:lnSpc>
+            </a:pPr>
+            <a:r>
+              <a:rPr sz="1000" b="1" i="0">
+                <a:solidFill>
+                  <a:srgbClr val="C9A961"/>
+                </a:solidFill>
+                <a:latin typeface="Calibri"/>
+              </a:rPr>
+              <a:t>IF ASKED ABOUT…</a:t>
+            </a:r>
+          </a:p>
+        </p:txBody>
+      </p:sp>
+      <p:sp>
+        <p:nvSpPr>
+          <p:cNvPr id="23" name="Rectangle 22"/>
+          <p:cNvSpPr/>
+          <p:nvPr/>
+        </p:nvSpPr>
+        <p:spPr>
+          <a:xfrm>
+            <a:off x="9537192" y="2139696"/>
+            <a:ext cx="73152" cy="73152"/>
+          </a:xfrm>
+          <a:prstGeom prst="rect">
+            <a:avLst/>
+          </a:prstGeom>
+          <a:solidFill>
+            <a:srgbClr val="C9A961"/>
+          </a:solidFill>
+          <a:ln>
+            <a:noFill/>
+          </a:ln>
+          <a:effectLst/>
+        </p:spPr>
+        <p:style>
+          <a:lnRef idx="1">
+            <a:schemeClr val="accent1"/>
+          </a:lnRef>
+          <a:fillRef idx="3">
+            <a:schemeClr val="accent1"/>
+          </a:fillRef>
+          <a:effectRef idx="2">
+            <a:schemeClr val="accent1"/>
+          </a:effectRef>
+          <a:fontRef idx="minor">
+            <a:schemeClr val="lt1"/>
+          </a:fontRef>
+        </p:style>
+        <p:txBody>
+          <a:bodyPr rtlCol="0" anchor="ctr"/>
+          <a:lstStyle/>
+          <a:p>
+            <a:pPr algn="ctr"/>
+          </a:p>
+        </p:txBody>
+      </p:sp>
+      <p:sp>
+        <p:nvSpPr>
+          <p:cNvPr id="24" name="TextBox 23"/>
+          <p:cNvSpPr txBox="1"/>
+          <p:nvPr/>
+        </p:nvSpPr>
+        <p:spPr>
+          <a:xfrm>
+            <a:off x="9720072" y="2103120"/>
+            <a:ext cx="1965960" cy="640080"/>
+          </a:xfrm>
+          <a:prstGeom prst="rect">
+            <a:avLst/>
+          </a:prstGeom>
+          <a:noFill/>
+        </p:spPr>
+        <p:txBody>
+          <a:bodyPr wrap="square" lIns="0" rIns="0" tIns="0" bIns="0" anchor="t">
+            <a:spAutoFit/>
+          </a:bodyPr>
+          <a:lstStyle/>
+          <a:p>
+            <a:pPr algn="l">
+              <a:lnSpc>
+                <a:spcPct val="125000"/>
+              </a:lnSpc>
+            </a:pPr>
+            <a:r>
+              <a:rPr sz="1000" b="0" i="0">
+                <a:solidFill>
+                  <a:srgbClr val="1A1A1A"/>
+                </a:solidFill>
+                <a:latin typeface="Calibri"/>
+              </a:rPr>
+              <a:t>Roles of UCL &amp;</a:t>
+            </a:r>
+          </a:p>
+          <a:p>
+            <a:pPr algn="l">
+              <a:lnSpc>
+                <a:spcPct val="125000"/>
+              </a:lnSpc>
+            </a:pPr>
+            <a:r>
+              <a:rPr sz="1000" b="0" i="0">
+                <a:solidFill>
+                  <a:srgbClr val="1A1A1A"/>
+                </a:solidFill>
+                <a:latin typeface="Calibri"/>
+              </a:rPr>
+              <a:t>Zhejiang partners</a:t>
+            </a:r>
+          </a:p>
+        </p:txBody>
+      </p:sp>
+      <p:sp>
+        <p:nvSpPr>
+          <p:cNvPr id="25" name="Rectangle 24"/>
+          <p:cNvSpPr/>
+          <p:nvPr/>
+        </p:nvSpPr>
+        <p:spPr>
+          <a:xfrm>
+            <a:off x="9537192" y="2825496"/>
+            <a:ext cx="73152" cy="73152"/>
+          </a:xfrm>
+          <a:prstGeom prst="rect">
+            <a:avLst/>
+          </a:prstGeom>
+          <a:solidFill>
+            <a:srgbClr val="C9A961"/>
+          </a:solidFill>
+          <a:ln>
+            <a:noFill/>
+          </a:ln>
+          <a:effectLst/>
+        </p:spPr>
+        <p:style>
+          <a:lnRef idx="1">
+            <a:schemeClr val="accent1"/>
+          </a:lnRef>
+          <a:fillRef idx="3">
+            <a:schemeClr val="accent1"/>
+          </a:fillRef>
+          <a:effectRef idx="2">
+            <a:schemeClr val="accent1"/>
+          </a:effectRef>
+          <a:fontRef idx="minor">
+            <a:schemeClr val="lt1"/>
+          </a:fontRef>
+        </p:style>
+        <p:txBody>
+          <a:bodyPr rtlCol="0" anchor="ctr"/>
+          <a:lstStyle/>
+          <a:p>
+            <a:pPr algn="ctr"/>
+          </a:p>
+        </p:txBody>
+      </p:sp>
+      <p:sp>
+        <p:nvSpPr>
+          <p:cNvPr id="26" name="TextBox 25"/>
+          <p:cNvSpPr txBox="1"/>
+          <p:nvPr/>
+        </p:nvSpPr>
+        <p:spPr>
+          <a:xfrm>
+            <a:off x="9720072" y="2788920"/>
+            <a:ext cx="1965960" cy="640080"/>
+          </a:xfrm>
+          <a:prstGeom prst="rect">
+            <a:avLst/>
+          </a:prstGeom>
+          <a:noFill/>
+        </p:spPr>
+        <p:txBody>
+          <a:bodyPr wrap="square" lIns="0" rIns="0" tIns="0" bIns="0" anchor="t">
+            <a:spAutoFit/>
+          </a:bodyPr>
+          <a:lstStyle/>
+          <a:p>
+            <a:pPr algn="l">
+              <a:lnSpc>
+                <a:spcPct val="125000"/>
+              </a:lnSpc>
+            </a:pPr>
+            <a:r>
+              <a:rPr sz="1000" b="0" i="0">
+                <a:solidFill>
+                  <a:srgbClr val="1A1A1A"/>
+                </a:solidFill>
+                <a:latin typeface="Calibri"/>
+              </a:rPr>
+              <a:t>What each partner</a:t>
+            </a:r>
+          </a:p>
+          <a:p>
+            <a:pPr algn="l">
+              <a:lnSpc>
+                <a:spcPct val="125000"/>
+              </a:lnSpc>
+            </a:pPr>
+            <a:r>
+              <a:rPr sz="1000" b="0" i="0">
+                <a:solidFill>
+                  <a:srgbClr val="1A1A1A"/>
+                </a:solidFill>
+                <a:latin typeface="Calibri"/>
+              </a:rPr>
+              <a:t>contributes</a:t>
+            </a:r>
+          </a:p>
+        </p:txBody>
+      </p:sp>
+      <p:sp>
+        <p:nvSpPr>
+          <p:cNvPr id="27" name="Rectangle 26"/>
+          <p:cNvSpPr/>
+          <p:nvPr/>
+        </p:nvSpPr>
+        <p:spPr>
+          <a:xfrm>
+            <a:off x="9537192" y="3511296"/>
+            <a:ext cx="73152" cy="73152"/>
+          </a:xfrm>
+          <a:prstGeom prst="rect">
+            <a:avLst/>
+          </a:prstGeom>
+          <a:solidFill>
+            <a:srgbClr val="C9A961"/>
+          </a:solidFill>
+          <a:ln>
+            <a:noFill/>
+          </a:ln>
+          <a:effectLst/>
+        </p:spPr>
+        <p:style>
+          <a:lnRef idx="1">
+            <a:schemeClr val="accent1"/>
+          </a:lnRef>
+          <a:fillRef idx="3">
+            <a:schemeClr val="accent1"/>
+          </a:fillRef>
+          <a:effectRef idx="2">
+            <a:schemeClr val="accent1"/>
+          </a:effectRef>
+          <a:fontRef idx="minor">
+            <a:schemeClr val="lt1"/>
+          </a:fontRef>
+        </p:style>
+        <p:txBody>
+          <a:bodyPr rtlCol="0" anchor="ctr"/>
+          <a:lstStyle/>
+          <a:p>
+            <a:pPr algn="ctr"/>
+          </a:p>
+        </p:txBody>
+      </p:sp>
+      <p:sp>
+        <p:nvSpPr>
+          <p:cNvPr id="28" name="TextBox 27"/>
+          <p:cNvSpPr txBox="1"/>
+          <p:nvPr/>
+        </p:nvSpPr>
+        <p:spPr>
+          <a:xfrm>
+            <a:off x="9720072" y="3474720"/>
+            <a:ext cx="1965960" cy="640080"/>
+          </a:xfrm>
+          <a:prstGeom prst="rect">
+            <a:avLst/>
+          </a:prstGeom>
+          <a:noFill/>
+        </p:spPr>
+        <p:txBody>
+          <a:bodyPr wrap="square" lIns="0" rIns="0" tIns="0" bIns="0" anchor="t">
+            <a:spAutoFit/>
+          </a:bodyPr>
+          <a:lstStyle/>
+          <a:p>
+            <a:pPr algn="l">
+              <a:lnSpc>
+                <a:spcPct val="125000"/>
+              </a:lnSpc>
+            </a:pPr>
+            <a:r>
+              <a:rPr sz="1000" b="0" i="0">
+                <a:solidFill>
+                  <a:srgbClr val="1A1A1A"/>
+                </a:solidFill>
+                <a:latin typeface="Calibri"/>
+              </a:rPr>
+              <a:t>Reserve nodes</a:t>
+            </a:r>
+          </a:p>
+          <a:p>
+            <a:pPr algn="l">
+              <a:lnSpc>
+                <a:spcPct val="125000"/>
+              </a:lnSpc>
+            </a:pPr>
+            <a:r>
+              <a:rPr sz="1000" b="0" i="0">
+                <a:solidFill>
+                  <a:srgbClr val="1A1A1A"/>
+                </a:solidFill>
+                <a:latin typeface="Calibri"/>
+              </a:rPr>
+              <a:t>(US, Thailand)</a:t>
+            </a:r>
+          </a:p>
+        </p:txBody>
+      </p:sp>
+      <p:sp>
+        <p:nvSpPr>
+          <p:cNvPr id="29" name="Rectangle 28"/>
+          <p:cNvSpPr/>
+          <p:nvPr/>
+        </p:nvSpPr>
+        <p:spPr>
+          <a:xfrm>
+            <a:off x="9537192" y="4197096"/>
+            <a:ext cx="73152" cy="73152"/>
+          </a:xfrm>
+          <a:prstGeom prst="rect">
+            <a:avLst/>
+          </a:prstGeom>
+          <a:solidFill>
+            <a:srgbClr val="C9A961"/>
+          </a:solidFill>
+          <a:ln>
+            <a:noFill/>
+          </a:ln>
+          <a:effectLst/>
+        </p:spPr>
+        <p:style>
+          <a:lnRef idx="1">
+            <a:schemeClr val="accent1"/>
+          </a:lnRef>
+          <a:fillRef idx="3">
+            <a:schemeClr val="accent1"/>
+          </a:fillRef>
+          <a:effectRef idx="2">
+            <a:schemeClr val="accent1"/>
+          </a:effectRef>
+          <a:fontRef idx="minor">
+            <a:schemeClr val="lt1"/>
+          </a:fontRef>
+        </p:style>
+        <p:txBody>
+          <a:bodyPr rtlCol="0" anchor="ctr"/>
+          <a:lstStyle/>
+          <a:p>
+            <a:pPr algn="ctr"/>
+          </a:p>
+        </p:txBody>
+      </p:sp>
+      <p:sp>
+        <p:nvSpPr>
+          <p:cNvPr id="30" name="TextBox 29"/>
+          <p:cNvSpPr txBox="1"/>
+          <p:nvPr/>
+        </p:nvSpPr>
+        <p:spPr>
+          <a:xfrm>
+            <a:off x="9720072" y="4160520"/>
+            <a:ext cx="1965960" cy="640080"/>
+          </a:xfrm>
+          <a:prstGeom prst="rect">
+            <a:avLst/>
+          </a:prstGeom>
+          <a:noFill/>
+        </p:spPr>
+        <p:txBody>
+          <a:bodyPr wrap="square" lIns="0" rIns="0" tIns="0" bIns="0" anchor="t">
+            <a:spAutoFit/>
+          </a:bodyPr>
+          <a:lstStyle/>
+          <a:p>
+            <a:pPr algn="l">
+              <a:lnSpc>
+                <a:spcPct val="125000"/>
+              </a:lnSpc>
+            </a:pPr>
+            <a:r>
+              <a:rPr sz="1000" b="0" i="0">
+                <a:solidFill>
+                  <a:srgbClr val="1A1A1A"/>
+                </a:solidFill>
+                <a:latin typeface="Calibri"/>
+              </a:rPr>
+              <a:t>How the network</a:t>
+            </a:r>
+          </a:p>
+          <a:p>
+            <a:pPr algn="l">
+              <a:lnSpc>
+                <a:spcPct val="125000"/>
+              </a:lnSpc>
+            </a:pPr>
+            <a:r>
+              <a:rPr sz="1000" b="0" i="0">
+                <a:solidFill>
+                  <a:srgbClr val="1A1A1A"/>
+                </a:solidFill>
+                <a:latin typeface="Calibri"/>
+              </a:rPr>
+              <a:t>grows cumulatively</a:t>
+            </a:r>
+          </a:p>
+        </p:txBody>
+      </p:sp>
     </p:spTree>
   </p:cSld>
   <p:clrMapOvr>

--- a/interview_materials/HIRAKU_Global_Interview_Liu.pptx
+++ b/interview_materials/HIRAKU_Global_Interview_Liu.pptx
@@ -516,7 +516,7 @@
           <a:lstStyle/>
           <a:p>
             <a:r>
-              <a:t>[SLIDE 1 — TITLE — ~25s]</a:t>
+              <a:t>[SLIDE 1 — TITLE — ~25s — TIME CHECK: 0:25]</a:t>
             </a:r>
           </a:p>
           <a:p/>
@@ -605,31 +605,31 @@
           <a:lstStyle/>
           <a:p>
             <a:r>
-              <a:t>[SLIDE 10 — ASPIRATIONS — ~60s]</a:t>
+              <a:t>[SLIDE 10 — ASPIRATIONS — ~55s — TIME CHECK: 8:15]</a:t>
             </a:r>
           </a:p>
           <a:p/>
           <a:p>
             <a:r>
-              <a:t>What will I do during and after HIRAKU-Global?</a:t>
+              <a:t>What I will do — during and after HIRAKU.</a:t>
             </a:r>
           </a:p>
           <a:p/>
           <a:p>
             <a:r>
-              <a:t>Aligned with the 3I framework. Innovative — the cross-scale mechanism paper and a reusable diagnostic workflow. Influential — continued Q1 publications and the Kakenhi path. Impactful — deliverables to Yamaguchi, Ube, and Matsue.</a:t>
+              <a:t>The matrix shows year-by-year deliverables aligned with the 3I framework — Innovative, Influential, Impactful — across five years. Each cell is one specific milestone.</a:t>
             </a:r>
           </a:p>
           <a:p/>
           <a:p>
             <a:r>
-              <a:t>After tenure — and this is critical — I will be a long-term anchor at Yamaguchi University. The rings on the right show the path: from my lab, to the region, to Western Japan as an urban thermal hub, to an Asia platform, to a Local-to-Global model.</a:t>
+              <a:t>After tenure — I will be a long-term anchor at Yamaguchi University. The rings show the path: lab, region, Western Japan as urban thermal hub, Asia platform, Local-to-Global model.</a:t>
             </a:r>
           </a:p>
           <a:p/>
           <a:p>
             <a:r>
-              <a:t>I am not only a recipient. I will give back — an international workshop at Yamaguchi, a China–Japan academic bridge, teaching and mentoring graduate students, and active service to the department and the region.</a:t>
+              <a:t>I am not only a recipient. I give back — international workshop, China-Japan bridge, graduate teaching, and active department service.</a:t>
             </a:r>
           </a:p>
           <a:p/>
@@ -700,7 +700,7 @@
           <a:lstStyle/>
           <a:p>
             <a:r>
-              <a:t>[SLIDE 11 — CLOSING — ~25s]</a:t>
+              <a:t>[SLIDE 11 — CLOSING — ~25s — TIME CHECK: 9:10  ·  FINISH: 9:35]</a:t>
             </a:r>
           </a:p>
           <a:p/>
@@ -1081,7 +1081,7 @@
           <a:lstStyle/>
           <a:p>
             <a:r>
-              <a:t>[SLIDE 2 — PROFILE — ~45s]</a:t>
+              <a:t>[SLIDE 2 — PROFILE — ~35s — TIME CHECK: 0:35]</a:t>
             </a:r>
           </a:p>
           <a:p/>
@@ -1093,19 +1093,19 @@
           <a:p/>
           <a:p>
             <a:r>
-              <a:t>Three pillars. Japan-trained: Ph.D. from Saga University in 2017. China-experienced: Associate Professor at Zhejiang Sci-Tech University, 2018 to 2023. Japan-returned: Yamaguchi University since January 2026.</a:t>
+              <a:t>Three pillars: Japan-trained (Ph.D. Saga 2017). China-experienced (Associate Professor at ZSTU, 2018 to 2023). Japan-returned (Yamaguchi University since January).</a:t>
             </a:r>
           </a:p>
           <a:p/>
           <a:p>
             <a:r>
-              <a:t>The timeline below shows ten years of continuity, moving from building, to person, to city.</a:t>
+              <a:t>The timeline shows ten years across building, person, and city.</a:t>
             </a:r>
           </a:p>
           <a:p/>
           <a:p>
             <a:r>
-              <a:t>What this gives me is rare — I work natively in both Japanese regional cities and Chinese high-density urbanism, through one continuous research agenda on urban heat.</a:t>
+              <a:t>What this gives me is rare — I work natively across Japan and China, through one continuous urban-heat agenda.</a:t>
             </a:r>
           </a:p>
           <a:p/>
@@ -1176,37 +1176,31 @@
           <a:lstStyle/>
           <a:p>
             <a:r>
-              <a:t>[SLIDE 3 — WHY MY RESEARCH MATTERS — ~50s]</a:t>
+              <a:t>[SLIDE 3 — WHY — ~45s — TIME CHECK: 1:45]</a:t>
             </a:r>
           </a:p>
           <a:p/>
           <a:p>
             <a:r>
-              <a:t>Why does this research matter?</a:t>
+              <a:t>Why does this matter?</a:t>
             </a:r>
           </a:p>
           <a:p/>
           <a:p>
             <a:r>
-              <a:t>In 2023, Japan recorded over 91,000 emergency heatstroke transports. In Yamaguchi alone, 1,200 cases — and 60 percent were aged 65 or older.</a:t>
+              <a:t>In 2023, Japan recorded over 91,000 emergency heatstroke transports. Yamaguchi — 1,200 cases, 60 percent aged 65 or older. Yamaguchi's elderly share is about 35 percent — well above national 29.</a:t>
             </a:r>
           </a:p>
           <a:p/>
           <a:p>
             <a:r>
-              <a:t>But not every street is equally hot. As the section drawing shows: built-up zones trap heat; green-and-wind zones stay cool. Elderly residents walk through this contrast every day, over 500 to 1,000 meters.</a:t>
+              <a:t>But not every street is equally hot. The section shows it — built-up zones trap heat; green-and-wind zones stay cool. Elderly residents walk through this contrast every day.</a:t>
             </a:r>
           </a:p>
           <a:p/>
           <a:p>
             <a:r>
-              <a:t>So my research asks three simple questions — Where is it hot? Why is it hot? How can we cool the city while keeping it walkable?</a:t>
-            </a:r>
-          </a:p>
-          <a:p/>
-          <a:p>
-            <a:r>
-              <a:t>This sits at the intersection of climate warming, aging society, and city-center decline — the triple challenge of regional cities.</a:t>
+              <a:t>My research asks three simple questions — where, why, and how.</a:t>
             </a:r>
           </a:p>
           <a:p/>
@@ -1277,37 +1271,37 @@
           <a:lstStyle/>
           <a:p>
             <a:r>
-              <a:t>[SLIDE 4 — RESEARCH TRAJECTORY — ~60s]</a:t>
+              <a:t>[SLIDE 4 — TRAJECTORY — ~55s — TIME CHECK: 2:40]</a:t>
             </a:r>
           </a:p>
           <a:p/>
           <a:p>
             <a:r>
-              <a:t>My research has moved through three stages — not jumped between topics.</a:t>
+              <a:t>Three deliberate stages — building, person, city.</a:t>
             </a:r>
           </a:p>
           <a:p/>
           <a:p>
             <a:r>
-              <a:t>Stage 1 — Building. How does form shape indoor thermal and energy performance? This gave me the physical side, but not the human side.</a:t>
+              <a:t>Stage 1 building — how does form shape indoor thermal and energy. Physical side.</a:t>
             </a:r>
           </a:p>
           <a:p/>
           <a:p>
             <a:r>
-              <a:t>Stage 2 — Person. How do indoor conditions affect learning, health, behavior? This is where my two Q1 papers come from — Building and Environment, top 5 in its field, and Environmental Pollution. But I was still indoors.</a:t>
+              <a:t>Stage 2 person — how do indoor conditions affect learning, health, behavior. My two Q1 first-author papers come from here — Building and Environment top 5, and Energies.</a:t>
             </a:r>
           </a:p>
           <a:p/>
           <a:p>
             <a:r>
-              <a:t>Stage 3 — City. How do green-blue infrastructure, wind, and morphology together regulate pedestrian heat exposure? This is where the Kumamoto work — and the MLIT-cited case — comes from.</a:t>
+              <a:t>Stage 3 city — how do green-blue infrastructure, wind, and morphology regulate pedestrian heat exposure. This is where the Kumamoto work and the MLIT-cited case sit.</a:t>
             </a:r>
           </a:p>
           <a:p/>
           <a:p>
             <a:r>
-              <a:t>Each stage was pushed forward by a question the previous one could only partly answer. Stage 3 is where HIRAKU-Global begins.</a:t>
+              <a:t>Each stage answered what the previous one could not. Stage 3 is where HIRAKU-Global begins.</a:t>
             </a:r>
           </a:p>
           <a:p/>
@@ -1378,7 +1372,7 @@
           <a:lstStyle/>
           <a:p>
             <a:r>
-              <a:t>[SLIDE 5 — ORIGINALITY (CORE) — ~70s]</a:t>
+              <a:t>[SLIDE 5 — ORIGINALITY (CORE) — ~65s — TIME CHECK: 3:45]</a:t>
             </a:r>
           </a:p>
           <a:p/>
@@ -1390,43 +1384,25 @@
           <a:p/>
           <a:p>
             <a:r>
-              <a:t>I work at three scales — chained as one workflow, not three separate studies.</a:t>
+              <a:t>Three scales chained as one workflow. Satellite — where heat accumulates. Block-scale CFD — why. Pedestrian WBGT — along elderly walking corridors.</a:t>
             </a:r>
           </a:p>
           <a:p/>
           <a:p>
             <a:r>
-              <a:t>Top — satellite. Landsat-8/9 and Sentinel-2 tell me where heat accumulates.</a:t>
+              <a:t>Four originality points. Multi-source data. Cumulative heat exposure. Applied to Kumamoto green-infrastructure policy. And cited by Japan's MLIT as an Evidence-Based Policy Making case.</a:t>
             </a:r>
           </a:p>
           <a:p/>
           <a:p>
             <a:r>
-              <a:t>Middle — block-scale CFD. OpenFOAM tells me why, given wind and building form.</a:t>
+              <a:t>The real Kumamoto finding — the same forest patch produces 3 to 5 degrees of cooling difference depending on its wind-corridor position.</a:t>
             </a:r>
           </a:p>
           <a:p/>
           <a:p>
             <a:r>
-              <a:t>Bottom — pedestrian validation. WBGT along the actual 500-to-1,000-meter walking corridors of elderly residents.</a:t>
-            </a:r>
-          </a:p>
-          <a:p/>
-          <a:p>
-            <a:r>
-              <a:t>Four things make this original. First, multi-source data fusion. Second, cumulative heat exposure — not instantaneous temperature. Third, already applied to Kumamoto's green-infrastructure policy.</a:t>
-            </a:r>
-          </a:p>
-          <a:p/>
-          <a:p>
-            <a:r>
-              <a:t>And fourth — most importantly — cited by Japan's MLIT as an Evidence-Based Policy Making case.</a:t>
-            </a:r>
-          </a:p>
-          <a:p/>
-          <a:p>
-            <a:r>
-              <a:t>Few researchers can show all four — satellite, measurement, CFD, and national policy adoption — in one workflow.</a:t>
+              <a:t>Few researchers combine all four in one workflow.</a:t>
             </a:r>
           </a:p>
           <a:p/>
@@ -1497,37 +1473,37 @@
           <a:lstStyle/>
           <a:p>
             <a:r>
-              <a:t>[SLIDE 6 — RESEARCH OUTPUTS — ~50s]</a:t>
+              <a:t>[SLIDE 6 — OUTPUTS — ~45s — TIME CHECK: 4:30]</a:t>
             </a:r>
           </a:p>
           <a:p/>
           <a:p>
             <a:r>
-              <a:t>Now my publications — quality first, and honest positioning.</a:t>
+              <a:t>Publications — quality first, honest positioning.</a:t>
             </a:r>
           </a:p>
           <a:p/>
           <a:p>
             <a:r>
-              <a:t>Fifteen peer-reviewed papers. Ten English SCI or SCIE. Eight with impact factor. Three in Q1.</a:t>
+              <a:t>Fifteen peer-reviewed. Ten English SCI or SCIE. Eight with impact factor. Three Q1.</a:t>
             </a:r>
           </a:p>
           <a:p/>
           <a:p>
             <a:r>
-              <a:t>I want to be precise about authorship — I led two of the three Q1 papers, and contributed to one. As first or co-first author: Building and Environment, top 5 in its field; and Energies. As co-author: Environmental Pollution, where I joined a research-team study on PM2.5 health.</a:t>
+              <a:t>I want to be precise — two led, one contributed. As first or co-first: Building and Environment top 5, and Energies. As co-author: Environmental Pollution.</a:t>
             </a:r>
           </a:p>
           <a:p/>
           <a:p>
             <a:r>
-              <a:t>The timeline below shows my first or co-first authored papers by year — including two Kumamoto Urban Policy articles in 2024.</a:t>
+              <a:t>The timeline below shows my first or co-first papers year by year.</a:t>
             </a:r>
           </a:p>
           <a:p/>
           <a:p>
             <a:r>
-              <a:t>What matters more than journal count is the line that connects them — building energy, indoor comfort, PM2.5 health, urban heat, green infrastructure, policy. One continuous research agenda.</a:t>
+              <a:t>What matters more than the count — one continuous research line from building energy to urban policy.</a:t>
             </a:r>
           </a:p>
           <a:p/>
@@ -1598,13 +1574,13 @@
           <a:lstStyle/>
           <a:p>
             <a:r>
-              <a:t>[SLIDE 7 — INTERNATIONAL COLLABORATION — ~55s]</a:t>
+              <a:t>[SLIDE 7 — INT'L COLLABORATION — ~50s — TIME CHECK: 5:20]</a:t>
             </a:r>
           </a:p>
           <a:p/>
           <a:p>
             <a:r>
-              <a:t>International collaboration, for me, means organizing — not just attending.</a:t>
+              <a:t>For me, collaboration means organizing — not just attending.</a:t>
             </a:r>
           </a:p>
           <a:p/>
@@ -1616,31 +1592,25 @@
           <a:p/>
           <a:p>
             <a:r>
-              <a:t>One — the Sakura Science Program. I organized exchanges between Zhejiang Sci-Tech University and Japanese universities over multiple years. Paused by COVID; friendship intact.</a:t>
+              <a:t>Sakura Science Program, 2019 to 2020 — organized exchanges between ZSTU and Japanese universities. Paused by COVID; friendship intact.</a:t>
             </a:r>
           </a:p>
           <a:p/>
           <a:p>
             <a:r>
-              <a:t>Two — during COVID, I helped build the Zhejiang International Cooperation Center on Carbon Neutrality. Only four such centers province-wide; ZSTU was the core unit of one.</a:t>
+              <a:t>Zhejiang Carbon-Neutral Center, 2021 to 2022 — I helped build one of only four provincial centers, ZSTU as core unit.</a:t>
             </a:r>
           </a:p>
           <a:p/>
           <a:p>
             <a:r>
-              <a:t>Three — I organized a five-country online forum: China, Japan, UK at UCL, Indonesia, and Bangladesh.</a:t>
+              <a:t>Five-country online forum, 2022 — China, Japan, UK at UCL, Indonesia, Bangladesh.</a:t>
             </a:r>
           </a:p>
           <a:p/>
           <a:p>
             <a:r>
-              <a:t>The future network below builds on these existing friendships, with Yamaguchi University at the center.</a:t>
-            </a:r>
-          </a:p>
-          <a:p/>
-          <a:p>
-            <a:r>
-              <a:t>In all three cases — I was the organizer.</a:t>
+              <a:t>The future network builds on these existing friendships. In all three — I was the organizer.</a:t>
             </a:r>
           </a:p>
           <a:p/>
@@ -1711,37 +1681,37 @@
           <a:lstStyle/>
           <a:p>
             <a:r>
-              <a:t>[SLIDE 8 — FUNDING &amp; LEADERSHIP — ~60s]</a:t>
+              <a:t>[SLIDE 8 — FUNDING — ~50s — TIME CHECK: 6:10]</a:t>
             </a:r>
           </a:p>
           <a:p/>
           <a:p>
             <a:r>
-              <a:t>Funding — the honest picture in three phases.</a:t>
+              <a:t>Funding — honest picture in three phases.</a:t>
             </a:r>
           </a:p>
           <a:p/>
           <a:p>
             <a:r>
-              <a:t>China, 2018 to 2023. Across eight projects, approximately 100 million yen total. Five as Leading Researcher, in a highly competitive environment.</a:t>
+              <a:t>China, 2018 to 2023. Eight projects, approximately 100 million yen total — five as Leading Researcher. Notable: Hangzhou Public Spaces as PI; NSSFC General Project as collaborator.</a:t>
             </a:r>
           </a:p>
           <a:p/>
           <a:p>
             <a:r>
-              <a:t>Kumamoto, 2023 to 2025. Municipal post — institutional rule did not permit external grants such as Kakenhi. What I produced instead was the MLIT EBPM-cited policy work.</a:t>
+              <a:t>Kumamoto, 2023 to 2025. Municipal post — institutional rule did not permit external Kakenhi from this position. Instead — the MLIT-cited policy work.</a:t>
             </a:r>
           </a:p>
           <a:p/>
           <a:p>
             <a:r>
-              <a:t>Yamaguchi, since January 2026 — the first time I could apply in Japan. Within months, I was ranked number one out of thirteen applicants in the Yamaguchi regional research program. Four were selected.</a:t>
+              <a:t>Yamaguchi, since January. First time eligible. Ranked number one of thirteen — within months. The Japan pattern has started.</a:t>
             </a:r>
           </a:p>
           <a:p/>
           <a:p>
             <a:r>
-              <a:t>Forward path — Kakenhi Kiban C this autumn, building toward Kiban B during HIRAKU. The Japan pattern has started.</a:t>
+              <a:t>Forward — Kakenhi Kiban C autumn, then Kiban B during HIRAKU.</a:t>
             </a:r>
           </a:p>
           <a:p/>
@@ -1812,43 +1782,43 @@
           <a:lstStyle/>
           <a:p>
             <a:r>
-              <a:t>[SLIDE 9 — RESEARCH PLAN (CORE) — ~70s]</a:t>
+              <a:t>[SLIDE 9 — PLAN (CORE) — ~70s — TIME CHECK: 7:20]</a:t>
             </a:r>
           </a:p>
           <a:p/>
           <a:p>
             <a:r>
-              <a:t>This is the project I will run during HIRAKU-Global.</a:t>
+              <a:t>This is the HIRAKU project.</a:t>
             </a:r>
           </a:p>
           <a:p/>
           <a:p>
             <a:r>
-              <a:t>Left — three cities, three wind regimes within one region: Matsue lakeside, Yamaguchi basin, Ube coastal. The contrast is exactly what the science needs.</a:t>
+              <a:t>Three cities — three wind regimes: Matsue lakeside, Yamaguchi basin, Ube coastal. The contrast is what the science needs.</a:t>
             </a:r>
           </a:p>
           <a:p/>
           <a:p>
             <a:r>
-              <a:t>Middle — the method chain. Step 1 satellite screening — already running. Step 2 block CFD — methodology already established. Step 3 pedestrian WBGT — co-designed with Yamaguchi City's elderly-care offices.</a:t>
+              <a:t>The method chain. Satellite screening already running. Block CFD methodology already established. Pedestrian WBGT co-designed with Yamaguchi's elderly-care offices.</a:t>
             </a:r>
           </a:p>
           <a:p/>
           <a:p>
             <a:r>
-              <a:t>Right — the five-year plan. Year 1 diagnosis. Year 2 UCL stay with Dr. Huanfa Chen. Year 3 CFD plus Zhejiang visit. Year 4 pedestrian field plus international workshop at Yamaguchi. Year 5 synthesis and Kakenhi B.</a:t>
+              <a:t>The five-year plan. Year 1 diagnosis. Year 2 UCL stay. Year 3 CFD plus Zhejiang visit. Year 4 pedestrian field plus international workshop. Year 5 synthesis and Kakenhi B.</a:t>
             </a:r>
           </a:p>
           <a:p/>
           <a:p>
             <a:r>
-              <a:t>This plan does not start from zero. Pipeline running. Partners ready. First grant won.</a:t>
+              <a:t>This does not start from zero. Pipeline running, partners ready, first grant won. Budget allocation below.</a:t>
             </a:r>
           </a:p>
           <a:p/>
           <a:p>
             <a:r>
-              <a:t>I also manage risk — anchor Yamaguchi first, expand stepwise, use online collaboration when needed. Deliver, not over-promise.</a:t>
+              <a:t>Risk managed — anchor Yamaguchi first, expand stepwise.</a:t>
             </a:r>
           </a:p>
           <a:p/>
@@ -22381,7 +22351,7 @@
                 </a:solidFill>
                 <a:latin typeface="Calibri"/>
               </a:rPr>
-              <a:t>SELECTED DISTINCTIONS  ·  RECOGNITION &amp; SERVICE</a:t>
+              <a:t>SELECTED DISTINCTIONS &amp; CREDENTIALS</a:t>
             </a:r>
           </a:p>
         </p:txBody>
@@ -22395,7 +22365,7 @@
         <p:spPr>
           <a:xfrm>
             <a:off x="685800" y="5806440"/>
-            <a:ext cx="3703320" cy="502920"/>
+            <a:ext cx="2715768" cy="502920"/>
           </a:xfrm>
           <a:prstGeom prst="rect">
             <a:avLst/>
@@ -22482,7 +22452,7 @@
         </p:nvSpPr>
         <p:spPr>
           <a:xfrm>
-            <a:off x="850392" y="5833872"/>
+            <a:off x="832104" y="5833872"/>
             <a:ext cx="640080" cy="201168"/>
           </a:xfrm>
           <a:prstGeom prst="rect">
@@ -22502,7 +22472,7 @@
               </a:lnSpc>
             </a:pPr>
             <a:r>
-              <a:rPr sz="900" b="1" i="0">
+              <a:rPr sz="850" b="1" i="0">
                 <a:solidFill>
                   <a:srgbClr val="8C6F33"/>
                 </a:solidFill>
@@ -22522,7 +22492,7 @@
         <p:spPr>
           <a:xfrm>
             <a:off x="1399032" y="5833872"/>
-            <a:ext cx="2880360" cy="201168"/>
+            <a:ext cx="1892808" cy="201168"/>
           </a:xfrm>
           <a:prstGeom prst="rect">
             <a:avLst/>
@@ -22541,7 +22511,7 @@
               </a:lnSpc>
             </a:pPr>
             <a:r>
-              <a:rPr sz="1000" b="1" i="0">
+              <a:rPr sz="950" b="1" i="0">
                 <a:solidFill>
                   <a:srgbClr val="142E55"/>
                 </a:solidFill>
@@ -22560,8 +22530,8 @@
         </p:nvSpPr>
         <p:spPr>
           <a:xfrm>
-            <a:off x="850392" y="6062472"/>
-            <a:ext cx="3429000" cy="228600"/>
+            <a:off x="832104" y="6053328"/>
+            <a:ext cx="2459736" cy="246888"/>
           </a:xfrm>
           <a:prstGeom prst="rect">
             <a:avLst/>
@@ -22576,17 +22546,17 @@
           <a:p>
             <a:pPr algn="l">
               <a:lnSpc>
-                <a:spcPct val="115000"/>
-              </a:lnSpc>
-            </a:pPr>
-            <a:r>
-              <a:rPr sz="800" b="0" i="1">
+                <a:spcPct val="120000"/>
+              </a:lnSpc>
+            </a:pPr>
+            <a:r>
+              <a:rPr sz="750" b="0" i="1">
                 <a:solidFill>
                   <a:srgbClr val="4A5568"/>
                 </a:solidFill>
                 <a:latin typeface="Calibri"/>
               </a:rPr>
-              <a:t>Eco-City Design 1st Prize on China Central TV</a:t>
+              <a:t>Eco-City 1st Prize on China Central TV</a:t>
             </a:r>
           </a:p>
         </p:txBody>
@@ -22599,8 +22569,8 @@
         </p:nvSpPr>
         <p:spPr>
           <a:xfrm>
-            <a:off x="4480560" y="5806440"/>
-            <a:ext cx="3703320" cy="502920"/>
+            <a:off x="3474720" y="5806440"/>
+            <a:ext cx="2715768" cy="502920"/>
           </a:xfrm>
           <a:prstGeom prst="rect">
             <a:avLst/>
@@ -22643,7 +22613,7 @@
         </p:nvSpPr>
         <p:spPr>
           <a:xfrm>
-            <a:off x="4480560" y="5806440"/>
+            <a:off x="3474720" y="5806440"/>
             <a:ext cx="54864" cy="502920"/>
           </a:xfrm>
           <a:prstGeom prst="rect">
@@ -22687,7 +22657,7 @@
         </p:nvSpPr>
         <p:spPr>
           <a:xfrm>
-            <a:off x="4645152" y="5833872"/>
+            <a:off x="3621024" y="5833872"/>
             <a:ext cx="640080" cy="201168"/>
           </a:xfrm>
           <a:prstGeom prst="rect">
@@ -22707,7 +22677,7 @@
               </a:lnSpc>
             </a:pPr>
             <a:r>
-              <a:rPr sz="900" b="1" i="0">
+              <a:rPr sz="850" b="1" i="0">
                 <a:solidFill>
                   <a:srgbClr val="8C6F33"/>
                 </a:solidFill>
@@ -22726,8 +22696,8 @@
         </p:nvSpPr>
         <p:spPr>
           <a:xfrm>
-            <a:off x="5193792" y="5833872"/>
-            <a:ext cx="2880360" cy="201168"/>
+            <a:off x="4187952" y="5833872"/>
+            <a:ext cx="1892808" cy="201168"/>
           </a:xfrm>
           <a:prstGeom prst="rect">
             <a:avLst/>
@@ -22746,7 +22716,7 @@
               </a:lnSpc>
             </a:pPr>
             <a:r>
-              <a:rPr sz="1000" b="1" i="0">
+              <a:rPr sz="950" b="1" i="0">
                 <a:solidFill>
                   <a:srgbClr val="142E55"/>
                 </a:solidFill>
@@ -22765,8 +22735,8 @@
         </p:nvSpPr>
         <p:spPr>
           <a:xfrm>
-            <a:off x="4645152" y="6062472"/>
-            <a:ext cx="3429000" cy="228600"/>
+            <a:off x="3621024" y="6053328"/>
+            <a:ext cx="2459736" cy="246888"/>
           </a:xfrm>
           <a:prstGeom prst="rect">
             <a:avLst/>
@@ -22781,17 +22751,17 @@
           <a:p>
             <a:pPr algn="l">
               <a:lnSpc>
-                <a:spcPct val="115000"/>
-              </a:lnSpc>
-            </a:pPr>
-            <a:r>
-              <a:rPr sz="800" b="0" i="1">
+                <a:spcPct val="120000"/>
+              </a:lnSpc>
+            </a:pPr>
+            <a:r>
+              <a:rPr sz="750" b="0" i="1">
                 <a:solidFill>
                   <a:srgbClr val="4A5568"/>
                 </a:solidFill>
                 <a:latin typeface="Calibri"/>
               </a:rPr>
-              <a:t>Adv. Study Institute (Hong Kong) — early international training</a:t>
+              <a:t>Adv. Study Institute (Hong Kong)</a:t>
             </a:r>
           </a:p>
         </p:txBody>
@@ -22804,8 +22774,8 @@
         </p:nvSpPr>
         <p:spPr>
           <a:xfrm>
-            <a:off x="8275320" y="5806440"/>
-            <a:ext cx="3703320" cy="502920"/>
+            <a:off x="6263640" y="5806440"/>
+            <a:ext cx="2715768" cy="502920"/>
           </a:xfrm>
           <a:prstGeom prst="rect">
             <a:avLst/>
@@ -22848,7 +22818,7 @@
         </p:nvSpPr>
         <p:spPr>
           <a:xfrm>
-            <a:off x="8275320" y="5806440"/>
+            <a:off x="6263640" y="5806440"/>
             <a:ext cx="54864" cy="502920"/>
           </a:xfrm>
           <a:prstGeom prst="rect">
@@ -22892,7 +22862,7 @@
         </p:nvSpPr>
         <p:spPr>
           <a:xfrm>
-            <a:off x="8439912" y="5833872"/>
+            <a:off x="6409944" y="5833872"/>
             <a:ext cx="640080" cy="201168"/>
           </a:xfrm>
           <a:prstGeom prst="rect">
@@ -22912,7 +22882,7 @@
               </a:lnSpc>
             </a:pPr>
             <a:r>
-              <a:rPr sz="900" b="1" i="0">
+              <a:rPr sz="850" b="1" i="0">
                 <a:solidFill>
                   <a:srgbClr val="8C6F33"/>
                 </a:solidFill>
@@ -22931,8 +22901,8 @@
         </p:nvSpPr>
         <p:spPr>
           <a:xfrm>
-            <a:off x="8988552" y="5833872"/>
-            <a:ext cx="2880360" cy="201168"/>
+            <a:off x="6976872" y="5833872"/>
+            <a:ext cx="1892808" cy="201168"/>
           </a:xfrm>
           <a:prstGeom prst="rect">
             <a:avLst/>
@@ -22951,7 +22921,7 @@
               </a:lnSpc>
             </a:pPr>
             <a:r>
-              <a:rPr sz="1000" b="1" i="0">
+              <a:rPr sz="950" b="1" i="0">
                 <a:solidFill>
                   <a:srgbClr val="142E55"/>
                 </a:solidFill>
@@ -22970,8 +22940,8 @@
         </p:nvSpPr>
         <p:spPr>
           <a:xfrm>
-            <a:off x="8439912" y="6062472"/>
-            <a:ext cx="3429000" cy="228600"/>
+            <a:off x="6409944" y="6053328"/>
+            <a:ext cx="2459736" cy="246888"/>
           </a:xfrm>
           <a:prstGeom prst="rect">
             <a:avLst/>
@@ -22986,17 +22956,222 @@
           <a:p>
             <a:pPr algn="l">
               <a:lnSpc>
+                <a:spcPct val="120000"/>
+              </a:lnSpc>
+            </a:pPr>
+            <a:r>
+              <a:rPr sz="750" b="0" i="1">
+                <a:solidFill>
+                  <a:srgbClr val="4A5568"/>
+                </a:solidFill>
+                <a:latin typeface="Calibri"/>
+              </a:rPr>
+              <a:t>Urban Regen. · Changzhou · Saga Alumni</a:t>
+            </a:r>
+          </a:p>
+        </p:txBody>
+      </p:sp>
+      <p:sp>
+        <p:nvSpPr>
+          <p:cNvPr id="84" name="Rectangle 83"/>
+          <p:cNvSpPr/>
+          <p:nvPr/>
+        </p:nvSpPr>
+        <p:spPr>
+          <a:xfrm>
+            <a:off x="9052560" y="5806440"/>
+            <a:ext cx="2715768" cy="502920"/>
+          </a:xfrm>
+          <a:prstGeom prst="rect">
+            <a:avLst/>
+          </a:prstGeom>
+          <a:noFill/>
+          <a:ln w="7620">
+            <a:solidFill>
+              <a:srgbClr val="C9A961"/>
+            </a:solidFill>
+          </a:ln>
+          <a:effectLst/>
+        </p:spPr>
+        <p:style>
+          <a:lnRef idx="1">
+            <a:schemeClr val="accent1"/>
+          </a:lnRef>
+          <a:fillRef idx="3">
+            <a:schemeClr val="accent1"/>
+          </a:fillRef>
+          <a:effectRef idx="2">
+            <a:schemeClr val="accent1"/>
+          </a:effectRef>
+          <a:fontRef idx="minor">
+            <a:schemeClr val="lt1"/>
+          </a:fontRef>
+        </p:style>
+        <p:txBody>
+          <a:bodyPr rtlCol="0" anchor="ctr"/>
+          <a:lstStyle/>
+          <a:p>
+            <a:pPr algn="ctr"/>
+          </a:p>
+        </p:txBody>
+      </p:sp>
+      <p:sp>
+        <p:nvSpPr>
+          <p:cNvPr id="85" name="Rectangle 84"/>
+          <p:cNvSpPr/>
+          <p:nvPr/>
+        </p:nvSpPr>
+        <p:spPr>
+          <a:xfrm>
+            <a:off x="9052560" y="5806440"/>
+            <a:ext cx="54864" cy="502920"/>
+          </a:xfrm>
+          <a:prstGeom prst="rect">
+            <a:avLst/>
+          </a:prstGeom>
+          <a:solidFill>
+            <a:srgbClr val="C9A961"/>
+          </a:solidFill>
+          <a:ln>
+            <a:noFill/>
+          </a:ln>
+          <a:effectLst/>
+        </p:spPr>
+        <p:style>
+          <a:lnRef idx="1">
+            <a:schemeClr val="accent1"/>
+          </a:lnRef>
+          <a:fillRef idx="3">
+            <a:schemeClr val="accent1"/>
+          </a:fillRef>
+          <a:effectRef idx="2">
+            <a:schemeClr val="accent1"/>
+          </a:effectRef>
+          <a:fontRef idx="minor">
+            <a:schemeClr val="lt1"/>
+          </a:fontRef>
+        </p:style>
+        <p:txBody>
+          <a:bodyPr rtlCol="0" anchor="ctr"/>
+          <a:lstStyle/>
+          <a:p>
+            <a:pPr algn="ctr"/>
+          </a:p>
+        </p:txBody>
+      </p:sp>
+      <p:sp>
+        <p:nvSpPr>
+          <p:cNvPr id="86" name="TextBox 85"/>
+          <p:cNvSpPr txBox="1"/>
+          <p:nvPr/>
+        </p:nvSpPr>
+        <p:spPr>
+          <a:xfrm>
+            <a:off x="9198864" y="5833872"/>
+            <a:ext cx="640080" cy="201168"/>
+          </a:xfrm>
+          <a:prstGeom prst="rect">
+            <a:avLst/>
+          </a:prstGeom>
+          <a:noFill/>
+        </p:spPr>
+        <p:txBody>
+          <a:bodyPr wrap="square" lIns="0" rIns="0" tIns="0" bIns="0" anchor="t">
+            <a:spAutoFit/>
+          </a:bodyPr>
+          <a:lstStyle/>
+          <a:p>
+            <a:pPr algn="l">
+              <a:lnSpc>
                 <a:spcPct val="115000"/>
               </a:lnSpc>
             </a:pPr>
             <a:r>
-              <a:rPr sz="800" b="0" i="1">
+              <a:rPr sz="850" b="1" i="0">
+                <a:solidFill>
+                  <a:srgbClr val="8C6F33"/>
+                </a:solidFill>
+                <a:latin typeface="Calibri"/>
+              </a:rPr>
+              <a:t>Skills</a:t>
+            </a:r>
+          </a:p>
+        </p:txBody>
+      </p:sp>
+      <p:sp>
+        <p:nvSpPr>
+          <p:cNvPr id="87" name="TextBox 86"/>
+          <p:cNvSpPr txBox="1"/>
+          <p:nvPr/>
+        </p:nvSpPr>
+        <p:spPr>
+          <a:xfrm>
+            <a:off x="9765792" y="5833872"/>
+            <a:ext cx="1892808" cy="201168"/>
+          </a:xfrm>
+          <a:prstGeom prst="rect">
+            <a:avLst/>
+          </a:prstGeom>
+          <a:noFill/>
+        </p:spPr>
+        <p:txBody>
+          <a:bodyPr wrap="square" lIns="0" rIns="0" tIns="0" bIns="0" anchor="t">
+            <a:spAutoFit/>
+          </a:bodyPr>
+          <a:lstStyle/>
+          <a:p>
+            <a:pPr algn="l">
+              <a:lnSpc>
+                <a:spcPct val="115000"/>
+              </a:lnSpc>
+            </a:pPr>
+            <a:r>
+              <a:rPr sz="950" b="1" i="0">
+                <a:solidFill>
+                  <a:srgbClr val="142E55"/>
+                </a:solidFill>
+                <a:latin typeface="Calibri"/>
+              </a:rPr>
+              <a:t>Patent + Languages</a:t>
+            </a:r>
+          </a:p>
+        </p:txBody>
+      </p:sp>
+      <p:sp>
+        <p:nvSpPr>
+          <p:cNvPr id="88" name="TextBox 87"/>
+          <p:cNvSpPr txBox="1"/>
+          <p:nvPr/>
+        </p:nvSpPr>
+        <p:spPr>
+          <a:xfrm>
+            <a:off x="9198864" y="6053328"/>
+            <a:ext cx="2459736" cy="246888"/>
+          </a:xfrm>
+          <a:prstGeom prst="rect">
+            <a:avLst/>
+          </a:prstGeom>
+          <a:noFill/>
+        </p:spPr>
+        <p:txBody>
+          <a:bodyPr wrap="square" lIns="0" rIns="0" tIns="0" bIns="0" anchor="t">
+            <a:spAutoFit/>
+          </a:bodyPr>
+          <a:lstStyle/>
+          <a:p>
+            <a:pPr algn="l">
+              <a:lnSpc>
+                <a:spcPct val="120000"/>
+              </a:lnSpc>
+            </a:pPr>
+            <a:r>
+              <a:rPr sz="750" b="0" i="1">
                 <a:solidFill>
                   <a:srgbClr val="4A5568"/>
                 </a:solidFill>
                 <a:latin typeface="Calibri"/>
               </a:rPr>
-              <a:t>Urban Regen. · Changzhou Sci-Tech Expert · Saga Alumni</a:t>
+              <a:t>Patent CN 210135674 U · 中 / 日 / EN</a:t>
             </a:r>
           </a:p>
         </p:txBody>
@@ -25837,7 +26012,7 @@
         <p:spPr>
           <a:xfrm>
             <a:off x="6812280" y="3383280"/>
-            <a:ext cx="5120640" cy="502920"/>
+            <a:ext cx="5120640" cy="411480"/>
           </a:xfrm>
           <a:prstGeom prst="rect">
             <a:avLst/>
@@ -25856,13 +26031,13 @@
               </a:lnSpc>
             </a:pPr>
             <a:r>
-              <a:rPr sz="1800" b="1" i="0">
+              <a:rPr sz="1700" b="1" i="0">
                 <a:solidFill>
                   <a:srgbClr val="142E55"/>
                 </a:solidFill>
                 <a:latin typeface="Calibri"/>
               </a:rPr>
-              <a:t>1,200+  in Yamaguchi  ·  60%  aged 65+</a:t>
+              <a:t>1,200+ in Yamaguchi  ·  60% aged 65+</a:t>
             </a:r>
           </a:p>
         </p:txBody>
@@ -25875,8 +26050,8 @@
         </p:nvSpPr>
         <p:spPr>
           <a:xfrm>
-            <a:off x="6812280" y="3886200"/>
-            <a:ext cx="5120640" cy="365760"/>
+            <a:off x="6812280" y="3794760"/>
+            <a:ext cx="5120640" cy="320040"/>
           </a:xfrm>
           <a:prstGeom prst="rect">
             <a:avLst/>
@@ -25895,20 +26070,59 @@
               </a:lnSpc>
             </a:pPr>
             <a:r>
-              <a:rPr sz="1100" b="0" i="1">
+              <a:rPr sz="1200" b="1" i="0">
+                <a:solidFill>
+                  <a:srgbClr val="8C6F33"/>
+                </a:solidFill>
+                <a:latin typeface="Calibri"/>
+              </a:rPr>
+              <a:t>Yamaguchi 65+ share ≈ 35%   (national avg ≈ 29%)</a:t>
+            </a:r>
+          </a:p>
+        </p:txBody>
+      </p:sp>
+      <p:sp>
+        <p:nvSpPr>
+          <p:cNvPr id="74" name="TextBox 73"/>
+          <p:cNvSpPr txBox="1"/>
+          <p:nvPr/>
+        </p:nvSpPr>
+        <p:spPr>
+          <a:xfrm>
+            <a:off x="6812280" y="4114800"/>
+            <a:ext cx="5120640" cy="274320"/>
+          </a:xfrm>
+          <a:prstGeom prst="rect">
+            <a:avLst/>
+          </a:prstGeom>
+          <a:noFill/>
+        </p:spPr>
+        <p:txBody>
+          <a:bodyPr wrap="square" lIns="0" rIns="0" tIns="0" bIns="0" anchor="t">
+            <a:spAutoFit/>
+          </a:bodyPr>
+          <a:lstStyle/>
+          <a:p>
+            <a:pPr algn="l">
+              <a:lnSpc>
+                <a:spcPct val="115000"/>
+              </a:lnSpc>
+            </a:pPr>
+            <a:r>
+              <a:rPr sz="1000" b="0" i="1">
                 <a:solidFill>
                   <a:srgbClr val="4A5568"/>
                 </a:solidFill>
                 <a:latin typeface="Calibri"/>
               </a:rPr>
-              <a:t>Heat is no longer just weather — it is a regional public-health issue.</a:t>
+              <a:t>Heat × aging × decline — triple challenge concentrated here.</a:t>
             </a:r>
           </a:p>
         </p:txBody>
       </p:sp>
       <p:cxnSp>
         <p:nvCxnSpPr>
-          <p:cNvPr id="74" name="Connector 73"/>
+          <p:cNvPr id="75" name="Connector 74"/>
           <p:cNvCxnSpPr/>
           <p:nvPr/>
         </p:nvCxnSpPr>
@@ -25943,7 +26157,7 @@
       </p:cxnSp>
       <p:sp>
         <p:nvSpPr>
-          <p:cNvPr id="75" name="TextBox 74"/>
+          <p:cNvPr id="76" name="TextBox 75"/>
           <p:cNvSpPr txBox="1"/>
           <p:nvPr/>
         </p:nvSpPr>
@@ -25982,7 +26196,7 @@
       </p:sp>
       <p:sp>
         <p:nvSpPr>
-          <p:cNvPr id="76" name="Rectangle 75"/>
+          <p:cNvPr id="77" name="Rectangle 76"/>
           <p:cNvSpPr/>
           <p:nvPr/>
         </p:nvSpPr>
@@ -26026,7 +26240,7 @@
       </p:sp>
       <p:sp>
         <p:nvSpPr>
-          <p:cNvPr id="77" name="TextBox 76"/>
+          <p:cNvPr id="78" name="TextBox 77"/>
           <p:cNvSpPr txBox="1"/>
           <p:nvPr/>
         </p:nvSpPr>
@@ -26065,7 +26279,7 @@
       </p:sp>
       <p:sp>
         <p:nvSpPr>
-          <p:cNvPr id="78" name="TextBox 77"/>
+          <p:cNvPr id="79" name="TextBox 78"/>
           <p:cNvSpPr txBox="1"/>
           <p:nvPr/>
         </p:nvSpPr>
@@ -26104,7 +26318,7 @@
       </p:sp>
       <p:sp>
         <p:nvSpPr>
-          <p:cNvPr id="79" name="Rectangle 78"/>
+          <p:cNvPr id="80" name="Rectangle 79"/>
           <p:cNvSpPr/>
           <p:nvPr/>
         </p:nvSpPr>
@@ -26148,7 +26362,7 @@
       </p:sp>
       <p:sp>
         <p:nvSpPr>
-          <p:cNvPr id="80" name="TextBox 79"/>
+          <p:cNvPr id="81" name="TextBox 80"/>
           <p:cNvSpPr txBox="1"/>
           <p:nvPr/>
         </p:nvSpPr>
@@ -26187,7 +26401,7 @@
       </p:sp>
       <p:sp>
         <p:nvSpPr>
-          <p:cNvPr id="81" name="TextBox 80"/>
+          <p:cNvPr id="82" name="TextBox 81"/>
           <p:cNvSpPr txBox="1"/>
           <p:nvPr/>
         </p:nvSpPr>
@@ -26226,7 +26440,7 @@
       </p:sp>
       <p:sp>
         <p:nvSpPr>
-          <p:cNvPr id="82" name="Rectangle 81"/>
+          <p:cNvPr id="83" name="Rectangle 82"/>
           <p:cNvSpPr/>
           <p:nvPr/>
         </p:nvSpPr>
@@ -26270,7 +26484,7 @@
       </p:sp>
       <p:sp>
         <p:nvSpPr>
-          <p:cNvPr id="83" name="TextBox 82"/>
+          <p:cNvPr id="84" name="TextBox 83"/>
           <p:cNvSpPr txBox="1"/>
           <p:nvPr/>
         </p:nvSpPr>
@@ -26309,7 +26523,7 @@
       </p:sp>
       <p:sp>
         <p:nvSpPr>
-          <p:cNvPr id="84" name="TextBox 83"/>
+          <p:cNvPr id="85" name="TextBox 84"/>
           <p:cNvSpPr txBox="1"/>
           <p:nvPr/>
         </p:nvSpPr>
@@ -26348,7 +26562,7 @@
       </p:sp>
       <p:sp>
         <p:nvSpPr>
-          <p:cNvPr id="85" name="Rectangle 84"/>
+          <p:cNvPr id="86" name="Rectangle 85"/>
           <p:cNvSpPr/>
           <p:nvPr/>
         </p:nvSpPr>
@@ -26392,7 +26606,7 @@
       </p:sp>
       <p:sp>
         <p:nvSpPr>
-          <p:cNvPr id="86" name="TextBox 85"/>
+          <p:cNvPr id="87" name="TextBox 86"/>
           <p:cNvSpPr txBox="1"/>
           <p:nvPr/>
         </p:nvSpPr>
@@ -33577,53 +33791,14 @@
       </p:sp>
       <p:sp>
         <p:nvSpPr>
-          <p:cNvPr id="87" name="TextBox 86"/>
-          <p:cNvSpPr txBox="1"/>
-          <p:nvPr/>
-        </p:nvSpPr>
-        <p:spPr>
-          <a:xfrm>
-            <a:off x="868680" y="5641848"/>
-            <a:ext cx="4846320" cy="201168"/>
-          </a:xfrm>
-          <a:prstGeom prst="rect">
-            <a:avLst/>
-          </a:prstGeom>
-          <a:noFill/>
-        </p:spPr>
-        <p:txBody>
-          <a:bodyPr wrap="square" lIns="0" rIns="0" tIns="0" bIns="0" anchor="t">
-            <a:spAutoFit/>
-          </a:bodyPr>
-          <a:lstStyle/>
-          <a:p>
-            <a:pPr algn="l">
-              <a:lnSpc>
-                <a:spcPct val="115000"/>
-              </a:lnSpc>
-            </a:pPr>
-            <a:r>
-              <a:rPr sz="850" b="0" i="1">
-                <a:solidFill>
-                  <a:srgbClr val="8895A8"/>
-                </a:solidFill>
-                <a:latin typeface="Calibri"/>
-              </a:rPr>
-              <a:t>Methods validated in C-1 (Sustainability 2024) &amp; A-1 book chapter  ·  + Utility Model Patent CN 210135674 U</a:t>
-            </a:r>
-          </a:p>
-        </p:txBody>
-      </p:sp>
-      <p:sp>
-        <p:nvSpPr>
-          <p:cNvPr id="88" name="Rectangle 87"/>
+          <p:cNvPr id="87" name="Rectangle 86"/>
           <p:cNvSpPr/>
           <p:nvPr/>
         </p:nvSpPr>
         <p:spPr>
           <a:xfrm>
-            <a:off x="685800" y="5897880"/>
-            <a:ext cx="10972800" cy="457200"/>
+            <a:off x="6263640" y="5532120"/>
+            <a:ext cx="5468112" cy="320040"/>
           </a:xfrm>
           <a:prstGeom prst="rect">
             <a:avLst/>
@@ -33660,14 +33835,136 @@
       </p:sp>
       <p:sp>
         <p:nvSpPr>
+          <p:cNvPr id="88" name="Rectangle 87"/>
+          <p:cNvSpPr/>
+          <p:nvPr/>
+        </p:nvSpPr>
+        <p:spPr>
+          <a:xfrm>
+            <a:off x="6263640" y="5532120"/>
+            <a:ext cx="54864" cy="320040"/>
+          </a:xfrm>
+          <a:prstGeom prst="rect">
+            <a:avLst/>
+          </a:prstGeom>
+          <a:solidFill>
+            <a:srgbClr val="C9A961"/>
+          </a:solidFill>
+          <a:ln>
+            <a:noFill/>
+          </a:ln>
+          <a:effectLst/>
+        </p:spPr>
+        <p:style>
+          <a:lnRef idx="1">
+            <a:schemeClr val="accent1"/>
+          </a:lnRef>
+          <a:fillRef idx="3">
+            <a:schemeClr val="accent1"/>
+          </a:fillRef>
+          <a:effectRef idx="2">
+            <a:schemeClr val="accent1"/>
+          </a:effectRef>
+          <a:fontRef idx="minor">
+            <a:schemeClr val="lt1"/>
+          </a:fontRef>
+        </p:style>
+        <p:txBody>
+          <a:bodyPr rtlCol="0" anchor="ctr"/>
+          <a:lstStyle/>
+          <a:p>
+            <a:pPr algn="ctr"/>
+          </a:p>
+        </p:txBody>
+      </p:sp>
+      <p:sp>
+        <p:nvSpPr>
           <p:cNvPr id="89" name="TextBox 88"/>
           <p:cNvSpPr txBox="1"/>
           <p:nvPr/>
         </p:nvSpPr>
         <p:spPr>
           <a:xfrm>
-            <a:off x="868680" y="5943600"/>
-            <a:ext cx="10607040" cy="228600"/>
+            <a:off x="6409944" y="5532120"/>
+            <a:ext cx="1828800" cy="320040"/>
+          </a:xfrm>
+          <a:prstGeom prst="rect">
+            <a:avLst/>
+          </a:prstGeom>
+          <a:noFill/>
+        </p:spPr>
+        <p:txBody>
+          <a:bodyPr wrap="square" lIns="0" rIns="0" tIns="0" bIns="0" anchor="ctr">
+            <a:spAutoFit/>
+          </a:bodyPr>
+          <a:lstStyle/>
+          <a:p>
+            <a:pPr algn="l">
+              <a:lnSpc>
+                <a:spcPct val="115000"/>
+              </a:lnSpc>
+            </a:pPr>
+            <a:r>
+              <a:rPr sz="850" b="1" i="0">
+                <a:solidFill>
+                  <a:srgbClr val="C9A961"/>
+                </a:solidFill>
+                <a:latin typeface="Calibri"/>
+              </a:rPr>
+              <a:t>  REAL KUMAMOTO FINDING</a:t>
+            </a:r>
+          </a:p>
+        </p:txBody>
+      </p:sp>
+      <p:sp>
+        <p:nvSpPr>
+          <p:cNvPr id="90" name="TextBox 89"/>
+          <p:cNvSpPr txBox="1"/>
+          <p:nvPr/>
+        </p:nvSpPr>
+        <p:spPr>
+          <a:xfrm>
+            <a:off x="8275320" y="5532120"/>
+            <a:ext cx="3364992" cy="320040"/>
+          </a:xfrm>
+          <a:prstGeom prst="rect">
+            <a:avLst/>
+          </a:prstGeom>
+          <a:noFill/>
+        </p:spPr>
+        <p:txBody>
+          <a:bodyPr wrap="square" lIns="0" rIns="0" tIns="0" bIns="0" anchor="ctr">
+            <a:spAutoFit/>
+          </a:bodyPr>
+          <a:lstStyle/>
+          <a:p>
+            <a:pPr algn="l">
+              <a:lnSpc>
+                <a:spcPct val="115000"/>
+              </a:lnSpc>
+            </a:pPr>
+            <a:r>
+              <a:rPr sz="1000" b="1" i="0">
+                <a:solidFill>
+                  <a:srgbClr val="FFFFFF"/>
+                </a:solidFill>
+                <a:latin typeface="Calibri"/>
+              </a:rPr>
+              <a:t>Same forest patch — daytime cooling varies 3–5 °C by wind-corridor position</a:t>
+            </a:r>
+          </a:p>
+        </p:txBody>
+      </p:sp>
+      <p:sp>
+        <p:nvSpPr>
+          <p:cNvPr id="91" name="TextBox 90"/>
+          <p:cNvSpPr txBox="1"/>
+          <p:nvPr/>
+        </p:nvSpPr>
+        <p:spPr>
+          <a:xfrm>
+            <a:off x="868680" y="5641848"/>
+            <a:ext cx="4846320" cy="201168"/>
           </a:xfrm>
           <a:prstGeom prst="rect">
             <a:avLst/>
@@ -33686,6 +33983,89 @@
               </a:lnSpc>
             </a:pPr>
             <a:r>
+              <a:rPr sz="850" b="0" i="1">
+                <a:solidFill>
+                  <a:srgbClr val="8895A8"/>
+                </a:solidFill>
+                <a:latin typeface="Calibri"/>
+              </a:rPr>
+              <a:t>Methods validated in Sustainability (2024) &amp; Kumamoto book chapter  ·  + Utility Model Patent CN 210135674 U</a:t>
+            </a:r>
+          </a:p>
+        </p:txBody>
+      </p:sp>
+      <p:sp>
+        <p:nvSpPr>
+          <p:cNvPr id="92" name="Rectangle 91"/>
+          <p:cNvSpPr/>
+          <p:nvPr/>
+        </p:nvSpPr>
+        <p:spPr>
+          <a:xfrm>
+            <a:off x="685800" y="5897880"/>
+            <a:ext cx="10972800" cy="457200"/>
+          </a:xfrm>
+          <a:prstGeom prst="rect">
+            <a:avLst/>
+          </a:prstGeom>
+          <a:solidFill>
+            <a:srgbClr val="142E55"/>
+          </a:solidFill>
+          <a:ln>
+            <a:noFill/>
+          </a:ln>
+          <a:effectLst/>
+        </p:spPr>
+        <p:style>
+          <a:lnRef idx="1">
+            <a:schemeClr val="accent1"/>
+          </a:lnRef>
+          <a:fillRef idx="3">
+            <a:schemeClr val="accent1"/>
+          </a:fillRef>
+          <a:effectRef idx="2">
+            <a:schemeClr val="accent1"/>
+          </a:effectRef>
+          <a:fontRef idx="minor">
+            <a:schemeClr val="lt1"/>
+          </a:fontRef>
+        </p:style>
+        <p:txBody>
+          <a:bodyPr rtlCol="0" anchor="ctr"/>
+          <a:lstStyle/>
+          <a:p>
+            <a:pPr algn="ctr"/>
+          </a:p>
+        </p:txBody>
+      </p:sp>
+      <p:sp>
+        <p:nvSpPr>
+          <p:cNvPr id="93" name="TextBox 92"/>
+          <p:cNvSpPr txBox="1"/>
+          <p:nvPr/>
+        </p:nvSpPr>
+        <p:spPr>
+          <a:xfrm>
+            <a:off x="868680" y="5943600"/>
+            <a:ext cx="10607040" cy="228600"/>
+          </a:xfrm>
+          <a:prstGeom prst="rect">
+            <a:avLst/>
+          </a:prstGeom>
+          <a:noFill/>
+        </p:spPr>
+        <p:txBody>
+          <a:bodyPr wrap="square" lIns="0" rIns="0" tIns="0" bIns="0" anchor="t">
+            <a:spAutoFit/>
+          </a:bodyPr>
+          <a:lstStyle/>
+          <a:p>
+            <a:pPr algn="l">
+              <a:lnSpc>
+                <a:spcPct val="115000"/>
+              </a:lnSpc>
+            </a:pPr>
+            <a:r>
               <a:rPr sz="1000" b="1" i="0">
                 <a:solidFill>
                   <a:srgbClr val="C9A961"/>
@@ -33699,7 +34079,7 @@
       </p:sp>
       <p:sp>
         <p:nvSpPr>
-          <p:cNvPr id="90" name="TextBox 89"/>
+          <p:cNvPr id="94" name="TextBox 93"/>
           <p:cNvSpPr txBox="1"/>
           <p:nvPr/>
         </p:nvSpPr>
@@ -37485,7 +37865,7 @@
         <p:spPr>
           <a:xfrm>
             <a:off x="685800" y="6373368"/>
-            <a:ext cx="10972800" cy="91440"/>
+            <a:ext cx="7772400" cy="91440"/>
           </a:xfrm>
           <a:prstGeom prst="rect">
             <a:avLst/>
@@ -37511,6 +37891,45 @@
                 <a:latin typeface="Calibri"/>
               </a:rPr>
               <a:t>ONE CONTINUOUS LINE: building energy → indoor comfort → PM2.5 → urban heat → green infra → policy</a:t>
+            </a:r>
+          </a:p>
+        </p:txBody>
+      </p:sp>
+      <p:sp>
+        <p:nvSpPr>
+          <p:cNvPr id="93" name="TextBox 92"/>
+          <p:cNvSpPr txBox="1"/>
+          <p:nvPr/>
+        </p:nvSpPr>
+        <p:spPr>
+          <a:xfrm>
+            <a:off x="8503920" y="6373368"/>
+            <a:ext cx="3200400" cy="91440"/>
+          </a:xfrm>
+          <a:prstGeom prst="rect">
+            <a:avLst/>
+          </a:prstGeom>
+          <a:noFill/>
+        </p:spPr>
+        <p:txBody>
+          <a:bodyPr wrap="square" lIns="0" rIns="0" tIns="0" bIns="0" anchor="t">
+            <a:spAutoFit/>
+          </a:bodyPr>
+          <a:lstStyle/>
+          <a:p>
+            <a:pPr algn="r">
+              <a:lnSpc>
+                <a:spcPct val="115000"/>
+              </a:lnSpc>
+            </a:pPr>
+            <a:r>
+              <a:rPr sz="800" b="0" i="1">
+                <a:solidFill>
+                  <a:srgbClr val="8895A8"/>
+                </a:solidFill>
+                <a:latin typeface="Calibri"/>
+              </a:rPr>
+              <a:t>ORCID 0000-0001-7378-5265  ·  ResearcherID 51035663</a:t>
             </a:r>
           </a:p>
         </p:txBody>
@@ -38543,47 +38962,8 @@
         </p:nvSpPr>
         <p:spPr>
           <a:xfrm>
-            <a:off x="1554480" y="1691640"/>
-            <a:ext cx="2788920" cy="502920"/>
-          </a:xfrm>
-          <a:prstGeom prst="rect">
-            <a:avLst/>
-          </a:prstGeom>
-          <a:noFill/>
-        </p:spPr>
-        <p:txBody>
-          <a:bodyPr wrap="square" lIns="0" rIns="0" tIns="0" bIns="0" anchor="ctr">
-            <a:spAutoFit/>
-          </a:bodyPr>
-          <a:lstStyle/>
-          <a:p>
-            <a:pPr algn="l">
-              <a:lnSpc>
-                <a:spcPct val="115000"/>
-              </a:lnSpc>
-            </a:pPr>
-            <a:r>
-              <a:rPr sz="1150" b="1" i="0">
-                <a:solidFill>
-                  <a:srgbClr val="C9A961"/>
-                </a:solidFill>
-                <a:latin typeface="Calibri"/>
-              </a:rPr>
-              <a:t>SAKURA SCIENCE PROGRAM</a:t>
-            </a:r>
-          </a:p>
-        </p:txBody>
-      </p:sp>
-      <p:sp>
-        <p:nvSpPr>
-          <p:cNvPr id="29" name="TextBox 28"/>
-          <p:cNvSpPr txBox="1"/>
-          <p:nvPr/>
-        </p:nvSpPr>
-        <p:spPr>
-          <a:xfrm>
-            <a:off x="914400" y="2468880"/>
-            <a:ext cx="3337560" cy="1280160"/>
+            <a:off x="1554480" y="1728216"/>
+            <a:ext cx="2788920" cy="274320"/>
           </a:xfrm>
           <a:prstGeom prst="rect">
             <a:avLst/>
@@ -38598,6 +38978,84 @@
           <a:p>
             <a:pPr algn="l">
               <a:lnSpc>
+                <a:spcPct val="115000"/>
+              </a:lnSpc>
+            </a:pPr>
+            <a:r>
+              <a:rPr sz="1100" b="1" i="0">
+                <a:solidFill>
+                  <a:srgbClr val="C9A961"/>
+                </a:solidFill>
+                <a:latin typeface="Calibri"/>
+              </a:rPr>
+              <a:t>SAKURA SCIENCE PROGRAM</a:t>
+            </a:r>
+          </a:p>
+        </p:txBody>
+      </p:sp>
+      <p:sp>
+        <p:nvSpPr>
+          <p:cNvPr id="29" name="TextBox 28"/>
+          <p:cNvSpPr txBox="1"/>
+          <p:nvPr/>
+        </p:nvSpPr>
+        <p:spPr>
+          <a:xfrm>
+            <a:off x="1554480" y="1984248"/>
+            <a:ext cx="2788920" cy="201168"/>
+          </a:xfrm>
+          <a:prstGeom prst="rect">
+            <a:avLst/>
+          </a:prstGeom>
+          <a:noFill/>
+        </p:spPr>
+        <p:txBody>
+          <a:bodyPr wrap="square" lIns="0" rIns="0" tIns="0" bIns="0" anchor="t">
+            <a:spAutoFit/>
+          </a:bodyPr>
+          <a:lstStyle/>
+          <a:p>
+            <a:pPr algn="l">
+              <a:lnSpc>
+                <a:spcPct val="115000"/>
+              </a:lnSpc>
+            </a:pPr>
+            <a:r>
+              <a:rPr sz="850" b="0" i="1">
+                <a:solidFill>
+                  <a:srgbClr val="E4D29D"/>
+                </a:solidFill>
+                <a:latin typeface="Calibri"/>
+              </a:rPr>
+              <a:t>2019–2020</a:t>
+            </a:r>
+          </a:p>
+        </p:txBody>
+      </p:sp>
+      <p:sp>
+        <p:nvSpPr>
+          <p:cNvPr id="30" name="TextBox 29"/>
+          <p:cNvSpPr txBox="1"/>
+          <p:nvPr/>
+        </p:nvSpPr>
+        <p:spPr>
+          <a:xfrm>
+            <a:off x="914400" y="2468880"/>
+            <a:ext cx="3337560" cy="1280160"/>
+          </a:xfrm>
+          <a:prstGeom prst="rect">
+            <a:avLst/>
+          </a:prstGeom>
+          <a:noFill/>
+        </p:spPr>
+        <p:txBody>
+          <a:bodyPr wrap="square" lIns="0" rIns="0" tIns="0" bIns="0" anchor="t">
+            <a:spAutoFit/>
+          </a:bodyPr>
+          <a:lstStyle/>
+          <a:p>
+            <a:pPr algn="l">
+              <a:lnSpc>
                 <a:spcPct val="140000"/>
               </a:lnSpc>
             </a:pPr>
@@ -38647,7 +39105,7 @@
       </p:sp>
       <p:sp>
         <p:nvSpPr>
-          <p:cNvPr id="30" name="Rectangle 29"/>
+          <p:cNvPr id="31" name="Rectangle 30"/>
           <p:cNvSpPr/>
           <p:nvPr/>
         </p:nvSpPr>
@@ -38691,7 +39149,7 @@
       </p:sp>
       <p:sp>
         <p:nvSpPr>
-          <p:cNvPr id="31" name="TextBox 30"/>
+          <p:cNvPr id="32" name="TextBox 31"/>
           <p:cNvSpPr txBox="1"/>
           <p:nvPr/>
         </p:nvSpPr>
@@ -38746,7 +39204,7 @@
       </p:sp>
       <p:sp>
         <p:nvSpPr>
-          <p:cNvPr id="32" name="Rectangle 31"/>
+          <p:cNvPr id="33" name="Rectangle 32"/>
           <p:cNvSpPr/>
           <p:nvPr/>
         </p:nvSpPr>
@@ -38792,7 +39250,7 @@
       </p:sp>
       <p:sp>
         <p:nvSpPr>
-          <p:cNvPr id="33" name="Rectangle 32"/>
+          <p:cNvPr id="34" name="Rectangle 33"/>
           <p:cNvSpPr/>
           <p:nvPr/>
         </p:nvSpPr>
@@ -38836,7 +39294,7 @@
       </p:sp>
       <p:sp>
         <p:nvSpPr>
-          <p:cNvPr id="34" name="TextBox 33"/>
+          <p:cNvPr id="35" name="TextBox 34"/>
           <p:cNvSpPr txBox="1"/>
           <p:nvPr/>
         </p:nvSpPr>
@@ -38875,53 +39333,14 @@
       </p:sp>
       <p:sp>
         <p:nvSpPr>
-          <p:cNvPr id="35" name="TextBox 34"/>
-          <p:cNvSpPr txBox="1"/>
-          <p:nvPr/>
-        </p:nvSpPr>
-        <p:spPr>
-          <a:xfrm>
-            <a:off x="5349240" y="1691640"/>
-            <a:ext cx="2788920" cy="502920"/>
-          </a:xfrm>
-          <a:prstGeom prst="rect">
-            <a:avLst/>
-          </a:prstGeom>
-          <a:noFill/>
-        </p:spPr>
-        <p:txBody>
-          <a:bodyPr wrap="square" lIns="0" rIns="0" tIns="0" bIns="0" anchor="ctr">
-            <a:spAutoFit/>
-          </a:bodyPr>
-          <a:lstStyle/>
-          <a:p>
-            <a:pPr algn="l">
-              <a:lnSpc>
-                <a:spcPct val="115000"/>
-              </a:lnSpc>
-            </a:pPr>
-            <a:r>
-              <a:rPr sz="1150" b="1" i="0">
-                <a:solidFill>
-                  <a:srgbClr val="C9A961"/>
-                </a:solidFill>
-                <a:latin typeface="Calibri"/>
-              </a:rPr>
-              <a:t>ZHEJIANG CARBON-NEUTRAL CENTER</a:t>
-            </a:r>
-          </a:p>
-        </p:txBody>
-      </p:sp>
-      <p:sp>
-        <p:nvSpPr>
           <p:cNvPr id="36" name="TextBox 35"/>
           <p:cNvSpPr txBox="1"/>
           <p:nvPr/>
         </p:nvSpPr>
         <p:spPr>
           <a:xfrm>
-            <a:off x="4709160" y="2468880"/>
-            <a:ext cx="3337560" cy="1280160"/>
+            <a:off x="5349240" y="1728216"/>
+            <a:ext cx="2788920" cy="274320"/>
           </a:xfrm>
           <a:prstGeom prst="rect">
             <a:avLst/>
@@ -38936,6 +39355,84 @@
           <a:p>
             <a:pPr algn="l">
               <a:lnSpc>
+                <a:spcPct val="115000"/>
+              </a:lnSpc>
+            </a:pPr>
+            <a:r>
+              <a:rPr sz="1100" b="1" i="0">
+                <a:solidFill>
+                  <a:srgbClr val="C9A961"/>
+                </a:solidFill>
+                <a:latin typeface="Calibri"/>
+              </a:rPr>
+              <a:t>ZHEJIANG CARBON-NEUTRAL CENTER</a:t>
+            </a:r>
+          </a:p>
+        </p:txBody>
+      </p:sp>
+      <p:sp>
+        <p:nvSpPr>
+          <p:cNvPr id="37" name="TextBox 36"/>
+          <p:cNvSpPr txBox="1"/>
+          <p:nvPr/>
+        </p:nvSpPr>
+        <p:spPr>
+          <a:xfrm>
+            <a:off x="5349240" y="1984248"/>
+            <a:ext cx="2788920" cy="201168"/>
+          </a:xfrm>
+          <a:prstGeom prst="rect">
+            <a:avLst/>
+          </a:prstGeom>
+          <a:noFill/>
+        </p:spPr>
+        <p:txBody>
+          <a:bodyPr wrap="square" lIns="0" rIns="0" tIns="0" bIns="0" anchor="t">
+            <a:spAutoFit/>
+          </a:bodyPr>
+          <a:lstStyle/>
+          <a:p>
+            <a:pPr algn="l">
+              <a:lnSpc>
+                <a:spcPct val="115000"/>
+              </a:lnSpc>
+            </a:pPr>
+            <a:r>
+              <a:rPr sz="850" b="0" i="1">
+                <a:solidFill>
+                  <a:srgbClr val="E4D29D"/>
+                </a:solidFill>
+                <a:latin typeface="Calibri"/>
+              </a:rPr>
+              <a:t>2021–2022</a:t>
+            </a:r>
+          </a:p>
+        </p:txBody>
+      </p:sp>
+      <p:sp>
+        <p:nvSpPr>
+          <p:cNvPr id="38" name="TextBox 37"/>
+          <p:cNvSpPr txBox="1"/>
+          <p:nvPr/>
+        </p:nvSpPr>
+        <p:spPr>
+          <a:xfrm>
+            <a:off x="4709160" y="2468880"/>
+            <a:ext cx="3337560" cy="1280160"/>
+          </a:xfrm>
+          <a:prstGeom prst="rect">
+            <a:avLst/>
+          </a:prstGeom>
+          <a:noFill/>
+        </p:spPr>
+        <p:txBody>
+          <a:bodyPr wrap="square" lIns="0" rIns="0" tIns="0" bIns="0" anchor="t">
+            <a:spAutoFit/>
+          </a:bodyPr>
+          <a:lstStyle/>
+          <a:p>
+            <a:pPr algn="l">
+              <a:lnSpc>
                 <a:spcPct val="140000"/>
               </a:lnSpc>
             </a:pPr>
@@ -38985,7 +39482,7 @@
       </p:sp>
       <p:sp>
         <p:nvSpPr>
-          <p:cNvPr id="37" name="Rectangle 36"/>
+          <p:cNvPr id="39" name="Rectangle 38"/>
           <p:cNvSpPr/>
           <p:nvPr/>
         </p:nvSpPr>
@@ -39029,7 +39526,7 @@
       </p:sp>
       <p:sp>
         <p:nvSpPr>
-          <p:cNvPr id="38" name="TextBox 37"/>
+          <p:cNvPr id="40" name="TextBox 39"/>
           <p:cNvSpPr txBox="1"/>
           <p:nvPr/>
         </p:nvSpPr>
@@ -39084,7 +39581,7 @@
       </p:sp>
       <p:sp>
         <p:nvSpPr>
-          <p:cNvPr id="39" name="Rectangle 38"/>
+          <p:cNvPr id="41" name="Rectangle 40"/>
           <p:cNvSpPr/>
           <p:nvPr/>
         </p:nvSpPr>
@@ -39130,7 +39627,7 @@
       </p:sp>
       <p:sp>
         <p:nvSpPr>
-          <p:cNvPr id="40" name="Rectangle 39"/>
+          <p:cNvPr id="42" name="Rectangle 41"/>
           <p:cNvSpPr/>
           <p:nvPr/>
         </p:nvSpPr>
@@ -39174,7 +39671,7 @@
       </p:sp>
       <p:sp>
         <p:nvSpPr>
-          <p:cNvPr id="41" name="TextBox 40"/>
+          <p:cNvPr id="43" name="TextBox 42"/>
           <p:cNvSpPr txBox="1"/>
           <p:nvPr/>
         </p:nvSpPr>
@@ -39213,53 +39710,14 @@
       </p:sp>
       <p:sp>
         <p:nvSpPr>
-          <p:cNvPr id="42" name="TextBox 41"/>
+          <p:cNvPr id="44" name="TextBox 43"/>
           <p:cNvSpPr txBox="1"/>
           <p:nvPr/>
         </p:nvSpPr>
         <p:spPr>
           <a:xfrm>
-            <a:off x="9144000" y="1691640"/>
-            <a:ext cx="2788920" cy="502920"/>
-          </a:xfrm>
-          <a:prstGeom prst="rect">
-            <a:avLst/>
-          </a:prstGeom>
-          <a:noFill/>
-        </p:spPr>
-        <p:txBody>
-          <a:bodyPr wrap="square" lIns="0" rIns="0" tIns="0" bIns="0" anchor="ctr">
-            <a:spAutoFit/>
-          </a:bodyPr>
-          <a:lstStyle/>
-          <a:p>
-            <a:pPr algn="l">
-              <a:lnSpc>
-                <a:spcPct val="115000"/>
-              </a:lnSpc>
-            </a:pPr>
-            <a:r>
-              <a:rPr sz="1150" b="1" i="0">
-                <a:solidFill>
-                  <a:srgbClr val="C9A961"/>
-                </a:solidFill>
-                <a:latin typeface="Calibri"/>
-              </a:rPr>
-              <a:t>5-COUNTRY ONLINE FORUM</a:t>
-            </a:r>
-          </a:p>
-        </p:txBody>
-      </p:sp>
-      <p:sp>
-        <p:nvSpPr>
-          <p:cNvPr id="43" name="TextBox 42"/>
-          <p:cNvSpPr txBox="1"/>
-          <p:nvPr/>
-        </p:nvSpPr>
-        <p:spPr>
-          <a:xfrm>
-            <a:off x="8503920" y="2468880"/>
-            <a:ext cx="3337560" cy="1280160"/>
+            <a:off x="9144000" y="1728216"/>
+            <a:ext cx="2788920" cy="274320"/>
           </a:xfrm>
           <a:prstGeom prst="rect">
             <a:avLst/>
@@ -39274,6 +39732,84 @@
           <a:p>
             <a:pPr algn="l">
               <a:lnSpc>
+                <a:spcPct val="115000"/>
+              </a:lnSpc>
+            </a:pPr>
+            <a:r>
+              <a:rPr sz="1100" b="1" i="0">
+                <a:solidFill>
+                  <a:srgbClr val="C9A961"/>
+                </a:solidFill>
+                <a:latin typeface="Calibri"/>
+              </a:rPr>
+              <a:t>5-COUNTRY ONLINE FORUM</a:t>
+            </a:r>
+          </a:p>
+        </p:txBody>
+      </p:sp>
+      <p:sp>
+        <p:nvSpPr>
+          <p:cNvPr id="45" name="TextBox 44"/>
+          <p:cNvSpPr txBox="1"/>
+          <p:nvPr/>
+        </p:nvSpPr>
+        <p:spPr>
+          <a:xfrm>
+            <a:off x="9144000" y="1984248"/>
+            <a:ext cx="2788920" cy="201168"/>
+          </a:xfrm>
+          <a:prstGeom prst="rect">
+            <a:avLst/>
+          </a:prstGeom>
+          <a:noFill/>
+        </p:spPr>
+        <p:txBody>
+          <a:bodyPr wrap="square" lIns="0" rIns="0" tIns="0" bIns="0" anchor="t">
+            <a:spAutoFit/>
+          </a:bodyPr>
+          <a:lstStyle/>
+          <a:p>
+            <a:pPr algn="l">
+              <a:lnSpc>
+                <a:spcPct val="115000"/>
+              </a:lnSpc>
+            </a:pPr>
+            <a:r>
+              <a:rPr sz="850" b="0" i="1">
+                <a:solidFill>
+                  <a:srgbClr val="E4D29D"/>
+                </a:solidFill>
+                <a:latin typeface="Calibri"/>
+              </a:rPr>
+              <a:t>2022</a:t>
+            </a:r>
+          </a:p>
+        </p:txBody>
+      </p:sp>
+      <p:sp>
+        <p:nvSpPr>
+          <p:cNvPr id="46" name="TextBox 45"/>
+          <p:cNvSpPr txBox="1"/>
+          <p:nvPr/>
+        </p:nvSpPr>
+        <p:spPr>
+          <a:xfrm>
+            <a:off x="8503920" y="2468880"/>
+            <a:ext cx="3337560" cy="1280160"/>
+          </a:xfrm>
+          <a:prstGeom prst="rect">
+            <a:avLst/>
+          </a:prstGeom>
+          <a:noFill/>
+        </p:spPr>
+        <p:txBody>
+          <a:bodyPr wrap="square" lIns="0" rIns="0" tIns="0" bIns="0" anchor="t">
+            <a:spAutoFit/>
+          </a:bodyPr>
+          <a:lstStyle/>
+          <a:p>
+            <a:pPr algn="l">
+              <a:lnSpc>
                 <a:spcPct val="140000"/>
               </a:lnSpc>
             </a:pPr>
@@ -39323,7 +39859,7 @@
       </p:sp>
       <p:sp>
         <p:nvSpPr>
-          <p:cNvPr id="44" name="Rectangle 43"/>
+          <p:cNvPr id="47" name="Rectangle 46"/>
           <p:cNvSpPr/>
           <p:nvPr/>
         </p:nvSpPr>
@@ -39367,7 +39903,7 @@
       </p:sp>
       <p:sp>
         <p:nvSpPr>
-          <p:cNvPr id="45" name="TextBox 44"/>
+          <p:cNvPr id="48" name="TextBox 47"/>
           <p:cNvSpPr txBox="1"/>
           <p:nvPr/>
         </p:nvSpPr>
@@ -39422,7 +39958,7 @@
       </p:sp>
       <p:sp>
         <p:nvSpPr>
-          <p:cNvPr id="46" name="Rectangle 45"/>
+          <p:cNvPr id="49" name="Rectangle 48"/>
           <p:cNvSpPr/>
           <p:nvPr/>
         </p:nvSpPr>
@@ -39466,7 +40002,7 @@
       </p:sp>
       <p:sp>
         <p:nvSpPr>
-          <p:cNvPr id="47" name="Rectangle 46"/>
+          <p:cNvPr id="50" name="Rectangle 49"/>
           <p:cNvSpPr/>
           <p:nvPr/>
         </p:nvSpPr>
@@ -39510,7 +40046,7 @@
       </p:sp>
       <p:sp>
         <p:nvSpPr>
-          <p:cNvPr id="48" name="TextBox 47"/>
+          <p:cNvPr id="51" name="TextBox 50"/>
           <p:cNvSpPr txBox="1"/>
           <p:nvPr/>
         </p:nvSpPr>
@@ -39549,7 +40085,7 @@
       </p:sp>
       <p:sp>
         <p:nvSpPr>
-          <p:cNvPr id="49" name="TextBox 48"/>
+          <p:cNvPr id="52" name="TextBox 51"/>
           <p:cNvSpPr txBox="1"/>
           <p:nvPr/>
         </p:nvSpPr>
@@ -39588,7 +40124,7 @@
       </p:sp>
       <p:sp>
         <p:nvSpPr>
-          <p:cNvPr id="50" name="Rectangle 49"/>
+          <p:cNvPr id="53" name="Rectangle 52"/>
           <p:cNvSpPr/>
           <p:nvPr/>
         </p:nvSpPr>
@@ -39634,7 +40170,7 @@
       </p:sp>
       <p:cxnSp>
         <p:nvCxnSpPr>
-          <p:cNvPr id="51" name="Connector 50"/>
+          <p:cNvPr id="54" name="Connector 53"/>
           <p:cNvCxnSpPr/>
           <p:nvPr/>
         </p:nvCxnSpPr>
@@ -39669,7 +40205,7 @@
       </p:cxnSp>
       <p:sp>
         <p:nvSpPr>
-          <p:cNvPr id="52" name="TextBox 51"/>
+          <p:cNvPr id="55" name="TextBox 54"/>
           <p:cNvSpPr txBox="1"/>
           <p:nvPr/>
         </p:nvSpPr>
@@ -39708,7 +40244,7 @@
       </p:sp>
       <p:sp>
         <p:nvSpPr>
-          <p:cNvPr id="53" name="Rectangle 52"/>
+          <p:cNvPr id="56" name="Rectangle 55"/>
           <p:cNvSpPr/>
           <p:nvPr/>
         </p:nvSpPr>
@@ -39752,7 +40288,7 @@
       </p:sp>
       <p:sp>
         <p:nvSpPr>
-          <p:cNvPr id="54" name="TextBox 53"/>
+          <p:cNvPr id="57" name="TextBox 56"/>
           <p:cNvSpPr txBox="1"/>
           <p:nvPr/>
         </p:nvSpPr>
@@ -39791,7 +40327,7 @@
       </p:sp>
       <p:cxnSp>
         <p:nvCxnSpPr>
-          <p:cNvPr id="55" name="Connector 54"/>
+          <p:cNvPr id="58" name="Connector 57"/>
           <p:cNvCxnSpPr/>
           <p:nvPr/>
         </p:nvCxnSpPr>
@@ -39827,7 +40363,7 @@
       </p:cxnSp>
       <p:sp>
         <p:nvSpPr>
-          <p:cNvPr id="56" name="Rectangle 55"/>
+          <p:cNvPr id="59" name="Rectangle 58"/>
           <p:cNvSpPr/>
           <p:nvPr/>
         </p:nvSpPr>
@@ -39873,7 +40409,7 @@
       </p:sp>
       <p:sp>
         <p:nvSpPr>
-          <p:cNvPr id="57" name="TextBox 56"/>
+          <p:cNvPr id="60" name="TextBox 59"/>
           <p:cNvSpPr txBox="1"/>
           <p:nvPr/>
         </p:nvSpPr>
@@ -39912,7 +40448,7 @@
       </p:sp>
       <p:sp>
         <p:nvSpPr>
-          <p:cNvPr id="58" name="TextBox 57"/>
+          <p:cNvPr id="61" name="TextBox 60"/>
           <p:cNvSpPr txBox="1"/>
           <p:nvPr/>
         </p:nvSpPr>
@@ -39951,7 +40487,7 @@
       </p:sp>
       <p:cxnSp>
         <p:nvCxnSpPr>
-          <p:cNvPr id="59" name="Connector 58"/>
+          <p:cNvPr id="62" name="Connector 61"/>
           <p:cNvCxnSpPr/>
           <p:nvPr/>
         </p:nvCxnSpPr>
@@ -39987,7 +40523,7 @@
       </p:cxnSp>
       <p:sp>
         <p:nvSpPr>
-          <p:cNvPr id="60" name="Rectangle 59"/>
+          <p:cNvPr id="63" name="Rectangle 62"/>
           <p:cNvSpPr/>
           <p:nvPr/>
         </p:nvSpPr>
@@ -40033,7 +40569,7 @@
       </p:sp>
       <p:sp>
         <p:nvSpPr>
-          <p:cNvPr id="61" name="TextBox 60"/>
+          <p:cNvPr id="64" name="TextBox 63"/>
           <p:cNvSpPr txBox="1"/>
           <p:nvPr/>
         </p:nvSpPr>
@@ -40072,7 +40608,7 @@
       </p:sp>
       <p:sp>
         <p:nvSpPr>
-          <p:cNvPr id="62" name="TextBox 61"/>
+          <p:cNvPr id="65" name="TextBox 64"/>
           <p:cNvSpPr txBox="1"/>
           <p:nvPr/>
         </p:nvSpPr>
@@ -40111,7 +40647,7 @@
       </p:sp>
       <p:cxnSp>
         <p:nvCxnSpPr>
-          <p:cNvPr id="63" name="Connector 62"/>
+          <p:cNvPr id="66" name="Connector 65"/>
           <p:cNvCxnSpPr/>
           <p:nvPr/>
         </p:nvCxnSpPr>
@@ -40147,7 +40683,7 @@
       </p:cxnSp>
       <p:sp>
         <p:nvSpPr>
-          <p:cNvPr id="64" name="Rectangle 63"/>
+          <p:cNvPr id="67" name="Rectangle 66"/>
           <p:cNvSpPr/>
           <p:nvPr/>
         </p:nvSpPr>
@@ -40193,7 +40729,7 @@
       </p:sp>
       <p:sp>
         <p:nvSpPr>
-          <p:cNvPr id="65" name="TextBox 64"/>
+          <p:cNvPr id="68" name="TextBox 67"/>
           <p:cNvSpPr txBox="1"/>
           <p:nvPr/>
         </p:nvSpPr>
@@ -40232,7 +40768,7 @@
       </p:sp>
       <p:sp>
         <p:nvSpPr>
-          <p:cNvPr id="66" name="TextBox 65"/>
+          <p:cNvPr id="69" name="TextBox 68"/>
           <p:cNvSpPr txBox="1"/>
           <p:nvPr/>
         </p:nvSpPr>
@@ -40271,7 +40807,7 @@
       </p:sp>
       <p:cxnSp>
         <p:nvCxnSpPr>
-          <p:cNvPr id="67" name="Connector 66"/>
+          <p:cNvPr id="70" name="Connector 69"/>
           <p:cNvCxnSpPr/>
           <p:nvPr/>
         </p:nvCxnSpPr>
@@ -40307,7 +40843,7 @@
       </p:cxnSp>
       <p:sp>
         <p:nvSpPr>
-          <p:cNvPr id="68" name="Rectangle 67"/>
+          <p:cNvPr id="71" name="Rectangle 70"/>
           <p:cNvSpPr/>
           <p:nvPr/>
         </p:nvSpPr>
@@ -40353,7 +40889,7 @@
       </p:sp>
       <p:sp>
         <p:nvSpPr>
-          <p:cNvPr id="69" name="TextBox 68"/>
+          <p:cNvPr id="72" name="TextBox 71"/>
           <p:cNvSpPr txBox="1"/>
           <p:nvPr/>
         </p:nvSpPr>
@@ -40392,7 +40928,7 @@
       </p:sp>
       <p:sp>
         <p:nvSpPr>
-          <p:cNvPr id="70" name="TextBox 69"/>
+          <p:cNvPr id="73" name="TextBox 72"/>
           <p:cNvSpPr txBox="1"/>
           <p:nvPr/>
         </p:nvSpPr>
@@ -41536,7 +42072,7 @@
                 </a:solidFill>
                 <a:latin typeface="Calibri"/>
               </a:rPr>
-              <a:t>8 projects  ·  5 as Leading Researcher</a:t>
+              <a:t>8 projects · 5 as Leading Researcher</a:t>
             </a:r>
           </a:p>
           <a:p>
@@ -41552,7 +42088,7 @@
                 </a:solidFill>
                 <a:latin typeface="Calibri"/>
               </a:rPr>
-              <a:t>Including NSSFC General Project</a:t>
+              <a:t>NSSFC General Project (collaborator)</a:t>
             </a:r>
           </a:p>
           <a:p>
@@ -41568,7 +42104,23 @@
                 </a:solidFill>
                 <a:latin typeface="Calibri"/>
               </a:rPr>
-              <a:t>(collaborator)</a:t>
+              <a:t>Hangzhou Public Spaces ¥12 M PI</a:t>
+            </a:r>
+          </a:p>
+          <a:p>
+            <a:pPr algn="l">
+              <a:lnSpc>
+                <a:spcPct val="140000"/>
+              </a:lnSpc>
+            </a:pPr>
+            <a:r>
+              <a:rPr sz="1200" b="0" i="0">
+                <a:solidFill>
+                  <a:srgbClr val="FFFFFF"/>
+                </a:solidFill>
+                <a:latin typeface="Calibri"/>
+              </a:rPr>
+              <a:t>ZSTU Start-up + Carbon Neutrality</a:t>
             </a:r>
           </a:p>
         </p:txBody>
@@ -41828,6 +42380,22 @@
                 </a:solidFill>
                 <a:latin typeface="Calibri"/>
               </a:rPr>
+              <a:t>Institute of Policy Research</a:t>
+            </a:r>
+          </a:p>
+          <a:p>
+            <a:pPr algn="l">
+              <a:lnSpc>
+                <a:spcPct val="140000"/>
+              </a:lnSpc>
+            </a:pPr>
+            <a:r>
+              <a:rPr sz="1200" b="0" i="0">
+                <a:solidFill>
+                  <a:srgbClr val="142E55"/>
+                </a:solidFill>
+                <a:latin typeface="Calibri"/>
+              </a:rPr>
               <a:t>Institutional rule:</a:t>
             </a:r>
           </a:p>
@@ -41860,7 +42428,7 @@
                 </a:solidFill>
                 <a:latin typeface="Calibri"/>
               </a:rPr>
-              <a:t>not permitted</a:t>
+              <a:t>not permitted from this post</a:t>
             </a:r>
           </a:p>
         </p:txBody>
@@ -42152,7 +42720,23 @@
                 </a:solidFill>
                 <a:latin typeface="Calibri"/>
               </a:rPr>
-              <a:t>research program (4 selected)</a:t>
+              <a:t>research program</a:t>
+            </a:r>
+          </a:p>
+          <a:p>
+            <a:pPr algn="l">
+              <a:lnSpc>
+                <a:spcPct val="140000"/>
+              </a:lnSpc>
+            </a:pPr>
+            <a:r>
+              <a:rPr sz="1200" b="0" i="0">
+                <a:solidFill>
+                  <a:srgbClr val="FFFFFF"/>
+                </a:solidFill>
+                <a:latin typeface="Calibri"/>
+              </a:rPr>
+              <a:t>(4 selected, within months)</a:t>
             </a:r>
           </a:p>
         </p:txBody>
